--- a/exports/pptx/lessons/middle-module-11-multiplication-near-base/day-02-deficits-from-ten.pptx
+++ b/exports/pptx/lessons/middle-module-11-multiplication-near-base/day-02-deficits-from-ten.pptx
@@ -16,9 +16,18 @@
     <p:sldId id="264" r:id="rId10"/>
     <p:sldId id="265" r:id="rId11"/>
     <p:sldId id="266" r:id="rId12"/>
+    <p:sldId id="267" r:id="rId13"/>
+    <p:sldId id="268" r:id="rId14"/>
+    <p:sldId id="269" r:id="rId15"/>
+    <p:sldId id="270" r:id="rId16"/>
+    <p:sldId id="271" r:id="rId17"/>
+    <p:sldId id="272" r:id="rId18"/>
+    <p:sldId id="273" r:id="rId19"/>
+    <p:sldId id="274" r:id="rId20"/>
+    <p:sldId id="275" r:id="rId21"/>
   </p:sldIdLst>
   <p:notesMasterIdLst>
-    <p:notesMasterId r:id="rId13"/>
+    <p:notesMasterId r:id="rId22"/>
   </p:notesMasterIdLst>
   <p:sldSz cx="9144000" cy="5143500"/>
   <p:notesSz cx="5143500" cy="9144000"/>
@@ -730,6 +739,710 @@
 </p:notes>
 </file>
 
+<file path=ppt/notesSlides/notesSlide12.xml><?xml version="1.0" encoding="utf-8"?>
+<p:notes xmlns:a="http://schemas.openxmlformats.org/drawingml/2006/main" xmlns:r="http://schemas.openxmlformats.org/officeDocument/2006/relationships" xmlns:p="http://schemas.openxmlformats.org/presentationml/2006/main">
+  <p:cSld>
+    <p:spTree>
+      <p:nvGrpSpPr>
+        <p:cNvPr id="1" name=""/>
+        <p:cNvGrpSpPr/>
+        <p:nvPr/>
+      </p:nvGrpSpPr>
+      <p:grpSpPr>
+        <a:xfrm>
+          <a:off x="0" y="0"/>
+          <a:ext cx="0" cy="0"/>
+          <a:chOff x="0" y="0"/>
+          <a:chExt cx="0" cy="0"/>
+        </a:xfrm>
+      </p:grpSpPr>
+      <p:sp>
+        <p:nvSpPr>
+          <p:cNvPr id="2" name="Slide Image Placeholder 1"/>
+          <p:cNvSpPr>
+            <a:spLocks noGrp="1" noRot="1" noChangeAspect="1"/>
+          </p:cNvSpPr>
+          <p:nvPr>
+            <p:ph type="sldImg"/>
+          </p:nvPr>
+        </p:nvSpPr>
+        <p:spPr/>
+      </p:sp>
+      <p:sp>
+        <p:nvSpPr>
+          <p:cNvPr id="3" name="Notes Placeholder 2"/>
+          <p:cNvSpPr>
+            <a:spLocks noGrp="1"/>
+          </p:cNvSpPr>
+          <p:nvPr>
+            <p:ph type="body" idx="1"/>
+          </p:nvPr>
+        </p:nvSpPr>
+        <p:spPr/>
+        <p:txBody>
+          <a:bodyPr/>
+          <a:lstStyle/>
+          <a:p>
+            <a:r>
+              <a:rPr lang="en-US" dirty="0"/>
+              <a:t/>
+            </a:r>
+            <a:endParaRPr lang="en-US" dirty="0"/>
+          </a:p>
+        </p:txBody>
+      </p:sp>
+      <p:sp>
+        <p:nvSpPr>
+          <p:cNvPr id="4" name="Slide Number Placeholder 3"/>
+          <p:cNvSpPr>
+            <a:spLocks noGrp="1"/>
+          </p:cNvSpPr>
+          <p:nvPr>
+            <p:ph type="sldNum" sz="quarter" idx="10"/>
+          </p:nvPr>
+        </p:nvSpPr>
+        <p:spPr/>
+        <p:txBody>
+          <a:bodyPr/>
+          <a:lstStyle/>
+          <a:p>
+            <a:fld id="{F7021451-1387-4CA6-816F-3879F97B5CBC}" type="slidenum">
+              <a:rPr lang="en-US"/>
+              <a:t>12</a:t>
+            </a:fld>
+            <a:endParaRPr lang="en-US"/>
+          </a:p>
+        </p:txBody>
+      </p:sp>
+    </p:spTree>
+    <p:extLst>
+      <p:ext uri="{BB962C8B-B14F-4D97-AF65-F5344CB8AC3E}">
+        <p14:creationId xmlns:p14="http://schemas.microsoft.com/office/powerpoint/2010/main" val="1024086991"/>
+      </p:ext>
+    </p:extLst>
+  </p:cSld>
+  <p:clrMapOvr>
+    <a:masterClrMapping/>
+  </p:clrMapOvr>
+</p:notes>
+</file>
+
+<file path=ppt/notesSlides/notesSlide13.xml><?xml version="1.0" encoding="utf-8"?>
+<p:notes xmlns:a="http://schemas.openxmlformats.org/drawingml/2006/main" xmlns:r="http://schemas.openxmlformats.org/officeDocument/2006/relationships" xmlns:p="http://schemas.openxmlformats.org/presentationml/2006/main">
+  <p:cSld>
+    <p:spTree>
+      <p:nvGrpSpPr>
+        <p:cNvPr id="1" name=""/>
+        <p:cNvGrpSpPr/>
+        <p:nvPr/>
+      </p:nvGrpSpPr>
+      <p:grpSpPr>
+        <a:xfrm>
+          <a:off x="0" y="0"/>
+          <a:ext cx="0" cy="0"/>
+          <a:chOff x="0" y="0"/>
+          <a:chExt cx="0" cy="0"/>
+        </a:xfrm>
+      </p:grpSpPr>
+      <p:sp>
+        <p:nvSpPr>
+          <p:cNvPr id="2" name="Slide Image Placeholder 1"/>
+          <p:cNvSpPr>
+            <a:spLocks noGrp="1" noRot="1" noChangeAspect="1"/>
+          </p:cNvSpPr>
+          <p:nvPr>
+            <p:ph type="sldImg"/>
+          </p:nvPr>
+        </p:nvSpPr>
+        <p:spPr/>
+      </p:sp>
+      <p:sp>
+        <p:nvSpPr>
+          <p:cNvPr id="3" name="Notes Placeholder 2"/>
+          <p:cNvSpPr>
+            <a:spLocks noGrp="1"/>
+          </p:cNvSpPr>
+          <p:nvPr>
+            <p:ph type="body" idx="1"/>
+          </p:nvPr>
+        </p:nvSpPr>
+        <p:spPr/>
+        <p:txBody>
+          <a:bodyPr/>
+          <a:lstStyle/>
+          <a:p>
+            <a:r>
+              <a:rPr lang="en-US" dirty="0"/>
+              <a:t/>
+            </a:r>
+            <a:endParaRPr lang="en-US" dirty="0"/>
+          </a:p>
+        </p:txBody>
+      </p:sp>
+      <p:sp>
+        <p:nvSpPr>
+          <p:cNvPr id="4" name="Slide Number Placeholder 3"/>
+          <p:cNvSpPr>
+            <a:spLocks noGrp="1"/>
+          </p:cNvSpPr>
+          <p:nvPr>
+            <p:ph type="sldNum" sz="quarter" idx="10"/>
+          </p:nvPr>
+        </p:nvSpPr>
+        <p:spPr/>
+        <p:txBody>
+          <a:bodyPr/>
+          <a:lstStyle/>
+          <a:p>
+            <a:fld id="{F7021451-1387-4CA6-816F-3879F97B5CBC}" type="slidenum">
+              <a:rPr lang="en-US"/>
+              <a:t>13</a:t>
+            </a:fld>
+            <a:endParaRPr lang="en-US"/>
+          </a:p>
+        </p:txBody>
+      </p:sp>
+    </p:spTree>
+    <p:extLst>
+      <p:ext uri="{BB962C8B-B14F-4D97-AF65-F5344CB8AC3E}">
+        <p14:creationId xmlns:p14="http://schemas.microsoft.com/office/powerpoint/2010/main" val="1024086991"/>
+      </p:ext>
+    </p:extLst>
+  </p:cSld>
+  <p:clrMapOvr>
+    <a:masterClrMapping/>
+  </p:clrMapOvr>
+</p:notes>
+</file>
+
+<file path=ppt/notesSlides/notesSlide14.xml><?xml version="1.0" encoding="utf-8"?>
+<p:notes xmlns:a="http://schemas.openxmlformats.org/drawingml/2006/main" xmlns:r="http://schemas.openxmlformats.org/officeDocument/2006/relationships" xmlns:p="http://schemas.openxmlformats.org/presentationml/2006/main">
+  <p:cSld>
+    <p:spTree>
+      <p:nvGrpSpPr>
+        <p:cNvPr id="1" name=""/>
+        <p:cNvGrpSpPr/>
+        <p:nvPr/>
+      </p:nvGrpSpPr>
+      <p:grpSpPr>
+        <a:xfrm>
+          <a:off x="0" y="0"/>
+          <a:ext cx="0" cy="0"/>
+          <a:chOff x="0" y="0"/>
+          <a:chExt cx="0" cy="0"/>
+        </a:xfrm>
+      </p:grpSpPr>
+      <p:sp>
+        <p:nvSpPr>
+          <p:cNvPr id="2" name="Slide Image Placeholder 1"/>
+          <p:cNvSpPr>
+            <a:spLocks noGrp="1" noRot="1" noChangeAspect="1"/>
+          </p:cNvSpPr>
+          <p:nvPr>
+            <p:ph type="sldImg"/>
+          </p:nvPr>
+        </p:nvSpPr>
+        <p:spPr/>
+      </p:sp>
+      <p:sp>
+        <p:nvSpPr>
+          <p:cNvPr id="3" name="Notes Placeholder 2"/>
+          <p:cNvSpPr>
+            <a:spLocks noGrp="1"/>
+          </p:cNvSpPr>
+          <p:nvPr>
+            <p:ph type="body" idx="1"/>
+          </p:nvPr>
+        </p:nvSpPr>
+        <p:spPr/>
+        <p:txBody>
+          <a:bodyPr/>
+          <a:lstStyle/>
+          <a:p>
+            <a:r>
+              <a:rPr lang="en-US" dirty="0"/>
+              <a:t/>
+            </a:r>
+            <a:endParaRPr lang="en-US" dirty="0"/>
+          </a:p>
+        </p:txBody>
+      </p:sp>
+      <p:sp>
+        <p:nvSpPr>
+          <p:cNvPr id="4" name="Slide Number Placeholder 3"/>
+          <p:cNvSpPr>
+            <a:spLocks noGrp="1"/>
+          </p:cNvSpPr>
+          <p:nvPr>
+            <p:ph type="sldNum" sz="quarter" idx="10"/>
+          </p:nvPr>
+        </p:nvSpPr>
+        <p:spPr/>
+        <p:txBody>
+          <a:bodyPr/>
+          <a:lstStyle/>
+          <a:p>
+            <a:fld id="{F7021451-1387-4CA6-816F-3879F97B5CBC}" type="slidenum">
+              <a:rPr lang="en-US"/>
+              <a:t>14</a:t>
+            </a:fld>
+            <a:endParaRPr lang="en-US"/>
+          </a:p>
+        </p:txBody>
+      </p:sp>
+    </p:spTree>
+    <p:extLst>
+      <p:ext uri="{BB962C8B-B14F-4D97-AF65-F5344CB8AC3E}">
+        <p14:creationId xmlns:p14="http://schemas.microsoft.com/office/powerpoint/2010/main" val="1024086991"/>
+      </p:ext>
+    </p:extLst>
+  </p:cSld>
+  <p:clrMapOvr>
+    <a:masterClrMapping/>
+  </p:clrMapOvr>
+</p:notes>
+</file>
+
+<file path=ppt/notesSlides/notesSlide15.xml><?xml version="1.0" encoding="utf-8"?>
+<p:notes xmlns:a="http://schemas.openxmlformats.org/drawingml/2006/main" xmlns:r="http://schemas.openxmlformats.org/officeDocument/2006/relationships" xmlns:p="http://schemas.openxmlformats.org/presentationml/2006/main">
+  <p:cSld>
+    <p:spTree>
+      <p:nvGrpSpPr>
+        <p:cNvPr id="1" name=""/>
+        <p:cNvGrpSpPr/>
+        <p:nvPr/>
+      </p:nvGrpSpPr>
+      <p:grpSpPr>
+        <a:xfrm>
+          <a:off x="0" y="0"/>
+          <a:ext cx="0" cy="0"/>
+          <a:chOff x="0" y="0"/>
+          <a:chExt cx="0" cy="0"/>
+        </a:xfrm>
+      </p:grpSpPr>
+      <p:sp>
+        <p:nvSpPr>
+          <p:cNvPr id="2" name="Slide Image Placeholder 1"/>
+          <p:cNvSpPr>
+            <a:spLocks noGrp="1" noRot="1" noChangeAspect="1"/>
+          </p:cNvSpPr>
+          <p:nvPr>
+            <p:ph type="sldImg"/>
+          </p:nvPr>
+        </p:nvSpPr>
+        <p:spPr/>
+      </p:sp>
+      <p:sp>
+        <p:nvSpPr>
+          <p:cNvPr id="3" name="Notes Placeholder 2"/>
+          <p:cNvSpPr>
+            <a:spLocks noGrp="1"/>
+          </p:cNvSpPr>
+          <p:nvPr>
+            <p:ph type="body" idx="1"/>
+          </p:nvPr>
+        </p:nvSpPr>
+        <p:spPr/>
+        <p:txBody>
+          <a:bodyPr/>
+          <a:lstStyle/>
+          <a:p>
+            <a:r>
+              <a:rPr lang="en-US" dirty="0"/>
+              <a:t/>
+            </a:r>
+            <a:endParaRPr lang="en-US" dirty="0"/>
+          </a:p>
+        </p:txBody>
+      </p:sp>
+      <p:sp>
+        <p:nvSpPr>
+          <p:cNvPr id="4" name="Slide Number Placeholder 3"/>
+          <p:cNvSpPr>
+            <a:spLocks noGrp="1"/>
+          </p:cNvSpPr>
+          <p:nvPr>
+            <p:ph type="sldNum" sz="quarter" idx="10"/>
+          </p:nvPr>
+        </p:nvSpPr>
+        <p:spPr/>
+        <p:txBody>
+          <a:bodyPr/>
+          <a:lstStyle/>
+          <a:p>
+            <a:fld id="{F7021451-1387-4CA6-816F-3879F97B5CBC}" type="slidenum">
+              <a:rPr lang="en-US"/>
+              <a:t>15</a:t>
+            </a:fld>
+            <a:endParaRPr lang="en-US"/>
+          </a:p>
+        </p:txBody>
+      </p:sp>
+    </p:spTree>
+    <p:extLst>
+      <p:ext uri="{BB962C8B-B14F-4D97-AF65-F5344CB8AC3E}">
+        <p14:creationId xmlns:p14="http://schemas.microsoft.com/office/powerpoint/2010/main" val="1024086991"/>
+      </p:ext>
+    </p:extLst>
+  </p:cSld>
+  <p:clrMapOvr>
+    <a:masterClrMapping/>
+  </p:clrMapOvr>
+</p:notes>
+</file>
+
+<file path=ppt/notesSlides/notesSlide16.xml><?xml version="1.0" encoding="utf-8"?>
+<p:notes xmlns:a="http://schemas.openxmlformats.org/drawingml/2006/main" xmlns:r="http://schemas.openxmlformats.org/officeDocument/2006/relationships" xmlns:p="http://schemas.openxmlformats.org/presentationml/2006/main">
+  <p:cSld>
+    <p:spTree>
+      <p:nvGrpSpPr>
+        <p:cNvPr id="1" name=""/>
+        <p:cNvGrpSpPr/>
+        <p:nvPr/>
+      </p:nvGrpSpPr>
+      <p:grpSpPr>
+        <a:xfrm>
+          <a:off x="0" y="0"/>
+          <a:ext cx="0" cy="0"/>
+          <a:chOff x="0" y="0"/>
+          <a:chExt cx="0" cy="0"/>
+        </a:xfrm>
+      </p:grpSpPr>
+      <p:sp>
+        <p:nvSpPr>
+          <p:cNvPr id="2" name="Slide Image Placeholder 1"/>
+          <p:cNvSpPr>
+            <a:spLocks noGrp="1" noRot="1" noChangeAspect="1"/>
+          </p:cNvSpPr>
+          <p:nvPr>
+            <p:ph type="sldImg"/>
+          </p:nvPr>
+        </p:nvSpPr>
+        <p:spPr/>
+      </p:sp>
+      <p:sp>
+        <p:nvSpPr>
+          <p:cNvPr id="3" name="Notes Placeholder 2"/>
+          <p:cNvSpPr>
+            <a:spLocks noGrp="1"/>
+          </p:cNvSpPr>
+          <p:nvPr>
+            <p:ph type="body" idx="1"/>
+          </p:nvPr>
+        </p:nvSpPr>
+        <p:spPr/>
+        <p:txBody>
+          <a:bodyPr/>
+          <a:lstStyle/>
+          <a:p>
+            <a:r>
+              <a:rPr lang="en-US" dirty="0"/>
+              <a:t/>
+            </a:r>
+            <a:endParaRPr lang="en-US" dirty="0"/>
+          </a:p>
+        </p:txBody>
+      </p:sp>
+      <p:sp>
+        <p:nvSpPr>
+          <p:cNvPr id="4" name="Slide Number Placeholder 3"/>
+          <p:cNvSpPr>
+            <a:spLocks noGrp="1"/>
+          </p:cNvSpPr>
+          <p:nvPr>
+            <p:ph type="sldNum" sz="quarter" idx="10"/>
+          </p:nvPr>
+        </p:nvSpPr>
+        <p:spPr/>
+        <p:txBody>
+          <a:bodyPr/>
+          <a:lstStyle/>
+          <a:p>
+            <a:fld id="{F7021451-1387-4CA6-816F-3879F97B5CBC}" type="slidenum">
+              <a:rPr lang="en-US"/>
+              <a:t>16</a:t>
+            </a:fld>
+            <a:endParaRPr lang="en-US"/>
+          </a:p>
+        </p:txBody>
+      </p:sp>
+    </p:spTree>
+    <p:extLst>
+      <p:ext uri="{BB962C8B-B14F-4D97-AF65-F5344CB8AC3E}">
+        <p14:creationId xmlns:p14="http://schemas.microsoft.com/office/powerpoint/2010/main" val="1024086991"/>
+      </p:ext>
+    </p:extLst>
+  </p:cSld>
+  <p:clrMapOvr>
+    <a:masterClrMapping/>
+  </p:clrMapOvr>
+</p:notes>
+</file>
+
+<file path=ppt/notesSlides/notesSlide17.xml><?xml version="1.0" encoding="utf-8"?>
+<p:notes xmlns:a="http://schemas.openxmlformats.org/drawingml/2006/main" xmlns:r="http://schemas.openxmlformats.org/officeDocument/2006/relationships" xmlns:p="http://schemas.openxmlformats.org/presentationml/2006/main">
+  <p:cSld>
+    <p:spTree>
+      <p:nvGrpSpPr>
+        <p:cNvPr id="1" name=""/>
+        <p:cNvGrpSpPr/>
+        <p:nvPr/>
+      </p:nvGrpSpPr>
+      <p:grpSpPr>
+        <a:xfrm>
+          <a:off x="0" y="0"/>
+          <a:ext cx="0" cy="0"/>
+          <a:chOff x="0" y="0"/>
+          <a:chExt cx="0" cy="0"/>
+        </a:xfrm>
+      </p:grpSpPr>
+      <p:sp>
+        <p:nvSpPr>
+          <p:cNvPr id="2" name="Slide Image Placeholder 1"/>
+          <p:cNvSpPr>
+            <a:spLocks noGrp="1" noRot="1" noChangeAspect="1"/>
+          </p:cNvSpPr>
+          <p:nvPr>
+            <p:ph type="sldImg"/>
+          </p:nvPr>
+        </p:nvSpPr>
+        <p:spPr/>
+      </p:sp>
+      <p:sp>
+        <p:nvSpPr>
+          <p:cNvPr id="3" name="Notes Placeholder 2"/>
+          <p:cNvSpPr>
+            <a:spLocks noGrp="1"/>
+          </p:cNvSpPr>
+          <p:nvPr>
+            <p:ph type="body" idx="1"/>
+          </p:nvPr>
+        </p:nvSpPr>
+        <p:spPr/>
+        <p:txBody>
+          <a:bodyPr/>
+          <a:lstStyle/>
+          <a:p>
+            <a:r>
+              <a:rPr lang="en-US" dirty="0"/>
+              <a:t/>
+            </a:r>
+            <a:endParaRPr lang="en-US" dirty="0"/>
+          </a:p>
+        </p:txBody>
+      </p:sp>
+      <p:sp>
+        <p:nvSpPr>
+          <p:cNvPr id="4" name="Slide Number Placeholder 3"/>
+          <p:cNvSpPr>
+            <a:spLocks noGrp="1"/>
+          </p:cNvSpPr>
+          <p:nvPr>
+            <p:ph type="sldNum" sz="quarter" idx="10"/>
+          </p:nvPr>
+        </p:nvSpPr>
+        <p:spPr/>
+        <p:txBody>
+          <a:bodyPr/>
+          <a:lstStyle/>
+          <a:p>
+            <a:fld id="{F7021451-1387-4CA6-816F-3879F97B5CBC}" type="slidenum">
+              <a:rPr lang="en-US"/>
+              <a:t>17</a:t>
+            </a:fld>
+            <a:endParaRPr lang="en-US"/>
+          </a:p>
+        </p:txBody>
+      </p:sp>
+    </p:spTree>
+    <p:extLst>
+      <p:ext uri="{BB962C8B-B14F-4D97-AF65-F5344CB8AC3E}">
+        <p14:creationId xmlns:p14="http://schemas.microsoft.com/office/powerpoint/2010/main" val="1024086991"/>
+      </p:ext>
+    </p:extLst>
+  </p:cSld>
+  <p:clrMapOvr>
+    <a:masterClrMapping/>
+  </p:clrMapOvr>
+</p:notes>
+</file>
+
+<file path=ppt/notesSlides/notesSlide18.xml><?xml version="1.0" encoding="utf-8"?>
+<p:notes xmlns:a="http://schemas.openxmlformats.org/drawingml/2006/main" xmlns:r="http://schemas.openxmlformats.org/officeDocument/2006/relationships" xmlns:p="http://schemas.openxmlformats.org/presentationml/2006/main">
+  <p:cSld>
+    <p:spTree>
+      <p:nvGrpSpPr>
+        <p:cNvPr id="1" name=""/>
+        <p:cNvGrpSpPr/>
+        <p:nvPr/>
+      </p:nvGrpSpPr>
+      <p:grpSpPr>
+        <a:xfrm>
+          <a:off x="0" y="0"/>
+          <a:ext cx="0" cy="0"/>
+          <a:chOff x="0" y="0"/>
+          <a:chExt cx="0" cy="0"/>
+        </a:xfrm>
+      </p:grpSpPr>
+      <p:sp>
+        <p:nvSpPr>
+          <p:cNvPr id="2" name="Slide Image Placeholder 1"/>
+          <p:cNvSpPr>
+            <a:spLocks noGrp="1" noRot="1" noChangeAspect="1"/>
+          </p:cNvSpPr>
+          <p:nvPr>
+            <p:ph type="sldImg"/>
+          </p:nvPr>
+        </p:nvSpPr>
+        <p:spPr/>
+      </p:sp>
+      <p:sp>
+        <p:nvSpPr>
+          <p:cNvPr id="3" name="Notes Placeholder 2"/>
+          <p:cNvSpPr>
+            <a:spLocks noGrp="1"/>
+          </p:cNvSpPr>
+          <p:nvPr>
+            <p:ph type="body" idx="1"/>
+          </p:nvPr>
+        </p:nvSpPr>
+        <p:spPr/>
+        <p:txBody>
+          <a:bodyPr/>
+          <a:lstStyle/>
+          <a:p>
+            <a:r>
+              <a:rPr lang="en-US" dirty="0"/>
+              <a:t/>
+            </a:r>
+            <a:endParaRPr lang="en-US" dirty="0"/>
+          </a:p>
+        </p:txBody>
+      </p:sp>
+      <p:sp>
+        <p:nvSpPr>
+          <p:cNvPr id="4" name="Slide Number Placeholder 3"/>
+          <p:cNvSpPr>
+            <a:spLocks noGrp="1"/>
+          </p:cNvSpPr>
+          <p:nvPr>
+            <p:ph type="sldNum" sz="quarter" idx="10"/>
+          </p:nvPr>
+        </p:nvSpPr>
+        <p:spPr/>
+        <p:txBody>
+          <a:bodyPr/>
+          <a:lstStyle/>
+          <a:p>
+            <a:fld id="{F7021451-1387-4CA6-816F-3879F97B5CBC}" type="slidenum">
+              <a:rPr lang="en-US"/>
+              <a:t>18</a:t>
+            </a:fld>
+            <a:endParaRPr lang="en-US"/>
+          </a:p>
+        </p:txBody>
+      </p:sp>
+    </p:spTree>
+    <p:extLst>
+      <p:ext uri="{BB962C8B-B14F-4D97-AF65-F5344CB8AC3E}">
+        <p14:creationId xmlns:p14="http://schemas.microsoft.com/office/powerpoint/2010/main" val="1024086991"/>
+      </p:ext>
+    </p:extLst>
+  </p:cSld>
+  <p:clrMapOvr>
+    <a:masterClrMapping/>
+  </p:clrMapOvr>
+</p:notes>
+</file>
+
+<file path=ppt/notesSlides/notesSlide19.xml><?xml version="1.0" encoding="utf-8"?>
+<p:notes xmlns:a="http://schemas.openxmlformats.org/drawingml/2006/main" xmlns:r="http://schemas.openxmlformats.org/officeDocument/2006/relationships" xmlns:p="http://schemas.openxmlformats.org/presentationml/2006/main">
+  <p:cSld>
+    <p:spTree>
+      <p:nvGrpSpPr>
+        <p:cNvPr id="1" name=""/>
+        <p:cNvGrpSpPr/>
+        <p:nvPr/>
+      </p:nvGrpSpPr>
+      <p:grpSpPr>
+        <a:xfrm>
+          <a:off x="0" y="0"/>
+          <a:ext cx="0" cy="0"/>
+          <a:chOff x="0" y="0"/>
+          <a:chExt cx="0" cy="0"/>
+        </a:xfrm>
+      </p:grpSpPr>
+      <p:sp>
+        <p:nvSpPr>
+          <p:cNvPr id="2" name="Slide Image Placeholder 1"/>
+          <p:cNvSpPr>
+            <a:spLocks noGrp="1" noRot="1" noChangeAspect="1"/>
+          </p:cNvSpPr>
+          <p:nvPr>
+            <p:ph type="sldImg"/>
+          </p:nvPr>
+        </p:nvSpPr>
+        <p:spPr/>
+      </p:sp>
+      <p:sp>
+        <p:nvSpPr>
+          <p:cNvPr id="3" name="Notes Placeholder 2"/>
+          <p:cNvSpPr>
+            <a:spLocks noGrp="1"/>
+          </p:cNvSpPr>
+          <p:nvPr>
+            <p:ph type="body" idx="1"/>
+          </p:nvPr>
+        </p:nvSpPr>
+        <p:spPr/>
+        <p:txBody>
+          <a:bodyPr/>
+          <a:lstStyle/>
+          <a:p>
+            <a:r>
+              <a:rPr lang="en-US" dirty="0"/>
+              <a:t/>
+            </a:r>
+            <a:endParaRPr lang="en-US" dirty="0"/>
+          </a:p>
+        </p:txBody>
+      </p:sp>
+      <p:sp>
+        <p:nvSpPr>
+          <p:cNvPr id="4" name="Slide Number Placeholder 3"/>
+          <p:cNvSpPr>
+            <a:spLocks noGrp="1"/>
+          </p:cNvSpPr>
+          <p:nvPr>
+            <p:ph type="sldNum" sz="quarter" idx="10"/>
+          </p:nvPr>
+        </p:nvSpPr>
+        <p:spPr/>
+        <p:txBody>
+          <a:bodyPr/>
+          <a:lstStyle/>
+          <a:p>
+            <a:fld id="{F7021451-1387-4CA6-816F-3879F97B5CBC}" type="slidenum">
+              <a:rPr lang="en-US"/>
+              <a:t>19</a:t>
+            </a:fld>
+            <a:endParaRPr lang="en-US"/>
+          </a:p>
+        </p:txBody>
+      </p:sp>
+    </p:spTree>
+    <p:extLst>
+      <p:ext uri="{BB962C8B-B14F-4D97-AF65-F5344CB8AC3E}">
+        <p14:creationId xmlns:p14="http://schemas.microsoft.com/office/powerpoint/2010/main" val="1024086991"/>
+      </p:ext>
+    </p:extLst>
+  </p:cSld>
+  <p:clrMapOvr>
+    <a:masterClrMapping/>
+  </p:clrMapOvr>
+</p:notes>
+</file>
+
 <file path=ppt/notesSlides/notesSlide2.xml><?xml version="1.0" encoding="utf-8"?>
 <p:notes xmlns:a="http://schemas.openxmlformats.org/drawingml/2006/main" xmlns:r="http://schemas.openxmlformats.org/officeDocument/2006/relationships" xmlns:p="http://schemas.openxmlformats.org/presentationml/2006/main">
   <p:cSld>
@@ -800,6 +1513,94 @@
             <a:fld id="{F7021451-1387-4CA6-816F-3879F97B5CBC}" type="slidenum">
               <a:rPr lang="en-US"/>
               <a:t>2</a:t>
+            </a:fld>
+            <a:endParaRPr lang="en-US"/>
+          </a:p>
+        </p:txBody>
+      </p:sp>
+    </p:spTree>
+    <p:extLst>
+      <p:ext uri="{BB962C8B-B14F-4D97-AF65-F5344CB8AC3E}">
+        <p14:creationId xmlns:p14="http://schemas.microsoft.com/office/powerpoint/2010/main" val="1024086991"/>
+      </p:ext>
+    </p:extLst>
+  </p:cSld>
+  <p:clrMapOvr>
+    <a:masterClrMapping/>
+  </p:clrMapOvr>
+</p:notes>
+</file>
+
+<file path=ppt/notesSlides/notesSlide20.xml><?xml version="1.0" encoding="utf-8"?>
+<p:notes xmlns:a="http://schemas.openxmlformats.org/drawingml/2006/main" xmlns:r="http://schemas.openxmlformats.org/officeDocument/2006/relationships" xmlns:p="http://schemas.openxmlformats.org/presentationml/2006/main">
+  <p:cSld>
+    <p:spTree>
+      <p:nvGrpSpPr>
+        <p:cNvPr id="1" name=""/>
+        <p:cNvGrpSpPr/>
+        <p:nvPr/>
+      </p:nvGrpSpPr>
+      <p:grpSpPr>
+        <a:xfrm>
+          <a:off x="0" y="0"/>
+          <a:ext cx="0" cy="0"/>
+          <a:chOff x="0" y="0"/>
+          <a:chExt cx="0" cy="0"/>
+        </a:xfrm>
+      </p:grpSpPr>
+      <p:sp>
+        <p:nvSpPr>
+          <p:cNvPr id="2" name="Slide Image Placeholder 1"/>
+          <p:cNvSpPr>
+            <a:spLocks noGrp="1" noRot="1" noChangeAspect="1"/>
+          </p:cNvSpPr>
+          <p:nvPr>
+            <p:ph type="sldImg"/>
+          </p:nvPr>
+        </p:nvSpPr>
+        <p:spPr/>
+      </p:sp>
+      <p:sp>
+        <p:nvSpPr>
+          <p:cNvPr id="3" name="Notes Placeholder 2"/>
+          <p:cNvSpPr>
+            <a:spLocks noGrp="1"/>
+          </p:cNvSpPr>
+          <p:nvPr>
+            <p:ph type="body" idx="1"/>
+          </p:nvPr>
+        </p:nvSpPr>
+        <p:spPr/>
+        <p:txBody>
+          <a:bodyPr/>
+          <a:lstStyle/>
+          <a:p>
+            <a:r>
+              <a:rPr lang="en-US" dirty="0"/>
+              <a:t/>
+            </a:r>
+            <a:endParaRPr lang="en-US" dirty="0"/>
+          </a:p>
+        </p:txBody>
+      </p:sp>
+      <p:sp>
+        <p:nvSpPr>
+          <p:cNvPr id="4" name="Slide Number Placeholder 3"/>
+          <p:cNvSpPr>
+            <a:spLocks noGrp="1"/>
+          </p:cNvSpPr>
+          <p:nvPr>
+            <p:ph type="sldNum" sz="quarter" idx="10"/>
+          </p:nvPr>
+        </p:nvSpPr>
+        <p:spPr/>
+        <p:txBody>
+          <a:bodyPr/>
+          <a:lstStyle/>
+          <a:p>
+            <a:fld id="{F7021451-1387-4CA6-816F-3879F97B5CBC}" type="slidenum">
+              <a:rPr lang="en-US"/>
+              <a:t>20</a:t>
             </a:fld>
             <a:endParaRPr lang="en-US"/>
           </a:p>
@@ -2011,102 +2812,6 @@
         </p:nvSpPr>
         <p:spPr>
           <a:xfrm>
-            <a:off x="406301" y="1574453"/>
-            <a:ext cx="8498026" cy="274290"/>
-          </a:xfrm>
-          <a:prstGeom prst="rect">
-            <a:avLst/>
-          </a:prstGeom>
-          <a:noFill/>
-          <a:ln/>
-        </p:spPr>
-        <p:txBody>
-          <a:bodyPr wrap="square" lIns="0" tIns="0" rIns="0" bIns="0" rtlCol="0" anchor="t"/>
-          <a:lstStyle/>
-          <a:p>
-            <a:pPr algn="l" indent="0" marL="0">
-              <a:lnSpc>
-                <a:spcPts val="2160"/>
-              </a:lnSpc>
-              <a:spcBef>
-                <a:spcPts val="600"/>
-              </a:spcBef>
-              <a:spcAft>
-                <a:spcPts val="800"/>
-              </a:spcAft>
-              <a:buNone/>
-            </a:pPr>
-            <a:r>
-              <a:rPr lang="en-US" sz="1800" b="1" dirty="0">
-                <a:solidFill>
-                  <a:srgbClr val="FE4447"/>
-                </a:solidFill>
-                <a:latin typeface="Georgia" pitchFamily="34" charset="0"/>
-                <a:ea typeface="Georgia" pitchFamily="34" charset="-122"/>
-                <a:cs typeface="Georgia" pitchFamily="34" charset="-120"/>
-              </a:rPr>
-              <a:t>Learning objective</a:t>
-            </a:r>
-            <a:endParaRPr lang="en-US" sz="1800" dirty="0"/>
-          </a:p>
-        </p:txBody>
-      </p:sp>
-      <p:sp>
-        <p:nvSpPr>
-          <p:cNvPr id="6" name="Text 4"/>
-          <p:cNvSpPr/>
-          <p:nvPr/>
-        </p:nvSpPr>
-        <p:spPr>
-          <a:xfrm>
-            <a:off x="406301" y="1988344"/>
-            <a:ext cx="8498026" cy="426541"/>
-          </a:xfrm>
-          <a:prstGeom prst="rect">
-            <a:avLst/>
-          </a:prstGeom>
-          <a:noFill/>
-          <a:ln/>
-        </p:spPr>
-        <p:txBody>
-          <a:bodyPr wrap="square" lIns="0" tIns="0" rIns="0" bIns="0" rtlCol="0" anchor="t"/>
-          <a:lstStyle/>
-          <a:p>
-            <a:pPr algn="l" indent="0" marL="0">
-              <a:lnSpc>
-                <a:spcPts val="1680"/>
-              </a:lnSpc>
-              <a:spcBef>
-                <a:spcPts val="300"/>
-              </a:spcBef>
-              <a:spcAft>
-                <a:spcPts val="300"/>
-              </a:spcAft>
-              <a:buNone/>
-            </a:pPr>
-            <a:r>
-              <a:rPr lang="en-US" sz="1200" dirty="0">
-                <a:solidFill>
-                  <a:srgbClr val="1C2833"/>
-                </a:solidFill>
-                <a:latin typeface="Arial" pitchFamily="34" charset="0"/>
-                <a:ea typeface="Arial" pitchFamily="34" charset="-122"/>
-                <a:cs typeface="Arial" pitchFamily="34" charset="-120"/>
-              </a:rPr>
-              <a:t>By the end of this lesson, students will instantly state the deficit of any single digit from 10, AND will solve any single-digit × single-digit multiplication where both digits are 6–9 using the Nikhilam method.</a:t>
-            </a:r>
-            <a:endParaRPr lang="en-US" sz="1200" dirty="0"/>
-          </a:p>
-        </p:txBody>
-      </p:sp>
-      <p:sp>
-        <p:nvSpPr>
-          <p:cNvPr id="7" name="Text 5"/>
-          <p:cNvSpPr/>
-          <p:nvPr/>
-        </p:nvSpPr>
-        <p:spPr>
-          <a:xfrm>
             <a:off x="406301" y="4434929"/>
             <a:ext cx="8498026" cy="213271"/>
           </a:xfrm>
@@ -2251,7 +2956,7 @@
                 <a:ea typeface="Georgia" pitchFamily="34" charset="-122"/>
                 <a:cs typeface="Georgia" pitchFamily="34" charset="-120"/>
               </a:rPr>
-              <a:t>Teacher notes</a:t>
+              <a:t>Core (15 min) — Nikhilam at the single-digit level (cont.)</a:t>
             </a:r>
             <a:endParaRPr lang="en-US" sz="1800" dirty="0"/>
           </a:p>
@@ -2265,8 +2970,8 @@
         </p:nvSpPr>
         <p:spPr>
           <a:xfrm>
-            <a:off x="406301" y="870942"/>
-            <a:ext cx="8498026" cy="862608"/>
+            <a:off x="634901" y="883593"/>
+            <a:ext cx="8102798" cy="281880"/>
           </a:xfrm>
           <a:prstGeom prst="rect">
             <a:avLst/>
@@ -2278,132 +2983,229 @@
           <a:bodyPr wrap="square" lIns="0" tIns="0" rIns="0" bIns="0" rtlCol="0" anchor="t"/>
           <a:lstStyle/>
           <a:p>
-            <a:pPr algn="l" indent="0" marL="0">
-              <a:lnSpc>
-                <a:spcPts val="1680"/>
-              </a:lnSpc>
-              <a:spcBef>
-                <a:spcPts val="300"/>
-              </a:spcBef>
-              <a:spcAft>
-                <a:spcPts val="300"/>
-              </a:spcAft>
-              <a:buNone/>
-            </a:pPr>
-            <a:r>
-              <a:rPr lang="en-US" sz="1200" dirty="0">
-                <a:solidFill>
-                  <a:srgbClr val="1C2833"/>
-                </a:solidFill>
-                <a:latin typeface="Arial" pitchFamily="34" charset="0"/>
-                <a:ea typeface="Arial" pitchFamily="34" charset="-122"/>
-                <a:cs typeface="Arial" pitchFamily="34" charset="-120"/>
-              </a:rPr>
-              <a:t>– Some students will protest: </a:t>
-            </a:r>
-            <a:pPr algn="l" indent="0" marL="0">
-              <a:lnSpc>
-                <a:spcPts val="1680"/>
-              </a:lnSpc>
-              <a:spcBef>
-                <a:spcPts val="300"/>
-              </a:spcBef>
-              <a:spcAft>
-                <a:spcPts val="300"/>
-              </a:spcAft>
-              <a:buNone/>
-            </a:pPr>
-            <a:r>
-              <a:rPr lang="en-US" sz="1200" i="1" dirty="0">
-                <a:solidFill>
-                  <a:srgbClr val="1C2833"/>
-                </a:solidFill>
-                <a:latin typeface="Arial" pitchFamily="34" charset="0"/>
-                <a:ea typeface="Arial" pitchFamily="34" charset="-122"/>
-                <a:cs typeface="Arial" pitchFamily="34" charset="-120"/>
-              </a:rPr>
-              <a:t>"But I already know 7 × 8 = 56 from my times tables!"</a:t>
-            </a:r>
-            <a:pPr algn="l" indent="0" marL="0">
-              <a:lnSpc>
-                <a:spcPts val="1680"/>
-              </a:lnSpc>
-              <a:spcBef>
-                <a:spcPts val="300"/>
-              </a:spcBef>
-              <a:spcAft>
-                <a:spcPts val="300"/>
-              </a:spcAft>
-              <a:buNone/>
-            </a:pPr>
-            <a:r>
-              <a:rPr lang="en-US" sz="1200" dirty="0">
-                <a:solidFill>
-                  <a:srgbClr val="1C2833"/>
-                </a:solidFill>
-                <a:latin typeface="Arial" pitchFamily="34" charset="0"/>
-                <a:ea typeface="Arial" pitchFamily="34" charset="-122"/>
-                <a:cs typeface="Arial" pitchFamily="34" charset="-120"/>
-              </a:rPr>
-              <a:t> Honest answer: </a:t>
-            </a:r>
-            <a:pPr algn="l" indent="0" marL="0">
-              <a:lnSpc>
-                <a:spcPts val="1680"/>
-              </a:lnSpc>
-              <a:spcBef>
-                <a:spcPts val="300"/>
-              </a:spcBef>
-              <a:spcAft>
-                <a:spcPts val="300"/>
-              </a:spcAft>
-              <a:buNone/>
-            </a:pPr>
-            <a:r>
-              <a:rPr lang="en-US" sz="1200" i="1" dirty="0">
-                <a:solidFill>
-                  <a:srgbClr val="1C2833"/>
-                </a:solidFill>
-                <a:latin typeface="Arial" pitchFamily="34" charset="0"/>
-                <a:ea typeface="Arial" pitchFamily="34" charset="-122"/>
-                <a:cs typeface="Arial" pitchFamily="34" charset="-120"/>
-              </a:rPr>
-              <a:t>"Yes — for single digits the times-table is faster. The Nikhilam method is here so we can use it on 2-digit numbers tomorrow, where the times-table doesn't help."</a:t>
-            </a:r>
-            <a:pPr algn="l" indent="0" marL="0">
-              <a:lnSpc>
-                <a:spcPts val="1680"/>
-              </a:lnSpc>
-              <a:spcBef>
-                <a:spcPts val="300"/>
-              </a:spcBef>
-              <a:spcAft>
-                <a:spcPts val="300"/>
-              </a:spcAft>
-              <a:buNone/>
-            </a:pPr>
-            <a:r>
-              <a:rPr lang="en-US" sz="1200" dirty="0">
-                <a:solidFill>
-                  <a:srgbClr val="1C2833"/>
-                </a:solidFill>
-                <a:latin typeface="Arial" pitchFamily="34" charset="0"/>
-                <a:ea typeface="Arial" pitchFamily="34" charset="-122"/>
-                <a:cs typeface="Arial" pitchFamily="34" charset="-120"/>
-              </a:rPr>
-              <a:t> – Watch for the carry rule on </a:t>
-            </a:r>
-            <a:pPr algn="l" indent="0" marL="0">
-              <a:lnSpc>
-                <a:spcPts val="1680"/>
-              </a:lnSpc>
-              <a:spcBef>
-                <a:spcPts val="300"/>
-              </a:spcBef>
-              <a:spcAft>
-                <a:spcPts val="300"/>
-              </a:spcAft>
-              <a:buNone/>
+            <a:pPr algn="l" marL="342900" indent="-342900">
+              <a:lnSpc>
+                <a:spcPts val="1620"/>
+              </a:lnSpc>
+              <a:spcAft>
+                <a:spcPts val="300"/>
+              </a:spcAft>
+              <a:buSzPct val="100000"/>
+              <a:buChar char="•"/>
+            </a:pPr>
+            <a:r>
+              <a:rPr lang="en-US" sz="1200" b="1" dirty="0">
+                <a:solidFill>
+                  <a:srgbClr val="1C2833"/>
+                </a:solidFill>
+                <a:latin typeface="Arial" pitchFamily="34" charset="0"/>
+                <a:ea typeface="Arial" pitchFamily="34" charset="-122"/>
+                <a:cs typeface="Arial" pitchFamily="34" charset="-120"/>
+              </a:rPr>
+              <a:t>Worked examples in chorus:</a:t>
+            </a:r>
+            <a:endParaRPr lang="en-US" sz="1200" dirty="0"/>
+          </a:p>
+        </p:txBody>
+      </p:sp>
+      <p:sp>
+        <p:nvSpPr>
+          <p:cNvPr id="5" name="Text 3"/>
+          <p:cNvSpPr/>
+          <p:nvPr/>
+        </p:nvSpPr>
+        <p:spPr>
+          <a:xfrm>
+            <a:off x="634901" y="1266974"/>
+            <a:ext cx="8102798" cy="1032272"/>
+          </a:xfrm>
+          <a:prstGeom prst="rect">
+            <a:avLst/>
+          </a:prstGeom>
+          <a:noFill/>
+          <a:ln/>
+        </p:spPr>
+        <p:txBody>
+          <a:bodyPr wrap="square" lIns="0" tIns="0" rIns="0" bIns="0" rtlCol="0" anchor="t"/>
+          <a:lstStyle/>
+          <a:p>
+            <a:pPr algn="l" marL="342900" indent="-342900">
+              <a:lnSpc>
+                <a:spcPts val="1620"/>
+              </a:lnSpc>
+              <a:spcAft>
+                <a:spcPts val="300"/>
+              </a:spcAft>
+              <a:buSzPct val="100000"/>
+              <a:buChar char="•"/>
+            </a:pPr>
+            <a:r>
+              <a:rPr lang="en-US" sz="1200" dirty="0">
+                <a:solidFill>
+                  <a:srgbClr val="1C2833"/>
+                </a:solidFill>
+                <a:latin typeface="Arial" pitchFamily="34" charset="0"/>
+                <a:ea typeface="Arial" pitchFamily="34" charset="-122"/>
+                <a:cs typeface="Arial" pitchFamily="34" charset="-120"/>
+              </a:rPr>
+              <a:t>9 × 8</a:t>
+            </a:r>
+            <a:pPr algn="l" indent="0" marL="0">
+              <a:lnSpc>
+                <a:spcPts val="1620"/>
+              </a:lnSpc>
+              <a:spcAft>
+                <a:spcPts val="300"/>
+              </a:spcAft>
+              <a:buNone/>
+            </a:pPr>
+            <a:r>
+              <a:rPr lang="en-US" sz="1200" dirty="0">
+                <a:solidFill>
+                  <a:srgbClr val="1C2833"/>
+                </a:solidFill>
+                <a:latin typeface="Arial" pitchFamily="34" charset="0"/>
+                <a:ea typeface="Arial" pitchFamily="34" charset="-122"/>
+                <a:cs typeface="Arial" pitchFamily="34" charset="-120"/>
+              </a:rPr>
+              <a:t>: deficits 1, 2. Left: 9 − 2 = 7. Right: 1 × 2 = 2. Answer: </a:t>
+            </a:r>
+            <a:pPr algn="l" indent="0" marL="0">
+              <a:lnSpc>
+                <a:spcPts val="1620"/>
+              </a:lnSpc>
+              <a:spcAft>
+                <a:spcPts val="300"/>
+              </a:spcAft>
+              <a:buNone/>
+            </a:pPr>
+            <a:r>
+              <a:rPr lang="en-US" sz="1200" b="1" dirty="0">
+                <a:solidFill>
+                  <a:srgbClr val="1C2833"/>
+                </a:solidFill>
+                <a:latin typeface="Arial" pitchFamily="34" charset="0"/>
+                <a:ea typeface="Arial" pitchFamily="34" charset="-122"/>
+                <a:cs typeface="Arial" pitchFamily="34" charset="-120"/>
+              </a:rPr>
+              <a:t>72</a:t>
+            </a:r>
+            <a:pPr algn="l" indent="0" marL="0">
+              <a:lnSpc>
+                <a:spcPts val="1620"/>
+              </a:lnSpc>
+              <a:spcAft>
+                <a:spcPts val="300"/>
+              </a:spcAft>
+              <a:buNone/>
+            </a:pPr>
+            <a:r>
+              <a:rPr lang="en-US" sz="1200" dirty="0">
+                <a:solidFill>
+                  <a:srgbClr val="1C2833"/>
+                </a:solidFill>
+                <a:latin typeface="Arial" pitchFamily="34" charset="0"/>
+                <a:ea typeface="Arial" pitchFamily="34" charset="-122"/>
+                <a:cs typeface="Arial" pitchFamily="34" charset="-120"/>
+              </a:rPr>
+              <a:t>. ✓</a:t>
+            </a:r>
+            <a:endParaRPr lang="en-US" sz="1200" dirty="0"/>
+          </a:p>
+          <a:p>
+            <a:pPr algn="l" marL="342900" indent="-342900">
+              <a:lnSpc>
+                <a:spcPts val="1620"/>
+              </a:lnSpc>
+              <a:spcAft>
+                <a:spcPts val="300"/>
+              </a:spcAft>
+              <a:buSzPct val="100000"/>
+              <a:buChar char="•"/>
+            </a:pPr>
+            <a:r>
+              <a:rPr lang="en-US" sz="1200" dirty="0">
+                <a:solidFill>
+                  <a:srgbClr val="1C2833"/>
+                </a:solidFill>
+                <a:latin typeface="Arial" pitchFamily="34" charset="0"/>
+                <a:ea typeface="Arial" pitchFamily="34" charset="-122"/>
+                <a:cs typeface="Arial" pitchFamily="34" charset="-120"/>
+              </a:rPr>
+              <a:t>6 × 9</a:t>
+            </a:r>
+            <a:pPr algn="l" indent="0" marL="0">
+              <a:lnSpc>
+                <a:spcPts val="1620"/>
+              </a:lnSpc>
+              <a:spcAft>
+                <a:spcPts val="300"/>
+              </a:spcAft>
+              <a:buNone/>
+            </a:pPr>
+            <a:r>
+              <a:rPr lang="en-US" sz="1200" dirty="0">
+                <a:solidFill>
+                  <a:srgbClr val="1C2833"/>
+                </a:solidFill>
+                <a:latin typeface="Arial" pitchFamily="34" charset="0"/>
+                <a:ea typeface="Arial" pitchFamily="34" charset="-122"/>
+                <a:cs typeface="Arial" pitchFamily="34" charset="-120"/>
+              </a:rPr>
+              <a:t>: deficits 4, 1. Left: 6 − 1 = 5. Right: 4 × 1 = 4. Answer: </a:t>
+            </a:r>
+            <a:pPr algn="l" indent="0" marL="0">
+              <a:lnSpc>
+                <a:spcPts val="1620"/>
+              </a:lnSpc>
+              <a:spcAft>
+                <a:spcPts val="300"/>
+              </a:spcAft>
+              <a:buNone/>
+            </a:pPr>
+            <a:r>
+              <a:rPr lang="en-US" sz="1200" b="1" dirty="0">
+                <a:solidFill>
+                  <a:srgbClr val="1C2833"/>
+                </a:solidFill>
+                <a:latin typeface="Arial" pitchFamily="34" charset="0"/>
+                <a:ea typeface="Arial" pitchFamily="34" charset="-122"/>
+                <a:cs typeface="Arial" pitchFamily="34" charset="-120"/>
+              </a:rPr>
+              <a:t>54</a:t>
+            </a:r>
+            <a:pPr algn="l" indent="0" marL="0">
+              <a:lnSpc>
+                <a:spcPts val="1620"/>
+              </a:lnSpc>
+              <a:spcAft>
+                <a:spcPts val="300"/>
+              </a:spcAft>
+              <a:buNone/>
+            </a:pPr>
+            <a:r>
+              <a:rPr lang="en-US" sz="1200" dirty="0">
+                <a:solidFill>
+                  <a:srgbClr val="1C2833"/>
+                </a:solidFill>
+                <a:latin typeface="Arial" pitchFamily="34" charset="0"/>
+                <a:ea typeface="Arial" pitchFamily="34" charset="-122"/>
+                <a:cs typeface="Arial" pitchFamily="34" charset="-120"/>
+              </a:rPr>
+              <a:t>. ✓</a:t>
+            </a:r>
+            <a:endParaRPr lang="en-US" sz="1200" dirty="0"/>
+          </a:p>
+          <a:p>
+            <a:pPr algn="l" marL="342900" indent="-342900">
+              <a:lnSpc>
+                <a:spcPts val="1620"/>
+              </a:lnSpc>
+              <a:spcAft>
+                <a:spcPts val="300"/>
+              </a:spcAft>
+              <a:buSzPct val="100000"/>
+              <a:buChar char="•"/>
             </a:pPr>
             <a:r>
               <a:rPr lang="en-US" sz="1200" dirty="0">
@@ -2418,72 +3220,63 @@
             </a:r>
             <a:pPr algn="l" indent="0" marL="0">
               <a:lnSpc>
-                <a:spcPts val="1680"/>
-              </a:lnSpc>
-              <a:spcBef>
-                <a:spcPts val="300"/>
-              </a:spcBef>
-              <a:spcAft>
-                <a:spcPts val="300"/>
-              </a:spcAft>
-              <a:buNone/>
-            </a:pPr>
-            <a:r>
-              <a:rPr lang="en-US" sz="1200" dirty="0">
-                <a:solidFill>
-                  <a:srgbClr val="1C2833"/>
-                </a:solidFill>
-                <a:latin typeface="Arial" pitchFamily="34" charset="0"/>
-                <a:ea typeface="Arial" pitchFamily="34" charset="-122"/>
-                <a:cs typeface="Arial" pitchFamily="34" charset="-120"/>
-              </a:rPr>
-              <a:t> and </a:t>
-            </a:r>
-            <a:pPr algn="l" indent="0" marL="0">
-              <a:lnSpc>
-                <a:spcPts val="1680"/>
-              </a:lnSpc>
-              <a:spcBef>
-                <a:spcPts val="300"/>
-              </a:spcBef>
-              <a:spcAft>
-                <a:spcPts val="300"/>
-              </a:spcAft>
-              <a:buNone/>
-            </a:pPr>
-            <a:r>
-              <a:rPr lang="en-US" sz="1200" dirty="0">
-                <a:solidFill>
-                  <a:srgbClr val="1C2833"/>
-                </a:solidFill>
-                <a:latin typeface="Arial" pitchFamily="34" charset="0"/>
-                <a:ea typeface="Arial" pitchFamily="34" charset="-122"/>
-                <a:cs typeface="Arial" pitchFamily="34" charset="-120"/>
-              </a:rPr>
-              <a:t>6 × 8</a:t>
-            </a:r>
-            <a:pPr algn="l" indent="0" marL="0">
-              <a:lnSpc>
-                <a:spcPts val="1680"/>
-              </a:lnSpc>
-              <a:spcBef>
-                <a:spcPts val="300"/>
-              </a:spcBef>
-              <a:spcAft>
-                <a:spcPts val="300"/>
-              </a:spcAft>
-              <a:buNone/>
-            </a:pPr>
-            <a:r>
-              <a:rPr lang="en-US" sz="1200" dirty="0">
-                <a:solidFill>
-                  <a:srgbClr val="1C2833"/>
-                </a:solidFill>
-                <a:latin typeface="Arial" pitchFamily="34" charset="0"/>
-                <a:ea typeface="Arial" pitchFamily="34" charset="-122"/>
-                <a:cs typeface="Arial" pitchFamily="34" charset="-120"/>
-              </a:rPr>
-              <a:t>. This is the most common error point. – The "either cross gives the same" property is a built-in check students can use to catch errors. Reinforce it.</a:t>
+                <a:spcPts val="1620"/>
+              </a:lnSpc>
+              <a:spcAft>
+                <a:spcPts val="300"/>
+              </a:spcAft>
+              <a:buNone/>
+            </a:pPr>
+            <a:r>
+              <a:rPr lang="en-US" sz="1200" dirty="0">
+                <a:solidFill>
+                  <a:srgbClr val="1C2833"/>
+                </a:solidFill>
+                <a:latin typeface="Arial" pitchFamily="34" charset="0"/>
+                <a:ea typeface="Arial" pitchFamily="34" charset="-122"/>
+                <a:cs typeface="Arial" pitchFamily="34" charset="-120"/>
+              </a:rPr>
+              <a:t>: deficits 4, 3. Left: 6 − 3 = 3. Right: 4 × 3 = 12. Hmm — right part is two digits! Carry the 1 to the left: left = 3 + 1 = 4; right = 2. Answer: </a:t>
+            </a:r>
+            <a:pPr algn="l" indent="0" marL="0">
+              <a:lnSpc>
+                <a:spcPts val="1620"/>
+              </a:lnSpc>
+              <a:spcAft>
+                <a:spcPts val="300"/>
+              </a:spcAft>
+              <a:buNone/>
+            </a:pPr>
+            <a:r>
+              <a:rPr lang="en-US" sz="1200" b="1" dirty="0">
+                <a:solidFill>
+                  <a:srgbClr val="1C2833"/>
+                </a:solidFill>
+                <a:latin typeface="Arial" pitchFamily="34" charset="0"/>
+                <a:ea typeface="Arial" pitchFamily="34" charset="-122"/>
+                <a:cs typeface="Arial" pitchFamily="34" charset="-120"/>
+              </a:rPr>
+              <a:t>42</a:t>
+            </a:r>
+            <a:pPr algn="l" indent="0" marL="0">
+              <a:lnSpc>
+                <a:spcPts val="1620"/>
+              </a:lnSpc>
+              <a:spcAft>
+                <a:spcPts val="300"/>
+              </a:spcAft>
+              <a:buNone/>
+            </a:pPr>
+            <a:r>
+              <a:rPr lang="en-US" sz="1200" dirty="0">
+                <a:solidFill>
+                  <a:srgbClr val="1C2833"/>
+                </a:solidFill>
+                <a:latin typeface="Arial" pitchFamily="34" charset="0"/>
+                <a:ea typeface="Arial" pitchFamily="34" charset="-122"/>
+                <a:cs typeface="Arial" pitchFamily="34" charset="-120"/>
+              </a:rPr>
+              <a:t>. ✓</a:t>
             </a:r>
             <a:endParaRPr lang="en-US" sz="1200" dirty="0"/>
           </a:p>
@@ -2491,7 +3284,7 @@
       </p:sp>
       <p:sp>
         <p:nvSpPr>
-          <p:cNvPr id="5" name="Text 3"/>
+          <p:cNvPr id="6" name="Text 4"/>
           <p:cNvSpPr/>
           <p:nvPr/>
         </p:nvSpPr>
@@ -2641,7 +3434,7 @@
                 <a:ea typeface="Georgia" pitchFamily="34" charset="-122"/>
                 <a:cs typeface="Georgia" pitchFamily="34" charset="-120"/>
               </a:rPr>
-              <a:t>Citation(s) used in this lesson</a:t>
+              <a:t>Core (15 min) — Nikhilam at the single-digit level (cont.)</a:t>
             </a:r>
             <a:endParaRPr lang="en-US" sz="1800" dirty="0"/>
           </a:p>
@@ -2656,7 +3449,7 @@
         <p:spPr>
           <a:xfrm>
             <a:off x="634901" y="883593"/>
-            <a:ext cx="8102798" cy="731341"/>
+            <a:ext cx="8102798" cy="487561"/>
           </a:xfrm>
           <a:prstGeom prst="rect">
             <a:avLst/>
@@ -2679,15 +3472,15 @@
               <a:buChar char="•"/>
             </a:pPr>
             <a:r>
-              <a:rPr lang="en-US" sz="1200" i="1" dirty="0">
-                <a:solidFill>
-                  <a:srgbClr val="1C2833"/>
-                </a:solidFill>
-                <a:latin typeface="Arial" pitchFamily="34" charset="0"/>
-                <a:ea typeface="Arial" pitchFamily="34" charset="-122"/>
-                <a:cs typeface="Arial" pitchFamily="34" charset="-120"/>
-              </a:rPr>
-              <a:t>Vedic Mathematics Batch1.pdf</a:t>
+              <a:rPr lang="en-US" sz="1200" b="1" dirty="0">
+                <a:solidFill>
+                  <a:srgbClr val="1C2833"/>
+                </a:solidFill>
+                <a:latin typeface="Arial" pitchFamily="34" charset="0"/>
+                <a:ea typeface="Arial" pitchFamily="34" charset="-122"/>
+                <a:cs typeface="Arial" pitchFamily="34" charset="-120"/>
+              </a:rPr>
+              <a:t>Note the carry rule.</a:t>
             </a:r>
             <a:pPr algn="l" indent="0" marL="0">
               <a:lnSpc>
@@ -2707,10 +3500,497 @@
                 <a:ea typeface="Arial" pitchFamily="34" charset="-122"/>
                 <a:cs typeface="Arial" pitchFamily="34" charset="-120"/>
               </a:rPr>
-              <a:t> (Vedic Cultural Center, Sammamish WA) — Nikhilam multiplication, single-digit examples.</a:t>
+              <a:t> When the right part has more digits than the base has zeros (here: base 10, so right part should be 1 digit; if it's 2 digits, carry the extra). Write on board:</a:t>
             </a:r>
             <a:endParaRPr lang="en-US" sz="1200" dirty="0"/>
           </a:p>
+        </p:txBody>
+      </p:sp>
+      <p:sp>
+        <p:nvSpPr>
+          <p:cNvPr id="5" name="Text 3"/>
+          <p:cNvSpPr/>
+          <p:nvPr/>
+        </p:nvSpPr>
+        <p:spPr>
+          <a:xfrm>
+            <a:off x="406301" y="1472654"/>
+            <a:ext cx="8331398" cy="611981"/>
+          </a:xfrm>
+          <a:prstGeom prst="rect">
+            <a:avLst/>
+          </a:prstGeom>
+          <a:solidFill>
+            <a:srgbClr val="F4F8F9"/>
+          </a:solidFill>
+          <a:ln/>
+        </p:spPr>
+        <p:txBody>
+          <a:bodyPr wrap="square" rtlCol="0" anchor="ctr"/>
+          <a:lstStyle/>
+          <a:p>
+            <a:pPr indent="0" marL="0">
+              <a:buNone/>
+            </a:pPr>
+            <a:endParaRPr lang="en-US" dirty="0"/>
+          </a:p>
+        </p:txBody>
+      </p:sp>
+      <p:sp>
+        <p:nvSpPr>
+          <p:cNvPr id="6" name="Shape 4"/>
+          <p:cNvSpPr/>
+          <p:nvPr/>
+        </p:nvSpPr>
+        <p:spPr>
+          <a:xfrm>
+            <a:off x="434876" y="1472654"/>
+            <a:ext cx="0" cy="611981"/>
+          </a:xfrm>
+          <a:prstGeom prst="line">
+            <a:avLst/>
+          </a:prstGeom>
+          <a:noFill/>
+          <a:ln w="57150">
+            <a:solidFill>
+              <a:srgbClr val="FE4447"/>
+            </a:solidFill>
+            <a:prstDash val="solid"/>
+          </a:ln>
+        </p:spPr>
+      </p:sp>
+      <p:sp>
+        <p:nvSpPr>
+          <p:cNvPr id="7" name="Text 5"/>
+          <p:cNvSpPr/>
+          <p:nvPr/>
+        </p:nvSpPr>
+        <p:spPr>
+          <a:xfrm>
+            <a:off x="692051" y="1663154"/>
+            <a:ext cx="7973389" cy="230981"/>
+          </a:xfrm>
+          <a:prstGeom prst="rect">
+            <a:avLst/>
+          </a:prstGeom>
+          <a:noFill/>
+          <a:ln/>
+        </p:spPr>
+        <p:txBody>
+          <a:bodyPr wrap="square" lIns="0" tIns="0" rIns="0" bIns="0" rtlCol="0" anchor="t"/>
+          <a:lstStyle/>
+          <a:p>
+            <a:pPr algn="l" indent="0" marL="0">
+              <a:lnSpc>
+                <a:spcPts val="1820"/>
+              </a:lnSpc>
+              <a:spcBef>
+                <a:spcPts val="300"/>
+              </a:spcBef>
+              <a:spcAft>
+                <a:spcPts val="300"/>
+              </a:spcAft>
+              <a:buNone/>
+            </a:pPr>
+            <a:r>
+              <a:rPr lang="en-US" sz="1300" i="1" dirty="0">
+                <a:solidFill>
+                  <a:srgbClr val="1C2833"/>
+                </a:solidFill>
+                <a:latin typeface="Georgia" pitchFamily="34" charset="0"/>
+                <a:ea typeface="Georgia" pitchFamily="34" charset="-122"/>
+                <a:cs typeface="Georgia" pitchFamily="34" charset="-120"/>
+              </a:rPr>
+              <a:t>"If the right part overflows the base, carry the overflow into the left part."</a:t>
+            </a:r>
+            <a:endParaRPr lang="en-US" sz="1300" dirty="0"/>
+          </a:p>
+        </p:txBody>
+      </p:sp>
+      <p:sp>
+        <p:nvSpPr>
+          <p:cNvPr id="8" name="Text 6"/>
+          <p:cNvSpPr/>
+          <p:nvPr/>
+        </p:nvSpPr>
+        <p:spPr>
+          <a:xfrm>
+            <a:off x="406301" y="4434929"/>
+            <a:ext cx="8498026" cy="213271"/>
+          </a:xfrm>
+          <a:prstGeom prst="rect">
+            <a:avLst/>
+          </a:prstGeom>
+          <a:noFill/>
+          <a:ln/>
+        </p:spPr>
+        <p:txBody>
+          <a:bodyPr wrap="square" lIns="0" tIns="0" rIns="0" bIns="0" rtlCol="0" anchor="t"/>
+          <a:lstStyle/>
+          <a:p>
+            <a:pPr algn="l" indent="0" marL="0">
+              <a:lnSpc>
+                <a:spcPts val="1680"/>
+              </a:lnSpc>
+              <a:spcBef>
+                <a:spcPts val="300"/>
+              </a:spcBef>
+              <a:spcAft>
+                <a:spcPts val="300"/>
+              </a:spcAft>
+              <a:buNone/>
+            </a:pPr>
+            <a:r>
+              <a:rPr lang="en-US" sz="1200" dirty="0">
+                <a:solidFill>
+                  <a:srgbClr val="1C2833"/>
+                </a:solidFill>
+                <a:latin typeface="Arial" pitchFamily="34" charset="0"/>
+                <a:ea typeface="Arial" pitchFamily="34" charset="-122"/>
+                <a:cs typeface="Arial" pitchFamily="34" charset="-120"/>
+              </a:rPr>
+              <a:t>Middle ·  · IKS Curriculum</a:t>
+            </a:r>
+            <a:endParaRPr lang="en-US" sz="1200" dirty="0"/>
+          </a:p>
+        </p:txBody>
+      </p:sp>
+    </p:spTree>
+  </p:cSld>
+  <p:clrMapOvr>
+    <a:masterClrMapping/>
+  </p:clrMapOvr>
+</p:sld>
+</file>
+
+<file path=ppt/slides/slide12.xml><?xml version="1.0" encoding="utf-8"?>
+<p:sld xmlns:a="http://schemas.openxmlformats.org/drawingml/2006/main" xmlns:r="http://schemas.openxmlformats.org/officeDocument/2006/relationships" xmlns:p="http://schemas.openxmlformats.org/presentationml/2006/main">
+  <p:cSld name="Slide 12">
+    <p:bg>
+      <p:bgPr>
+        <a:solidFill>
+          <a:srgbClr val="FFFFFF"/>
+        </a:solidFill>
+      </p:bgPr>
+    </p:bg>
+    <p:spTree>
+      <p:nvGrpSpPr>
+        <p:cNvPr id="1" name=""/>
+        <p:cNvGrpSpPr/>
+        <p:nvPr/>
+      </p:nvGrpSpPr>
+      <p:grpSpPr>
+        <a:xfrm>
+          <a:off x="0" y="0"/>
+          <a:ext cx="0" cy="0"/>
+          <a:chOff x="0" y="0"/>
+          <a:chExt cx="0" cy="0"/>
+        </a:xfrm>
+      </p:grpSpPr>
+      <p:sp>
+        <p:nvSpPr>
+          <p:cNvPr id="2" name="Text 0"/>
+          <p:cNvSpPr/>
+          <p:nvPr/>
+        </p:nvSpPr>
+        <p:spPr>
+          <a:xfrm>
+            <a:off x="0" y="0"/>
+            <a:ext cx="9144000" cy="101501"/>
+          </a:xfrm>
+          <a:prstGeom prst="rect">
+            <a:avLst/>
+          </a:prstGeom>
+          <a:solidFill>
+            <a:srgbClr val="277884"/>
+          </a:solidFill>
+          <a:ln/>
+        </p:spPr>
+        <p:txBody>
+          <a:bodyPr wrap="square" rtlCol="0" anchor="ctr"/>
+          <a:lstStyle/>
+          <a:p>
+            <a:pPr indent="0" marL="0">
+              <a:buNone/>
+            </a:pPr>
+            <a:endParaRPr lang="en-US" dirty="0"/>
+          </a:p>
+        </p:txBody>
+      </p:sp>
+      <p:sp>
+        <p:nvSpPr>
+          <p:cNvPr id="3" name="Text 1"/>
+          <p:cNvSpPr/>
+          <p:nvPr/>
+        </p:nvSpPr>
+        <p:spPr>
+          <a:xfrm>
+            <a:off x="406301" y="457051"/>
+            <a:ext cx="8498026" cy="274290"/>
+          </a:xfrm>
+          <a:prstGeom prst="rect">
+            <a:avLst/>
+          </a:prstGeom>
+          <a:noFill/>
+          <a:ln/>
+        </p:spPr>
+        <p:txBody>
+          <a:bodyPr wrap="square" lIns="0" tIns="0" rIns="0" bIns="0" rtlCol="0" anchor="t"/>
+          <a:lstStyle/>
+          <a:p>
+            <a:pPr algn="l" indent="0" marL="0">
+              <a:lnSpc>
+                <a:spcPts val="2160"/>
+              </a:lnSpc>
+              <a:spcBef>
+                <a:spcPts val="600"/>
+              </a:spcBef>
+              <a:spcAft>
+                <a:spcPts val="800"/>
+              </a:spcAft>
+              <a:buNone/>
+            </a:pPr>
+            <a:r>
+              <a:rPr lang="en-US" sz="1800" b="1" dirty="0">
+                <a:solidFill>
+                  <a:srgbClr val="FE4447"/>
+                </a:solidFill>
+                <a:latin typeface="Georgia" pitchFamily="34" charset="0"/>
+                <a:ea typeface="Georgia" pitchFamily="34" charset="-122"/>
+                <a:cs typeface="Georgia" pitchFamily="34" charset="-120"/>
+              </a:rPr>
+              <a:t>Activity (20 min) — Drill</a:t>
+            </a:r>
+            <a:endParaRPr lang="en-US" sz="1800" dirty="0"/>
+          </a:p>
+        </p:txBody>
+      </p:sp>
+      <p:sp>
+        <p:nvSpPr>
+          <p:cNvPr id="4" name="Text 2"/>
+          <p:cNvSpPr/>
+          <p:nvPr/>
+        </p:nvSpPr>
+        <p:spPr>
+          <a:xfrm>
+            <a:off x="406301" y="870942"/>
+            <a:ext cx="8498026" cy="213271"/>
+          </a:xfrm>
+          <a:prstGeom prst="rect">
+            <a:avLst/>
+          </a:prstGeom>
+          <a:noFill/>
+          <a:ln/>
+        </p:spPr>
+        <p:txBody>
+          <a:bodyPr wrap="square" lIns="0" tIns="0" rIns="0" bIns="0" rtlCol="0" anchor="t"/>
+          <a:lstStyle/>
+          <a:p>
+            <a:pPr algn="l" indent="0" marL="0">
+              <a:lnSpc>
+                <a:spcPts val="1680"/>
+              </a:lnSpc>
+              <a:spcBef>
+                <a:spcPts val="300"/>
+              </a:spcBef>
+              <a:spcAft>
+                <a:spcPts val="300"/>
+              </a:spcAft>
+              <a:buNone/>
+            </a:pPr>
+            <a:r>
+              <a:rPr lang="en-US" sz="1200" dirty="0">
+                <a:solidFill>
+                  <a:srgbClr val="1C2833"/>
+                </a:solidFill>
+                <a:latin typeface="Arial" pitchFamily="34" charset="0"/>
+                <a:ea typeface="Arial" pitchFamily="34" charset="-122"/>
+                <a:cs typeface="Arial" pitchFamily="34" charset="-120"/>
+              </a:rPr>
+              <a:t>Pair drills.</a:t>
+            </a:r>
+            <a:endParaRPr lang="en-US" sz="1200" dirty="0"/>
+          </a:p>
+        </p:txBody>
+      </p:sp>
+      <p:sp>
+        <p:nvSpPr>
+          <p:cNvPr id="5" name="Text 3"/>
+          <p:cNvSpPr/>
+          <p:nvPr/>
+        </p:nvSpPr>
+        <p:spPr>
+          <a:xfrm>
+            <a:off x="406301" y="4434929"/>
+            <a:ext cx="8498026" cy="213271"/>
+          </a:xfrm>
+          <a:prstGeom prst="rect">
+            <a:avLst/>
+          </a:prstGeom>
+          <a:noFill/>
+          <a:ln/>
+        </p:spPr>
+        <p:txBody>
+          <a:bodyPr wrap="square" lIns="0" tIns="0" rIns="0" bIns="0" rtlCol="0" anchor="t"/>
+          <a:lstStyle/>
+          <a:p>
+            <a:pPr algn="l" indent="0" marL="0">
+              <a:lnSpc>
+                <a:spcPts val="1680"/>
+              </a:lnSpc>
+              <a:spcBef>
+                <a:spcPts val="300"/>
+              </a:spcBef>
+              <a:spcAft>
+                <a:spcPts val="300"/>
+              </a:spcAft>
+              <a:buNone/>
+            </a:pPr>
+            <a:r>
+              <a:rPr lang="en-US" sz="1200" dirty="0">
+                <a:solidFill>
+                  <a:srgbClr val="1C2833"/>
+                </a:solidFill>
+                <a:latin typeface="Arial" pitchFamily="34" charset="0"/>
+                <a:ea typeface="Arial" pitchFamily="34" charset="-122"/>
+                <a:cs typeface="Arial" pitchFamily="34" charset="-120"/>
+              </a:rPr>
+              <a:t>Middle ·  · IKS Curriculum</a:t>
+            </a:r>
+            <a:endParaRPr lang="en-US" sz="1200" dirty="0"/>
+          </a:p>
+        </p:txBody>
+      </p:sp>
+    </p:spTree>
+  </p:cSld>
+  <p:clrMapOvr>
+    <a:masterClrMapping/>
+  </p:clrMapOvr>
+</p:sld>
+</file>
+
+<file path=ppt/slides/slide13.xml><?xml version="1.0" encoding="utf-8"?>
+<p:sld xmlns:a="http://schemas.openxmlformats.org/drawingml/2006/main" xmlns:r="http://schemas.openxmlformats.org/officeDocument/2006/relationships" xmlns:p="http://schemas.openxmlformats.org/presentationml/2006/main">
+  <p:cSld name="Slide 13">
+    <p:bg>
+      <p:bgPr>
+        <a:solidFill>
+          <a:srgbClr val="FFFFFF"/>
+        </a:solidFill>
+      </p:bgPr>
+    </p:bg>
+    <p:spTree>
+      <p:nvGrpSpPr>
+        <p:cNvPr id="1" name=""/>
+        <p:cNvGrpSpPr/>
+        <p:nvPr/>
+      </p:nvGrpSpPr>
+      <p:grpSpPr>
+        <a:xfrm>
+          <a:off x="0" y="0"/>
+          <a:ext cx="0" cy="0"/>
+          <a:chOff x="0" y="0"/>
+          <a:chExt cx="0" cy="0"/>
+        </a:xfrm>
+      </p:grpSpPr>
+      <p:sp>
+        <p:nvSpPr>
+          <p:cNvPr id="2" name="Text 0"/>
+          <p:cNvSpPr/>
+          <p:nvPr/>
+        </p:nvSpPr>
+        <p:spPr>
+          <a:xfrm>
+            <a:off x="0" y="0"/>
+            <a:ext cx="9144000" cy="101501"/>
+          </a:xfrm>
+          <a:prstGeom prst="rect">
+            <a:avLst/>
+          </a:prstGeom>
+          <a:solidFill>
+            <a:srgbClr val="277884"/>
+          </a:solidFill>
+          <a:ln/>
+        </p:spPr>
+        <p:txBody>
+          <a:bodyPr wrap="square" rtlCol="0" anchor="ctr"/>
+          <a:lstStyle/>
+          <a:p>
+            <a:pPr indent="0" marL="0">
+              <a:buNone/>
+            </a:pPr>
+            <a:endParaRPr lang="en-US" dirty="0"/>
+          </a:p>
+        </p:txBody>
+      </p:sp>
+      <p:sp>
+        <p:nvSpPr>
+          <p:cNvPr id="3" name="Text 1"/>
+          <p:cNvSpPr/>
+          <p:nvPr/>
+        </p:nvSpPr>
+        <p:spPr>
+          <a:xfrm>
+            <a:off x="406301" y="457051"/>
+            <a:ext cx="8498026" cy="274290"/>
+          </a:xfrm>
+          <a:prstGeom prst="rect">
+            <a:avLst/>
+          </a:prstGeom>
+          <a:noFill/>
+          <a:ln/>
+        </p:spPr>
+        <p:txBody>
+          <a:bodyPr wrap="square" lIns="0" tIns="0" rIns="0" bIns="0" rtlCol="0" anchor="t"/>
+          <a:lstStyle/>
+          <a:p>
+            <a:pPr algn="l" indent="0" marL="0">
+              <a:lnSpc>
+                <a:spcPts val="2160"/>
+              </a:lnSpc>
+              <a:spcBef>
+                <a:spcPts val="600"/>
+              </a:spcBef>
+              <a:spcAft>
+                <a:spcPts val="800"/>
+              </a:spcAft>
+              <a:buNone/>
+            </a:pPr>
+            <a:r>
+              <a:rPr lang="en-US" sz="1800" b="1" dirty="0">
+                <a:solidFill>
+                  <a:srgbClr val="FE4447"/>
+                </a:solidFill>
+                <a:latin typeface="Georgia" pitchFamily="34" charset="0"/>
+                <a:ea typeface="Georgia" pitchFamily="34" charset="-122"/>
+                <a:cs typeface="Georgia" pitchFamily="34" charset="-120"/>
+              </a:rPr>
+              <a:t>Activity (20 min) — Drill (cont.)</a:t>
+            </a:r>
+            <a:endParaRPr lang="en-US" sz="1800" dirty="0"/>
+          </a:p>
+        </p:txBody>
+      </p:sp>
+      <p:sp>
+        <p:nvSpPr>
+          <p:cNvPr id="4" name="Text 2"/>
+          <p:cNvSpPr/>
+          <p:nvPr/>
+        </p:nvSpPr>
+        <p:spPr>
+          <a:xfrm>
+            <a:off x="634901" y="883593"/>
+            <a:ext cx="8102798" cy="1500783"/>
+          </a:xfrm>
+          <a:prstGeom prst="rect">
+            <a:avLst/>
+          </a:prstGeom>
+          <a:noFill/>
+          <a:ln/>
+        </p:spPr>
+        <p:txBody>
+          <a:bodyPr wrap="square" lIns="0" tIns="0" rIns="0" bIns="0" rtlCol="0" anchor="t"/>
+          <a:lstStyle/>
           <a:p>
             <a:pPr algn="l" marL="342900" indent="-342900">
               <a:lnSpc>
@@ -2723,6 +4003,786 @@
               <a:buChar char="•"/>
             </a:pPr>
             <a:r>
+              <a:rPr lang="en-US" sz="1200" dirty="0">
+                <a:solidFill>
+                  <a:srgbClr val="1C2833"/>
+                </a:solidFill>
+                <a:latin typeface="Arial" pitchFamily="34" charset="0"/>
+                <a:ea typeface="Arial" pitchFamily="34" charset="-122"/>
+                <a:cs typeface="Arial" pitchFamily="34" charset="-120"/>
+              </a:rPr>
+              <a:t>Hand out the drill sheet — 20 problems, all single-digit × single-digit, both factors in 6–9.</a:t>
+            </a:r>
+            <a:endParaRPr lang="en-US" sz="1200" dirty="0"/>
+          </a:p>
+          <a:p>
+            <a:pPr algn="l" marL="342900" indent="-342900">
+              <a:lnSpc>
+                <a:spcPts val="1620"/>
+              </a:lnSpc>
+              <a:spcAft>
+                <a:spcPts val="300"/>
+              </a:spcAft>
+              <a:buSzPct val="100000"/>
+              <a:buChar char="•"/>
+            </a:pPr>
+            <a:r>
+              <a:rPr lang="en-US" sz="1200" dirty="0">
+                <a:solidFill>
+                  <a:srgbClr val="1C2833"/>
+                </a:solidFill>
+                <a:latin typeface="Arial" pitchFamily="34" charset="0"/>
+                <a:ea typeface="Arial" pitchFamily="34" charset="-122"/>
+                <a:cs typeface="Arial" pitchFamily="34" charset="-120"/>
+              </a:rPr>
+              <a:t>Working in pairs:</a:t>
+            </a:r>
+            <a:endParaRPr lang="en-US" sz="1200" dirty="0"/>
+          </a:p>
+          <a:p>
+            <a:pPr algn="l" marL="342900" indent="-342900">
+              <a:lnSpc>
+                <a:spcPts val="1620"/>
+              </a:lnSpc>
+              <a:spcAft>
+                <a:spcPts val="300"/>
+              </a:spcAft>
+              <a:buSzPct val="100000"/>
+              <a:buChar char="•"/>
+            </a:pPr>
+            <a:r>
+              <a:rPr lang="en-US" sz="1200" dirty="0">
+                <a:solidFill>
+                  <a:srgbClr val="1C2833"/>
+                </a:solidFill>
+                <a:latin typeface="Arial" pitchFamily="34" charset="0"/>
+                <a:ea typeface="Arial" pitchFamily="34" charset="-122"/>
+                <a:cs typeface="Arial" pitchFamily="34" charset="-120"/>
+              </a:rPr>
+              <a:t>Partner A reads problem 1 aloud.</a:t>
+            </a:r>
+            <a:endParaRPr lang="en-US" sz="1200" dirty="0"/>
+          </a:p>
+          <a:p>
+            <a:pPr algn="l" marL="342900" indent="-342900">
+              <a:lnSpc>
+                <a:spcPts val="1620"/>
+              </a:lnSpc>
+              <a:spcAft>
+                <a:spcPts val="300"/>
+              </a:spcAft>
+              <a:buSzPct val="100000"/>
+              <a:buChar char="•"/>
+            </a:pPr>
+            <a:r>
+              <a:rPr lang="en-US" sz="1200" dirty="0">
+                <a:solidFill>
+                  <a:srgbClr val="1C2833"/>
+                </a:solidFill>
+                <a:latin typeface="Arial" pitchFamily="34" charset="0"/>
+                <a:ea typeface="Arial" pitchFamily="34" charset="-122"/>
+                <a:cs typeface="Arial" pitchFamily="34" charset="-120"/>
+              </a:rPr>
+              <a:t>Partner B answers in under 3 seconds using Nikhilam.</a:t>
+            </a:r>
+            <a:endParaRPr lang="en-US" sz="1200" dirty="0"/>
+          </a:p>
+          <a:p>
+            <a:pPr algn="l" marL="342900" indent="-342900">
+              <a:lnSpc>
+                <a:spcPts val="1620"/>
+              </a:lnSpc>
+              <a:spcAft>
+                <a:spcPts val="300"/>
+              </a:spcAft>
+              <a:buSzPct val="100000"/>
+              <a:buChar char="•"/>
+            </a:pPr>
+            <a:r>
+              <a:rPr lang="en-US" sz="1200" dirty="0">
+                <a:solidFill>
+                  <a:srgbClr val="1C2833"/>
+                </a:solidFill>
+                <a:latin typeface="Arial" pitchFamily="34" charset="0"/>
+                <a:ea typeface="Arial" pitchFamily="34" charset="-122"/>
+                <a:cs typeface="Arial" pitchFamily="34" charset="-120"/>
+              </a:rPr>
+              <a:t>Swap.</a:t>
+            </a:r>
+            <a:endParaRPr lang="en-US" sz="1200" dirty="0"/>
+          </a:p>
+          <a:p>
+            <a:pPr algn="l" marL="342900" indent="-342900">
+              <a:lnSpc>
+                <a:spcPts val="1620"/>
+              </a:lnSpc>
+              <a:spcAft>
+                <a:spcPts val="300"/>
+              </a:spcAft>
+              <a:buSzPct val="100000"/>
+              <a:buChar char="•"/>
+            </a:pPr>
+            <a:r>
+              <a:rPr lang="en-US" sz="1200" dirty="0">
+                <a:solidFill>
+                  <a:srgbClr val="1C2833"/>
+                </a:solidFill>
+                <a:latin typeface="Arial" pitchFamily="34" charset="0"/>
+                <a:ea typeface="Arial" pitchFamily="34" charset="-122"/>
+                <a:cs typeface="Arial" pitchFamily="34" charset="-120"/>
+              </a:rPr>
+              <a:t>10 min of paired drill. Then 5 min of individual silent practice.</a:t>
+            </a:r>
+            <a:endParaRPr lang="en-US" sz="1200" dirty="0"/>
+          </a:p>
+        </p:txBody>
+      </p:sp>
+      <p:sp>
+        <p:nvSpPr>
+          <p:cNvPr id="5" name="Text 3"/>
+          <p:cNvSpPr/>
+          <p:nvPr/>
+        </p:nvSpPr>
+        <p:spPr>
+          <a:xfrm>
+            <a:off x="406301" y="4434929"/>
+            <a:ext cx="8498026" cy="213271"/>
+          </a:xfrm>
+          <a:prstGeom prst="rect">
+            <a:avLst/>
+          </a:prstGeom>
+          <a:noFill/>
+          <a:ln/>
+        </p:spPr>
+        <p:txBody>
+          <a:bodyPr wrap="square" lIns="0" tIns="0" rIns="0" bIns="0" rtlCol="0" anchor="t"/>
+          <a:lstStyle/>
+          <a:p>
+            <a:pPr algn="l" indent="0" marL="0">
+              <a:lnSpc>
+                <a:spcPts val="1680"/>
+              </a:lnSpc>
+              <a:spcBef>
+                <a:spcPts val="300"/>
+              </a:spcBef>
+              <a:spcAft>
+                <a:spcPts val="300"/>
+              </a:spcAft>
+              <a:buNone/>
+            </a:pPr>
+            <a:r>
+              <a:rPr lang="en-US" sz="1200" dirty="0">
+                <a:solidFill>
+                  <a:srgbClr val="1C2833"/>
+                </a:solidFill>
+                <a:latin typeface="Arial" pitchFamily="34" charset="0"/>
+                <a:ea typeface="Arial" pitchFamily="34" charset="-122"/>
+                <a:cs typeface="Arial" pitchFamily="34" charset="-120"/>
+              </a:rPr>
+              <a:t>Middle ·  · IKS Curriculum</a:t>
+            </a:r>
+            <a:endParaRPr lang="en-US" sz="1200" dirty="0"/>
+          </a:p>
+        </p:txBody>
+      </p:sp>
+    </p:spTree>
+  </p:cSld>
+  <p:clrMapOvr>
+    <a:masterClrMapping/>
+  </p:clrMapOvr>
+</p:sld>
+</file>
+
+<file path=ppt/slides/slide14.xml><?xml version="1.0" encoding="utf-8"?>
+<p:sld xmlns:a="http://schemas.openxmlformats.org/drawingml/2006/main" xmlns:r="http://schemas.openxmlformats.org/officeDocument/2006/relationships" xmlns:p="http://schemas.openxmlformats.org/presentationml/2006/main">
+  <p:cSld name="Slide 14">
+    <p:bg>
+      <p:bgPr>
+        <a:solidFill>
+          <a:srgbClr val="FFFFFF"/>
+        </a:solidFill>
+      </p:bgPr>
+    </p:bg>
+    <p:spTree>
+      <p:nvGrpSpPr>
+        <p:cNvPr id="1" name=""/>
+        <p:cNvGrpSpPr/>
+        <p:nvPr/>
+      </p:nvGrpSpPr>
+      <p:grpSpPr>
+        <a:xfrm>
+          <a:off x="0" y="0"/>
+          <a:ext cx="0" cy="0"/>
+          <a:chOff x="0" y="0"/>
+          <a:chExt cx="0" cy="0"/>
+        </a:xfrm>
+      </p:grpSpPr>
+      <p:sp>
+        <p:nvSpPr>
+          <p:cNvPr id="2" name="Text 0"/>
+          <p:cNvSpPr/>
+          <p:nvPr/>
+        </p:nvSpPr>
+        <p:spPr>
+          <a:xfrm>
+            <a:off x="0" y="0"/>
+            <a:ext cx="9144000" cy="101501"/>
+          </a:xfrm>
+          <a:prstGeom prst="rect">
+            <a:avLst/>
+          </a:prstGeom>
+          <a:solidFill>
+            <a:srgbClr val="277884"/>
+          </a:solidFill>
+          <a:ln/>
+        </p:spPr>
+        <p:txBody>
+          <a:bodyPr wrap="square" rtlCol="0" anchor="ctr"/>
+          <a:lstStyle/>
+          <a:p>
+            <a:pPr indent="0" marL="0">
+              <a:buNone/>
+            </a:pPr>
+            <a:endParaRPr lang="en-US" dirty="0"/>
+          </a:p>
+        </p:txBody>
+      </p:sp>
+      <p:sp>
+        <p:nvSpPr>
+          <p:cNvPr id="3" name="Text 1"/>
+          <p:cNvSpPr/>
+          <p:nvPr/>
+        </p:nvSpPr>
+        <p:spPr>
+          <a:xfrm>
+            <a:off x="406301" y="457051"/>
+            <a:ext cx="8498026" cy="274290"/>
+          </a:xfrm>
+          <a:prstGeom prst="rect">
+            <a:avLst/>
+          </a:prstGeom>
+          <a:noFill/>
+          <a:ln/>
+        </p:spPr>
+        <p:txBody>
+          <a:bodyPr wrap="square" lIns="0" tIns="0" rIns="0" bIns="0" rtlCol="0" anchor="t"/>
+          <a:lstStyle/>
+          <a:p>
+            <a:pPr algn="l" indent="0" marL="0">
+              <a:lnSpc>
+                <a:spcPts val="2160"/>
+              </a:lnSpc>
+              <a:spcBef>
+                <a:spcPts val="600"/>
+              </a:spcBef>
+              <a:spcAft>
+                <a:spcPts val="800"/>
+              </a:spcAft>
+              <a:buNone/>
+            </a:pPr>
+            <a:r>
+              <a:rPr lang="en-US" sz="1800" b="1" dirty="0">
+                <a:solidFill>
+                  <a:srgbClr val="FE4447"/>
+                </a:solidFill>
+                <a:latin typeface="Georgia" pitchFamily="34" charset="0"/>
+                <a:ea typeface="Georgia" pitchFamily="34" charset="-122"/>
+                <a:cs typeface="Georgia" pitchFamily="34" charset="-120"/>
+              </a:rPr>
+              <a:t>Activity (20 min) — Drill (cont.)</a:t>
+            </a:r>
+            <a:endParaRPr lang="en-US" sz="1800" dirty="0"/>
+          </a:p>
+        </p:txBody>
+      </p:sp>
+      <p:sp>
+        <p:nvSpPr>
+          <p:cNvPr id="4" name="Text 2"/>
+          <p:cNvSpPr/>
+          <p:nvPr/>
+        </p:nvSpPr>
+        <p:spPr>
+          <a:xfrm>
+            <a:off x="406301" y="870942"/>
+            <a:ext cx="8498026" cy="426541"/>
+          </a:xfrm>
+          <a:prstGeom prst="rect">
+            <a:avLst/>
+          </a:prstGeom>
+          <a:noFill/>
+          <a:ln/>
+        </p:spPr>
+        <p:txBody>
+          <a:bodyPr wrap="square" lIns="0" tIns="0" rIns="0" bIns="0" rtlCol="0" anchor="t"/>
+          <a:lstStyle/>
+          <a:p>
+            <a:pPr algn="l" indent="0" marL="0">
+              <a:lnSpc>
+                <a:spcPts val="1680"/>
+              </a:lnSpc>
+              <a:spcBef>
+                <a:spcPts val="300"/>
+              </a:spcBef>
+              <a:spcAft>
+                <a:spcPts val="300"/>
+              </a:spcAft>
+              <a:buNone/>
+            </a:pPr>
+            <a:r>
+              <a:rPr lang="en-US" sz="1200" dirty="0">
+                <a:solidFill>
+                  <a:srgbClr val="1C2833"/>
+                </a:solidFill>
+                <a:latin typeface="Arial" pitchFamily="34" charset="0"/>
+                <a:ea typeface="Arial" pitchFamily="34" charset="-122"/>
+                <a:cs typeface="Arial" pitchFamily="34" charset="-120"/>
+              </a:rPr>
+              <a:t>After 5 minutes of paired drills, do a class-level </a:t>
+            </a:r>
+            <a:pPr algn="l" indent="0" marL="0">
+              <a:lnSpc>
+                <a:spcPts val="1680"/>
+              </a:lnSpc>
+              <a:spcBef>
+                <a:spcPts val="300"/>
+              </a:spcBef>
+              <a:spcAft>
+                <a:spcPts val="300"/>
+              </a:spcAft>
+              <a:buNone/>
+            </a:pPr>
+            <a:r>
+              <a:rPr lang="en-US" sz="1200" b="1" dirty="0">
+                <a:solidFill>
+                  <a:srgbClr val="1C2833"/>
+                </a:solidFill>
+                <a:latin typeface="Arial" pitchFamily="34" charset="0"/>
+                <a:ea typeface="Arial" pitchFamily="34" charset="-122"/>
+                <a:cs typeface="Arial" pitchFamily="34" charset="-120"/>
+              </a:rPr>
+              <a:t>timing test</a:t>
+            </a:r>
+            <a:pPr algn="l" indent="0" marL="0">
+              <a:lnSpc>
+                <a:spcPts val="1680"/>
+              </a:lnSpc>
+              <a:spcBef>
+                <a:spcPts val="300"/>
+              </a:spcBef>
+              <a:spcAft>
+                <a:spcPts val="300"/>
+              </a:spcAft>
+              <a:buNone/>
+            </a:pPr>
+            <a:r>
+              <a:rPr lang="en-US" sz="1200" dirty="0">
+                <a:solidFill>
+                  <a:srgbClr val="1C2833"/>
+                </a:solidFill>
+                <a:latin typeface="Arial" pitchFamily="34" charset="0"/>
+                <a:ea typeface="Arial" pitchFamily="34" charset="-122"/>
+                <a:cs typeface="Arial" pitchFamily="34" charset="-120"/>
+              </a:rPr>
+              <a:t>: project 10 problems on the board; students answer all 10 individually in 60 seconds.</a:t>
+            </a:r>
+            <a:endParaRPr lang="en-US" sz="1200" dirty="0"/>
+          </a:p>
+        </p:txBody>
+      </p:sp>
+      <p:sp>
+        <p:nvSpPr>
+          <p:cNvPr id="5" name="Text 3"/>
+          <p:cNvSpPr/>
+          <p:nvPr/>
+        </p:nvSpPr>
+        <p:spPr>
+          <a:xfrm>
+            <a:off x="406301" y="4434929"/>
+            <a:ext cx="8498026" cy="213271"/>
+          </a:xfrm>
+          <a:prstGeom prst="rect">
+            <a:avLst/>
+          </a:prstGeom>
+          <a:noFill/>
+          <a:ln/>
+        </p:spPr>
+        <p:txBody>
+          <a:bodyPr wrap="square" lIns="0" tIns="0" rIns="0" bIns="0" rtlCol="0" anchor="t"/>
+          <a:lstStyle/>
+          <a:p>
+            <a:pPr algn="l" indent="0" marL="0">
+              <a:lnSpc>
+                <a:spcPts val="1680"/>
+              </a:lnSpc>
+              <a:spcBef>
+                <a:spcPts val="300"/>
+              </a:spcBef>
+              <a:spcAft>
+                <a:spcPts val="300"/>
+              </a:spcAft>
+              <a:buNone/>
+            </a:pPr>
+            <a:r>
+              <a:rPr lang="en-US" sz="1200" dirty="0">
+                <a:solidFill>
+                  <a:srgbClr val="1C2833"/>
+                </a:solidFill>
+                <a:latin typeface="Arial" pitchFamily="34" charset="0"/>
+                <a:ea typeface="Arial" pitchFamily="34" charset="-122"/>
+                <a:cs typeface="Arial" pitchFamily="34" charset="-120"/>
+              </a:rPr>
+              <a:t>Middle ·  · IKS Curriculum</a:t>
+            </a:r>
+            <a:endParaRPr lang="en-US" sz="1200" dirty="0"/>
+          </a:p>
+        </p:txBody>
+      </p:sp>
+    </p:spTree>
+  </p:cSld>
+  <p:clrMapOvr>
+    <a:masterClrMapping/>
+  </p:clrMapOvr>
+</p:sld>
+</file>
+
+<file path=ppt/slides/slide15.xml><?xml version="1.0" encoding="utf-8"?>
+<p:sld xmlns:a="http://schemas.openxmlformats.org/drawingml/2006/main" xmlns:r="http://schemas.openxmlformats.org/officeDocument/2006/relationships" xmlns:p="http://schemas.openxmlformats.org/presentationml/2006/main">
+  <p:cSld name="Slide 15">
+    <p:bg>
+      <p:bgPr>
+        <a:solidFill>
+          <a:srgbClr val="FFFFFF"/>
+        </a:solidFill>
+      </p:bgPr>
+    </p:bg>
+    <p:spTree>
+      <p:nvGrpSpPr>
+        <p:cNvPr id="1" name=""/>
+        <p:cNvGrpSpPr/>
+        <p:nvPr/>
+      </p:nvGrpSpPr>
+      <p:grpSpPr>
+        <a:xfrm>
+          <a:off x="0" y="0"/>
+          <a:ext cx="0" cy="0"/>
+          <a:chOff x="0" y="0"/>
+          <a:chExt cx="0" cy="0"/>
+        </a:xfrm>
+      </p:grpSpPr>
+      <p:sp>
+        <p:nvSpPr>
+          <p:cNvPr id="2" name="Text 0"/>
+          <p:cNvSpPr/>
+          <p:nvPr/>
+        </p:nvSpPr>
+        <p:spPr>
+          <a:xfrm>
+            <a:off x="0" y="0"/>
+            <a:ext cx="9144000" cy="101501"/>
+          </a:xfrm>
+          <a:prstGeom prst="rect">
+            <a:avLst/>
+          </a:prstGeom>
+          <a:solidFill>
+            <a:srgbClr val="277884"/>
+          </a:solidFill>
+          <a:ln/>
+        </p:spPr>
+        <p:txBody>
+          <a:bodyPr wrap="square" rtlCol="0" anchor="ctr"/>
+          <a:lstStyle/>
+          <a:p>
+            <a:pPr indent="0" marL="0">
+              <a:buNone/>
+            </a:pPr>
+            <a:endParaRPr lang="en-US" dirty="0"/>
+          </a:p>
+        </p:txBody>
+      </p:sp>
+      <p:sp>
+        <p:nvSpPr>
+          <p:cNvPr id="3" name="Text 1"/>
+          <p:cNvSpPr/>
+          <p:nvPr/>
+        </p:nvSpPr>
+        <p:spPr>
+          <a:xfrm>
+            <a:off x="406301" y="457051"/>
+            <a:ext cx="8498026" cy="274290"/>
+          </a:xfrm>
+          <a:prstGeom prst="rect">
+            <a:avLst/>
+          </a:prstGeom>
+          <a:noFill/>
+          <a:ln/>
+        </p:spPr>
+        <p:txBody>
+          <a:bodyPr wrap="square" lIns="0" tIns="0" rIns="0" bIns="0" rtlCol="0" anchor="t"/>
+          <a:lstStyle/>
+          <a:p>
+            <a:pPr algn="l" indent="0" marL="0">
+              <a:lnSpc>
+                <a:spcPts val="2160"/>
+              </a:lnSpc>
+              <a:spcBef>
+                <a:spcPts val="600"/>
+              </a:spcBef>
+              <a:spcAft>
+                <a:spcPts val="800"/>
+              </a:spcAft>
+              <a:buNone/>
+            </a:pPr>
+            <a:r>
+              <a:rPr lang="en-US" sz="1800" b="1" dirty="0">
+                <a:solidFill>
+                  <a:srgbClr val="FE4447"/>
+                </a:solidFill>
+                <a:latin typeface="Georgia" pitchFamily="34" charset="0"/>
+                <a:ea typeface="Georgia" pitchFamily="34" charset="-122"/>
+                <a:cs typeface="Georgia" pitchFamily="34" charset="-120"/>
+              </a:rPr>
+              <a:t>Wrap-up (5 min)</a:t>
+            </a:r>
+            <a:endParaRPr lang="en-US" sz="1800" dirty="0"/>
+          </a:p>
+        </p:txBody>
+      </p:sp>
+      <p:sp>
+        <p:nvSpPr>
+          <p:cNvPr id="4" name="Text 2"/>
+          <p:cNvSpPr/>
+          <p:nvPr/>
+        </p:nvSpPr>
+        <p:spPr>
+          <a:xfrm>
+            <a:off x="634901" y="883593"/>
+            <a:ext cx="8102798" cy="544711"/>
+          </a:xfrm>
+          <a:prstGeom prst="rect">
+            <a:avLst/>
+          </a:prstGeom>
+          <a:noFill/>
+          <a:ln/>
+        </p:spPr>
+        <p:txBody>
+          <a:bodyPr wrap="square" lIns="0" tIns="0" rIns="0" bIns="0" rtlCol="0" anchor="t"/>
+          <a:lstStyle/>
+          <a:p>
+            <a:pPr algn="l" marL="342900" indent="-342900">
+              <a:lnSpc>
+                <a:spcPts val="1620"/>
+              </a:lnSpc>
+              <a:spcAft>
+                <a:spcPts val="300"/>
+              </a:spcAft>
+              <a:buSzPct val="100000"/>
+              <a:buChar char="•"/>
+            </a:pPr>
+            <a:r>
+              <a:rPr lang="en-US" sz="1200" dirty="0">
+                <a:solidFill>
+                  <a:srgbClr val="1C2833"/>
+                </a:solidFill>
+                <a:latin typeface="Arial" pitchFamily="34" charset="0"/>
+                <a:ea typeface="Arial" pitchFamily="34" charset="-122"/>
+                <a:cs typeface="Arial" pitchFamily="34" charset="-120"/>
+              </a:rPr>
+              <a:t>Quick check: chorus answers — </a:t>
+            </a:r>
+            <a:pPr algn="l" indent="0" marL="0">
+              <a:lnSpc>
+                <a:spcPts val="1620"/>
+              </a:lnSpc>
+              <a:spcAft>
+                <a:spcPts val="300"/>
+              </a:spcAft>
+              <a:buNone/>
+            </a:pPr>
+            <a:r>
+              <a:rPr lang="en-US" sz="1200" dirty="0">
+                <a:solidFill>
+                  <a:srgbClr val="1C2833"/>
+                </a:solidFill>
+                <a:latin typeface="Arial" pitchFamily="34" charset="0"/>
+                <a:ea typeface="Arial" pitchFamily="34" charset="-122"/>
+                <a:cs typeface="Arial" pitchFamily="34" charset="-120"/>
+              </a:rPr>
+              <a:t>7 × 7</a:t>
+            </a:r>
+            <a:pPr algn="l" indent="0" marL="0">
+              <a:lnSpc>
+                <a:spcPts val="1620"/>
+              </a:lnSpc>
+              <a:spcAft>
+                <a:spcPts val="300"/>
+              </a:spcAft>
+              <a:buNone/>
+            </a:pPr>
+            <a:r>
+              <a:rPr lang="en-US" sz="1200" dirty="0">
+                <a:solidFill>
+                  <a:srgbClr val="1C2833"/>
+                </a:solidFill>
+                <a:latin typeface="Arial" pitchFamily="34" charset="0"/>
+                <a:ea typeface="Arial" pitchFamily="34" charset="-122"/>
+                <a:cs typeface="Arial" pitchFamily="34" charset="-120"/>
+              </a:rPr>
+              <a:t>? (49.) </a:t>
+            </a:r>
+            <a:pPr algn="l" indent="0" marL="0">
+              <a:lnSpc>
+                <a:spcPts val="1620"/>
+              </a:lnSpc>
+              <a:spcAft>
+                <a:spcPts val="300"/>
+              </a:spcAft>
+              <a:buNone/>
+            </a:pPr>
+            <a:r>
+              <a:rPr lang="en-US" sz="1200" dirty="0">
+                <a:solidFill>
+                  <a:srgbClr val="1C2833"/>
+                </a:solidFill>
+                <a:latin typeface="Arial" pitchFamily="34" charset="0"/>
+                <a:ea typeface="Arial" pitchFamily="34" charset="-122"/>
+                <a:cs typeface="Arial" pitchFamily="34" charset="-120"/>
+              </a:rPr>
+              <a:t>6 × 8</a:t>
+            </a:r>
+            <a:pPr algn="l" indent="0" marL="0">
+              <a:lnSpc>
+                <a:spcPts val="1620"/>
+              </a:lnSpc>
+              <a:spcAft>
+                <a:spcPts val="300"/>
+              </a:spcAft>
+              <a:buNone/>
+            </a:pPr>
+            <a:r>
+              <a:rPr lang="en-US" sz="1200" dirty="0">
+                <a:solidFill>
+                  <a:srgbClr val="1C2833"/>
+                </a:solidFill>
+                <a:latin typeface="Arial" pitchFamily="34" charset="0"/>
+                <a:ea typeface="Arial" pitchFamily="34" charset="-122"/>
+                <a:cs typeface="Arial" pitchFamily="34" charset="-120"/>
+              </a:rPr>
+              <a:t>? (48.) </a:t>
+            </a:r>
+            <a:pPr algn="l" indent="0" marL="0">
+              <a:lnSpc>
+                <a:spcPts val="1620"/>
+              </a:lnSpc>
+              <a:spcAft>
+                <a:spcPts val="300"/>
+              </a:spcAft>
+              <a:buNone/>
+            </a:pPr>
+            <a:r>
+              <a:rPr lang="en-US" sz="1200" dirty="0">
+                <a:solidFill>
+                  <a:srgbClr val="1C2833"/>
+                </a:solidFill>
+                <a:latin typeface="Arial" pitchFamily="34" charset="0"/>
+                <a:ea typeface="Arial" pitchFamily="34" charset="-122"/>
+                <a:cs typeface="Arial" pitchFamily="34" charset="-120"/>
+              </a:rPr>
+              <a:t>9 × 9</a:t>
+            </a:r>
+            <a:pPr algn="l" indent="0" marL="0">
+              <a:lnSpc>
+                <a:spcPts val="1620"/>
+              </a:lnSpc>
+              <a:spcAft>
+                <a:spcPts val="300"/>
+              </a:spcAft>
+              <a:buNone/>
+            </a:pPr>
+            <a:r>
+              <a:rPr lang="en-US" sz="1200" dirty="0">
+                <a:solidFill>
+                  <a:srgbClr val="1C2833"/>
+                </a:solidFill>
+                <a:latin typeface="Arial" pitchFamily="34" charset="0"/>
+                <a:ea typeface="Arial" pitchFamily="34" charset="-122"/>
+                <a:cs typeface="Arial" pitchFamily="34" charset="-120"/>
+              </a:rPr>
+              <a:t>? (81.) </a:t>
+            </a:r>
+            <a:pPr algn="l" indent="0" marL="0">
+              <a:lnSpc>
+                <a:spcPts val="1620"/>
+              </a:lnSpc>
+              <a:spcAft>
+                <a:spcPts val="300"/>
+              </a:spcAft>
+              <a:buNone/>
+            </a:pPr>
+            <a:r>
+              <a:rPr lang="en-US" sz="1200" dirty="0">
+                <a:solidFill>
+                  <a:srgbClr val="1C2833"/>
+                </a:solidFill>
+                <a:latin typeface="Arial" pitchFamily="34" charset="0"/>
+                <a:ea typeface="Arial" pitchFamily="34" charset="-122"/>
+                <a:cs typeface="Arial" pitchFamily="34" charset="-120"/>
+              </a:rPr>
+              <a:t>8 × 6</a:t>
+            </a:r>
+            <a:pPr algn="l" indent="0" marL="0">
+              <a:lnSpc>
+                <a:spcPts val="1620"/>
+              </a:lnSpc>
+              <a:spcAft>
+                <a:spcPts val="300"/>
+              </a:spcAft>
+              <a:buNone/>
+            </a:pPr>
+            <a:r>
+              <a:rPr lang="en-US" sz="1200" dirty="0">
+                <a:solidFill>
+                  <a:srgbClr val="1C2833"/>
+                </a:solidFill>
+                <a:latin typeface="Arial" pitchFamily="34" charset="0"/>
+                <a:ea typeface="Arial" pitchFamily="34" charset="-122"/>
+                <a:cs typeface="Arial" pitchFamily="34" charset="-120"/>
+              </a:rPr>
+              <a:t>? (48.)</a:t>
+            </a:r>
+            <a:endParaRPr lang="en-US" sz="1200" dirty="0"/>
+          </a:p>
+          <a:p>
+            <a:pPr algn="l" marL="342900" indent="-342900">
+              <a:lnSpc>
+                <a:spcPts val="1620"/>
+              </a:lnSpc>
+              <a:spcAft>
+                <a:spcPts val="300"/>
+              </a:spcAft>
+              <a:buSzPct val="100000"/>
+              <a:buChar char="•"/>
+            </a:pPr>
+            <a:r>
+              <a:rPr lang="en-US" sz="1200" dirty="0">
+                <a:solidFill>
+                  <a:srgbClr val="1C2833"/>
+                </a:solidFill>
+                <a:latin typeface="Arial" pitchFamily="34" charset="0"/>
+                <a:ea typeface="Arial" pitchFamily="34" charset="-122"/>
+                <a:cs typeface="Arial" pitchFamily="34" charset="-120"/>
+              </a:rPr>
+              <a:t>Preview Day 3: </a:t>
+            </a:r>
+            <a:pPr algn="l" indent="0" marL="0">
+              <a:lnSpc>
+                <a:spcPts val="1620"/>
+              </a:lnSpc>
+              <a:spcAft>
+                <a:spcPts val="300"/>
+              </a:spcAft>
+              <a:buNone/>
+            </a:pPr>
+            <a:r>
               <a:rPr lang="en-US" sz="1200" i="1" dirty="0">
                 <a:solidFill>
                   <a:srgbClr val="1C2833"/>
@@ -2731,35 +4791,1951 @@
                 <a:ea typeface="Arial" pitchFamily="34" charset="-122"/>
                 <a:cs typeface="Arial" pitchFamily="34" charset="-120"/>
               </a:rPr>
-              <a:t>Microsoft Word - sutras1.pdf</a:t>
-            </a:r>
-            <a:pPr algn="l" indent="0" marL="0">
+              <a:t>"Tomorrow — both numbers near 100. Same trick, slightly bigger."</a:t>
+            </a:r>
+            <a:endParaRPr lang="en-US" sz="1200" dirty="0"/>
+          </a:p>
+        </p:txBody>
+      </p:sp>
+      <p:sp>
+        <p:nvSpPr>
+          <p:cNvPr id="5" name="Text 3"/>
+          <p:cNvSpPr/>
+          <p:nvPr/>
+        </p:nvSpPr>
+        <p:spPr>
+          <a:xfrm>
+            <a:off x="406301" y="4434929"/>
+            <a:ext cx="8498026" cy="213271"/>
+          </a:xfrm>
+          <a:prstGeom prst="rect">
+            <a:avLst/>
+          </a:prstGeom>
+          <a:noFill/>
+          <a:ln/>
+        </p:spPr>
+        <p:txBody>
+          <a:bodyPr wrap="square" lIns="0" tIns="0" rIns="0" bIns="0" rtlCol="0" anchor="t"/>
+          <a:lstStyle/>
+          <a:p>
+            <a:pPr algn="l" indent="0" marL="0">
+              <a:lnSpc>
+                <a:spcPts val="1680"/>
+              </a:lnSpc>
+              <a:spcBef>
+                <a:spcPts val="300"/>
+              </a:spcBef>
+              <a:spcAft>
+                <a:spcPts val="300"/>
+              </a:spcAft>
+              <a:buNone/>
+            </a:pPr>
+            <a:r>
+              <a:rPr lang="en-US" sz="1200" dirty="0">
+                <a:solidFill>
+                  <a:srgbClr val="1C2833"/>
+                </a:solidFill>
+                <a:latin typeface="Arial" pitchFamily="34" charset="0"/>
+                <a:ea typeface="Arial" pitchFamily="34" charset="-122"/>
+                <a:cs typeface="Arial" pitchFamily="34" charset="-120"/>
+              </a:rPr>
+              <a:t>Middle ·  · IKS Curriculum</a:t>
+            </a:r>
+            <a:endParaRPr lang="en-US" sz="1200" dirty="0"/>
+          </a:p>
+        </p:txBody>
+      </p:sp>
+    </p:spTree>
+  </p:cSld>
+  <p:clrMapOvr>
+    <a:masterClrMapping/>
+  </p:clrMapOvr>
+</p:sld>
+</file>
+
+<file path=ppt/slides/slide16.xml><?xml version="1.0" encoding="utf-8"?>
+<p:sld xmlns:a="http://schemas.openxmlformats.org/drawingml/2006/main" xmlns:r="http://schemas.openxmlformats.org/officeDocument/2006/relationships" xmlns:p="http://schemas.openxmlformats.org/presentationml/2006/main">
+  <p:cSld name="Slide 16">
+    <p:bg>
+      <p:bgPr>
+        <a:solidFill>
+          <a:srgbClr val="FFFFFF"/>
+        </a:solidFill>
+      </p:bgPr>
+    </p:bg>
+    <p:spTree>
+      <p:nvGrpSpPr>
+        <p:cNvPr id="1" name=""/>
+        <p:cNvGrpSpPr/>
+        <p:nvPr/>
+      </p:nvGrpSpPr>
+      <p:grpSpPr>
+        <a:xfrm>
+          <a:off x="0" y="0"/>
+          <a:ext cx="0" cy="0"/>
+          <a:chOff x="0" y="0"/>
+          <a:chExt cx="0" cy="0"/>
+        </a:xfrm>
+      </p:grpSpPr>
+      <p:sp>
+        <p:nvSpPr>
+          <p:cNvPr id="2" name="Text 0"/>
+          <p:cNvSpPr/>
+          <p:nvPr/>
+        </p:nvSpPr>
+        <p:spPr>
+          <a:xfrm>
+            <a:off x="0" y="0"/>
+            <a:ext cx="9144000" cy="101501"/>
+          </a:xfrm>
+          <a:prstGeom prst="rect">
+            <a:avLst/>
+          </a:prstGeom>
+          <a:solidFill>
+            <a:srgbClr val="277884"/>
+          </a:solidFill>
+          <a:ln/>
+        </p:spPr>
+        <p:txBody>
+          <a:bodyPr wrap="square" rtlCol="0" anchor="ctr"/>
+          <a:lstStyle/>
+          <a:p>
+            <a:pPr indent="0" marL="0">
+              <a:buNone/>
+            </a:pPr>
+            <a:endParaRPr lang="en-US" dirty="0"/>
+          </a:p>
+        </p:txBody>
+      </p:sp>
+      <p:sp>
+        <p:nvSpPr>
+          <p:cNvPr id="3" name="Text 1"/>
+          <p:cNvSpPr/>
+          <p:nvPr/>
+        </p:nvSpPr>
+        <p:spPr>
+          <a:xfrm>
+            <a:off x="406301" y="457051"/>
+            <a:ext cx="8498026" cy="274290"/>
+          </a:xfrm>
+          <a:prstGeom prst="rect">
+            <a:avLst/>
+          </a:prstGeom>
+          <a:noFill/>
+          <a:ln/>
+        </p:spPr>
+        <p:txBody>
+          <a:bodyPr wrap="square" lIns="0" tIns="0" rIns="0" bIns="0" rtlCol="0" anchor="t"/>
+          <a:lstStyle/>
+          <a:p>
+            <a:pPr algn="l" indent="0" marL="0">
+              <a:lnSpc>
+                <a:spcPts val="2160"/>
+              </a:lnSpc>
+              <a:spcBef>
+                <a:spcPts val="600"/>
+              </a:spcBef>
+              <a:spcAft>
+                <a:spcPts val="800"/>
+              </a:spcAft>
+              <a:buNone/>
+            </a:pPr>
+            <a:r>
+              <a:rPr lang="en-US" sz="1800" b="1" dirty="0">
+                <a:solidFill>
+                  <a:srgbClr val="FE4447"/>
+                </a:solidFill>
+                <a:latin typeface="Georgia" pitchFamily="34" charset="0"/>
+                <a:ea typeface="Georgia" pitchFamily="34" charset="-122"/>
+                <a:cs typeface="Georgia" pitchFamily="34" charset="-120"/>
+              </a:rPr>
+              <a:t>Student-facing content</a:t>
+            </a:r>
+            <a:endParaRPr lang="en-US" sz="1800" dirty="0"/>
+          </a:p>
+        </p:txBody>
+      </p:sp>
+      <p:sp>
+        <p:nvSpPr>
+          <p:cNvPr id="4" name="Text 2"/>
+          <p:cNvSpPr/>
+          <p:nvPr/>
+        </p:nvSpPr>
+        <p:spPr>
+          <a:xfrm>
+            <a:off x="406301" y="883593"/>
+            <a:ext cx="8331398" cy="3090863"/>
+          </a:xfrm>
+          <a:prstGeom prst="rect">
+            <a:avLst/>
+          </a:prstGeom>
+          <a:solidFill>
+            <a:srgbClr val="F4F8F9"/>
+          </a:solidFill>
+          <a:ln/>
+        </p:spPr>
+        <p:txBody>
+          <a:bodyPr wrap="square" rtlCol="0" anchor="ctr"/>
+          <a:lstStyle/>
+          <a:p>
+            <a:pPr indent="0" marL="0">
+              <a:buNone/>
+            </a:pPr>
+            <a:endParaRPr lang="en-US" dirty="0"/>
+          </a:p>
+        </p:txBody>
+      </p:sp>
+      <p:sp>
+        <p:nvSpPr>
+          <p:cNvPr id="5" name="Shape 3"/>
+          <p:cNvSpPr/>
+          <p:nvPr/>
+        </p:nvSpPr>
+        <p:spPr>
+          <a:xfrm>
+            <a:off x="434876" y="883593"/>
+            <a:ext cx="0" cy="3090863"/>
+          </a:xfrm>
+          <a:prstGeom prst="line">
+            <a:avLst/>
+          </a:prstGeom>
+          <a:noFill/>
+          <a:ln w="57150">
+            <a:solidFill>
+              <a:srgbClr val="FE4447"/>
+            </a:solidFill>
+            <a:prstDash val="solid"/>
+          </a:ln>
+        </p:spPr>
+      </p:sp>
+      <p:sp>
+        <p:nvSpPr>
+          <p:cNvPr id="6" name="Text 4"/>
+          <p:cNvSpPr/>
+          <p:nvPr/>
+        </p:nvSpPr>
+        <p:spPr>
+          <a:xfrm>
+            <a:off x="692051" y="1074093"/>
+            <a:ext cx="7973389" cy="230981"/>
+          </a:xfrm>
+          <a:prstGeom prst="rect">
+            <a:avLst/>
+          </a:prstGeom>
+          <a:noFill/>
+          <a:ln/>
+        </p:spPr>
+        <p:txBody>
+          <a:bodyPr wrap="square" lIns="0" tIns="0" rIns="0" bIns="0" rtlCol="0" anchor="t"/>
+          <a:lstStyle/>
+          <a:p>
+            <a:pPr algn="l" indent="0" marL="0">
+              <a:lnSpc>
+                <a:spcPts val="1820"/>
+              </a:lnSpc>
+              <a:spcBef>
+                <a:spcPts val="300"/>
+              </a:spcBef>
+              <a:spcAft>
+                <a:spcPts val="300"/>
+              </a:spcAft>
+              <a:buNone/>
+            </a:pPr>
+            <a:r>
+              <a:rPr lang="en-US" sz="1300" b="1" i="1" dirty="0">
+                <a:solidFill>
+                  <a:srgbClr val="1C2833"/>
+                </a:solidFill>
+                <a:latin typeface="Georgia" pitchFamily="34" charset="0"/>
+                <a:ea typeface="Georgia" pitchFamily="34" charset="-122"/>
+                <a:cs typeface="Georgia" pitchFamily="34" charset="-120"/>
+              </a:rPr>
+              <a:t>Single-digit Nikhilam (base = 10)</a:t>
+            </a:r>
+            <a:endParaRPr lang="en-US" sz="1300" dirty="0"/>
+          </a:p>
+        </p:txBody>
+      </p:sp>
+      <p:sp>
+        <p:nvSpPr>
+          <p:cNvPr id="7" name="Text 5"/>
+          <p:cNvSpPr/>
+          <p:nvPr/>
+        </p:nvSpPr>
+        <p:spPr>
+          <a:xfrm>
+            <a:off x="692051" y="1343174"/>
+            <a:ext cx="7973389" cy="230981"/>
+          </a:xfrm>
+          <a:prstGeom prst="rect">
+            <a:avLst/>
+          </a:prstGeom>
+          <a:noFill/>
+          <a:ln/>
+        </p:spPr>
+        <p:txBody>
+          <a:bodyPr wrap="square" lIns="0" tIns="0" rIns="0" bIns="0" rtlCol="0" anchor="t"/>
+          <a:lstStyle/>
+          <a:p>
+            <a:pPr algn="l" indent="0" marL="0">
+              <a:lnSpc>
+                <a:spcPts val="1820"/>
+              </a:lnSpc>
+              <a:spcBef>
+                <a:spcPts val="300"/>
+              </a:spcBef>
+              <a:spcAft>
+                <a:spcPts val="300"/>
+              </a:spcAft>
+              <a:buNone/>
+            </a:pPr>
+            <a:r>
+              <a:rPr lang="en-US" sz="1300" dirty="0">
+                <a:solidFill>
+                  <a:srgbClr val="1C2833"/>
+                </a:solidFill>
+                <a:latin typeface="Georgia" pitchFamily="34" charset="0"/>
+                <a:ea typeface="Georgia" pitchFamily="34" charset="-122"/>
+                <a:cs typeface="Georgia" pitchFamily="34" charset="-120"/>
+              </a:rPr>
+              <a:t>Find each digit's </a:t>
+            </a:r>
+            <a:pPr algn="l" indent="0" marL="0">
+              <a:lnSpc>
+                <a:spcPts val="1820"/>
+              </a:lnSpc>
+              <a:spcBef>
+                <a:spcPts val="300"/>
+              </a:spcBef>
+              <a:spcAft>
+                <a:spcPts val="300"/>
+              </a:spcAft>
+              <a:buNone/>
+            </a:pPr>
+            <a:r>
+              <a:rPr lang="en-US" sz="1300" b="1" i="1" dirty="0">
+                <a:solidFill>
+                  <a:srgbClr val="1C2833"/>
+                </a:solidFill>
+                <a:latin typeface="Georgia" pitchFamily="34" charset="0"/>
+                <a:ea typeface="Georgia" pitchFamily="34" charset="-122"/>
+                <a:cs typeface="Georgia" pitchFamily="34" charset="-120"/>
+              </a:rPr>
+              <a:t>deficit from 10</a:t>
+            </a:r>
+            <a:pPr algn="l" indent="0" marL="0">
+              <a:lnSpc>
+                <a:spcPts val="1820"/>
+              </a:lnSpc>
+              <a:spcBef>
+                <a:spcPts val="300"/>
+              </a:spcBef>
+              <a:spcAft>
+                <a:spcPts val="300"/>
+              </a:spcAft>
+              <a:buNone/>
+            </a:pPr>
+            <a:r>
+              <a:rPr lang="en-US" sz="1300" dirty="0">
+                <a:solidFill>
+                  <a:srgbClr val="1C2833"/>
+                </a:solidFill>
+                <a:latin typeface="Georgia" pitchFamily="34" charset="0"/>
+                <a:ea typeface="Georgia" pitchFamily="34" charset="-122"/>
+                <a:cs typeface="Georgia" pitchFamily="34" charset="-120"/>
+              </a:rPr>
+              <a:t>.</a:t>
+            </a:r>
+            <a:endParaRPr lang="en-US" sz="1300" dirty="0"/>
+          </a:p>
+        </p:txBody>
+      </p:sp>
+      <p:sp>
+        <p:nvSpPr>
+          <p:cNvPr id="8" name="Text 6"/>
+          <p:cNvSpPr/>
+          <p:nvPr/>
+        </p:nvSpPr>
+        <p:spPr>
+          <a:xfrm>
+            <a:off x="692051" y="1612255"/>
+            <a:ext cx="7973389" cy="230981"/>
+          </a:xfrm>
+          <a:prstGeom prst="rect">
+            <a:avLst/>
+          </a:prstGeom>
+          <a:noFill/>
+          <a:ln/>
+        </p:spPr>
+        <p:txBody>
+          <a:bodyPr wrap="square" lIns="0" tIns="0" rIns="0" bIns="0" rtlCol="0" anchor="t"/>
+          <a:lstStyle/>
+          <a:p>
+            <a:pPr algn="l" indent="0" marL="0">
+              <a:lnSpc>
+                <a:spcPts val="1820"/>
+              </a:lnSpc>
+              <a:spcBef>
+                <a:spcPts val="300"/>
+              </a:spcBef>
+              <a:spcAft>
+                <a:spcPts val="300"/>
+              </a:spcAft>
+              <a:buNone/>
+            </a:pPr>
+            <a:r>
+              <a:rPr lang="en-US" sz="1300" i="1" dirty="0">
+                <a:solidFill>
+                  <a:srgbClr val="1C2833"/>
+                </a:solidFill>
+                <a:latin typeface="Georgia" pitchFamily="34" charset="0"/>
+                <a:ea typeface="Georgia" pitchFamily="34" charset="-122"/>
+                <a:cs typeface="Georgia" pitchFamily="34" charset="-120"/>
+              </a:rPr>
+              <a:t>Cross-subtract for the LEFT part.</a:t>
+            </a:r>
+            <a:endParaRPr lang="en-US" sz="1300" dirty="0"/>
+          </a:p>
+        </p:txBody>
+      </p:sp>
+      <p:sp>
+        <p:nvSpPr>
+          <p:cNvPr id="9" name="Text 7"/>
+          <p:cNvSpPr/>
+          <p:nvPr/>
+        </p:nvSpPr>
+        <p:spPr>
+          <a:xfrm>
+            <a:off x="692051" y="1881336"/>
+            <a:ext cx="7973389" cy="230981"/>
+          </a:xfrm>
+          <a:prstGeom prst="rect">
+            <a:avLst/>
+          </a:prstGeom>
+          <a:noFill/>
+          <a:ln/>
+        </p:spPr>
+        <p:txBody>
+          <a:bodyPr wrap="square" lIns="0" tIns="0" rIns="0" bIns="0" rtlCol="0" anchor="t"/>
+          <a:lstStyle/>
+          <a:p>
+            <a:pPr algn="l" indent="0" marL="0">
+              <a:lnSpc>
+                <a:spcPts val="1820"/>
+              </a:lnSpc>
+              <a:spcBef>
+                <a:spcPts val="300"/>
+              </a:spcBef>
+              <a:spcAft>
+                <a:spcPts val="300"/>
+              </a:spcAft>
+              <a:buNone/>
+            </a:pPr>
+            <a:r>
+              <a:rPr lang="en-US" sz="1300" i="1" dirty="0">
+                <a:solidFill>
+                  <a:srgbClr val="1C2833"/>
+                </a:solidFill>
+                <a:latin typeface="Georgia" pitchFamily="34" charset="0"/>
+                <a:ea typeface="Georgia" pitchFamily="34" charset="-122"/>
+                <a:cs typeface="Georgia" pitchFamily="34" charset="-120"/>
+              </a:rPr>
+              <a:t>Multiply the deficits for the RIGHT part.</a:t>
+            </a:r>
+            <a:endParaRPr lang="en-US" sz="1300" dirty="0"/>
+          </a:p>
+        </p:txBody>
+      </p:sp>
+      <p:sp>
+        <p:nvSpPr>
+          <p:cNvPr id="10" name="Text 8"/>
+          <p:cNvSpPr/>
+          <p:nvPr/>
+        </p:nvSpPr>
+        <p:spPr>
+          <a:xfrm>
+            <a:off x="692051" y="2150418"/>
+            <a:ext cx="7973389" cy="230981"/>
+          </a:xfrm>
+          <a:prstGeom prst="rect">
+            <a:avLst/>
+          </a:prstGeom>
+          <a:noFill/>
+          <a:ln/>
+        </p:spPr>
+        <p:txBody>
+          <a:bodyPr wrap="square" lIns="0" tIns="0" rIns="0" bIns="0" rtlCol="0" anchor="t"/>
+          <a:lstStyle/>
+          <a:p>
+            <a:pPr algn="l" indent="0" marL="0">
+              <a:lnSpc>
+                <a:spcPts val="1820"/>
+              </a:lnSpc>
+              <a:spcBef>
+                <a:spcPts val="300"/>
+              </a:spcBef>
+              <a:spcAft>
+                <a:spcPts val="300"/>
+              </a:spcAft>
+              <a:buNone/>
+            </a:pPr>
+            <a:r>
+              <a:rPr lang="en-US" sz="1300" dirty="0">
+                <a:solidFill>
+                  <a:srgbClr val="1C2833"/>
+                </a:solidFill>
+                <a:latin typeface="Georgia" pitchFamily="34" charset="0"/>
+                <a:ea typeface="Georgia" pitchFamily="34" charset="-122"/>
+                <a:cs typeface="Georgia" pitchFamily="34" charset="-120"/>
+              </a:rPr>
+              <a:t>Stick them together. If the RIGHT part is 2 digits, </a:t>
+            </a:r>
+            <a:pPr algn="l" indent="0" marL="0">
+              <a:lnSpc>
+                <a:spcPts val="1820"/>
+              </a:lnSpc>
+              <a:spcBef>
+                <a:spcPts val="300"/>
+              </a:spcBef>
+              <a:spcAft>
+                <a:spcPts val="300"/>
+              </a:spcAft>
+              <a:buNone/>
+            </a:pPr>
+            <a:r>
+              <a:rPr lang="en-US" sz="1300" b="1" i="1" dirty="0">
+                <a:solidFill>
+                  <a:srgbClr val="1C2833"/>
+                </a:solidFill>
+                <a:latin typeface="Georgia" pitchFamily="34" charset="0"/>
+                <a:ea typeface="Georgia" pitchFamily="34" charset="-122"/>
+                <a:cs typeface="Georgia" pitchFamily="34" charset="-120"/>
+              </a:rPr>
+              <a:t>carry</a:t>
+            </a:r>
+            <a:pPr algn="l" indent="0" marL="0">
+              <a:lnSpc>
+                <a:spcPts val="1820"/>
+              </a:lnSpc>
+              <a:spcBef>
+                <a:spcPts val="300"/>
+              </a:spcBef>
+              <a:spcAft>
+                <a:spcPts val="300"/>
+              </a:spcAft>
+              <a:buNone/>
+            </a:pPr>
+            <a:r>
+              <a:rPr lang="en-US" sz="1300" dirty="0">
+                <a:solidFill>
+                  <a:srgbClr val="1C2833"/>
+                </a:solidFill>
+                <a:latin typeface="Georgia" pitchFamily="34" charset="0"/>
+                <a:ea typeface="Georgia" pitchFamily="34" charset="-122"/>
+                <a:cs typeface="Georgia" pitchFamily="34" charset="-120"/>
+              </a:rPr>
+              <a:t> the overflow.</a:t>
+            </a:r>
+            <a:endParaRPr lang="en-US" sz="1300" dirty="0"/>
+          </a:p>
+        </p:txBody>
+      </p:sp>
+      <p:sp>
+        <p:nvSpPr>
+          <p:cNvPr id="11" name="Text 9"/>
+          <p:cNvSpPr/>
+          <p:nvPr/>
+        </p:nvSpPr>
+        <p:spPr>
+          <a:xfrm>
+            <a:off x="692051" y="2419499"/>
+            <a:ext cx="7973389" cy="230981"/>
+          </a:xfrm>
+          <a:prstGeom prst="rect">
+            <a:avLst/>
+          </a:prstGeom>
+          <a:noFill/>
+          <a:ln/>
+        </p:spPr>
+        <p:txBody>
+          <a:bodyPr wrap="square" lIns="0" tIns="0" rIns="0" bIns="0" rtlCol="0" anchor="t"/>
+          <a:lstStyle/>
+          <a:p>
+            <a:pPr algn="l" indent="0" marL="0">
+              <a:lnSpc>
+                <a:spcPts val="1820"/>
+              </a:lnSpc>
+              <a:spcBef>
+                <a:spcPts val="300"/>
+              </a:spcBef>
+              <a:spcAft>
+                <a:spcPts val="300"/>
+              </a:spcAft>
+              <a:buNone/>
+            </a:pPr>
+            <a:r>
+              <a:rPr lang="en-US" sz="1300" b="1" i="1" dirty="0">
+                <a:solidFill>
+                  <a:srgbClr val="1C2833"/>
+                </a:solidFill>
+                <a:latin typeface="Georgia" pitchFamily="34" charset="0"/>
+                <a:ea typeface="Georgia" pitchFamily="34" charset="-122"/>
+                <a:cs typeface="Georgia" pitchFamily="34" charset="-120"/>
+              </a:rPr>
+              <a:t>Examples:</a:t>
+            </a:r>
+            <a:endParaRPr lang="en-US" sz="1300" dirty="0"/>
+          </a:p>
+        </p:txBody>
+      </p:sp>
+      <p:sp>
+        <p:nvSpPr>
+          <p:cNvPr id="12" name="Text 10"/>
+          <p:cNvSpPr/>
+          <p:nvPr/>
+        </p:nvSpPr>
+        <p:spPr>
+          <a:xfrm>
+            <a:off x="692051" y="2688580"/>
+            <a:ext cx="7973389" cy="250031"/>
+          </a:xfrm>
+          <a:prstGeom prst="rect">
+            <a:avLst/>
+          </a:prstGeom>
+          <a:noFill/>
+          <a:ln/>
+        </p:spPr>
+        <p:txBody>
+          <a:bodyPr wrap="square" lIns="0" tIns="0" rIns="0" bIns="0" rtlCol="0" anchor="t"/>
+          <a:lstStyle/>
+          <a:p>
+            <a:pPr algn="l" indent="0" marL="0">
+              <a:lnSpc>
+                <a:spcPts val="1820"/>
+              </a:lnSpc>
+              <a:spcBef>
+                <a:spcPts val="300"/>
+              </a:spcBef>
+              <a:spcAft>
+                <a:spcPts val="300"/>
+              </a:spcAft>
+              <a:buNone/>
+            </a:pPr>
+            <a:r>
+              <a:rPr lang="en-US" sz="1300" i="1" dirty="0">
+                <a:solidFill>
+                  <a:srgbClr val="1C2833"/>
+                </a:solidFill>
+                <a:latin typeface="Georgia" pitchFamily="34" charset="0"/>
+                <a:ea typeface="Georgia" pitchFamily="34" charset="-122"/>
+                <a:cs typeface="Georgia" pitchFamily="34" charset="-120"/>
+              </a:rPr>
+              <a:t>7 × 8</a:t>
+            </a:r>
+            <a:pPr algn="l" indent="0" marL="0">
+              <a:lnSpc>
+                <a:spcPts val="1820"/>
+              </a:lnSpc>
+              <a:spcBef>
+                <a:spcPts val="300"/>
+              </a:spcBef>
+              <a:spcAft>
+                <a:spcPts val="300"/>
+              </a:spcAft>
+              <a:buNone/>
+            </a:pPr>
+            <a:r>
+              <a:rPr lang="en-US" sz="1300" dirty="0">
+                <a:solidFill>
+                  <a:srgbClr val="1C2833"/>
+                </a:solidFill>
+                <a:latin typeface="Georgia" pitchFamily="34" charset="0"/>
+                <a:ea typeface="Georgia" pitchFamily="34" charset="-122"/>
+                <a:cs typeface="Georgia" pitchFamily="34" charset="-120"/>
+              </a:rPr>
+              <a:t>: 7−2=5; 3×2=6 → </a:t>
+            </a:r>
+            <a:pPr algn="l" indent="0" marL="0">
+              <a:lnSpc>
+                <a:spcPts val="1820"/>
+              </a:lnSpc>
+              <a:spcBef>
+                <a:spcPts val="300"/>
+              </a:spcBef>
+              <a:spcAft>
+                <a:spcPts val="300"/>
+              </a:spcAft>
+              <a:buNone/>
+            </a:pPr>
+            <a:r>
+              <a:rPr lang="en-US" sz="1300" b="1" i="1" dirty="0">
+                <a:solidFill>
+                  <a:srgbClr val="1C2833"/>
+                </a:solidFill>
+                <a:latin typeface="Georgia" pitchFamily="34" charset="0"/>
+                <a:ea typeface="Georgia" pitchFamily="34" charset="-122"/>
+                <a:cs typeface="Georgia" pitchFamily="34" charset="-120"/>
+              </a:rPr>
+              <a:t>56</a:t>
+            </a:r>
+            <a:pPr algn="l" indent="0" marL="0">
+              <a:lnSpc>
+                <a:spcPts val="1820"/>
+              </a:lnSpc>
+              <a:spcBef>
+                <a:spcPts val="300"/>
+              </a:spcBef>
+              <a:spcAft>
+                <a:spcPts val="300"/>
+              </a:spcAft>
+              <a:buNone/>
+            </a:pPr>
+            <a:r>
+              <a:rPr lang="en-US" sz="1300" dirty="0">
+                <a:solidFill>
+                  <a:srgbClr val="1C2833"/>
+                </a:solidFill>
+                <a:latin typeface="Georgia" pitchFamily="34" charset="0"/>
+                <a:ea typeface="Georgia" pitchFamily="34" charset="-122"/>
+                <a:cs typeface="Georgia" pitchFamily="34" charset="-120"/>
+              </a:rPr>
+              <a:t>.</a:t>
+            </a:r>
+            <a:endParaRPr lang="en-US" sz="1300" dirty="0"/>
+          </a:p>
+        </p:txBody>
+      </p:sp>
+      <p:sp>
+        <p:nvSpPr>
+          <p:cNvPr id="13" name="Text 11"/>
+          <p:cNvSpPr/>
+          <p:nvPr/>
+        </p:nvSpPr>
+        <p:spPr>
+          <a:xfrm>
+            <a:off x="692051" y="2976711"/>
+            <a:ext cx="7973389" cy="250031"/>
+          </a:xfrm>
+          <a:prstGeom prst="rect">
+            <a:avLst/>
+          </a:prstGeom>
+          <a:noFill/>
+          <a:ln/>
+        </p:spPr>
+        <p:txBody>
+          <a:bodyPr wrap="square" lIns="0" tIns="0" rIns="0" bIns="0" rtlCol="0" anchor="t"/>
+          <a:lstStyle/>
+          <a:p>
+            <a:pPr algn="l" indent="0" marL="0">
+              <a:lnSpc>
+                <a:spcPts val="1820"/>
+              </a:lnSpc>
+              <a:spcBef>
+                <a:spcPts val="300"/>
+              </a:spcBef>
+              <a:spcAft>
+                <a:spcPts val="300"/>
+              </a:spcAft>
+              <a:buNone/>
+            </a:pPr>
+            <a:r>
+              <a:rPr lang="en-US" sz="1300" i="1" dirty="0">
+                <a:solidFill>
+                  <a:srgbClr val="1C2833"/>
+                </a:solidFill>
+                <a:latin typeface="Georgia" pitchFamily="34" charset="0"/>
+                <a:ea typeface="Georgia" pitchFamily="34" charset="-122"/>
+                <a:cs typeface="Georgia" pitchFamily="34" charset="-120"/>
+              </a:rPr>
+              <a:t>9 × 8</a:t>
+            </a:r>
+            <a:pPr algn="l" indent="0" marL="0">
+              <a:lnSpc>
+                <a:spcPts val="1820"/>
+              </a:lnSpc>
+              <a:spcBef>
+                <a:spcPts val="300"/>
+              </a:spcBef>
+              <a:spcAft>
+                <a:spcPts val="300"/>
+              </a:spcAft>
+              <a:buNone/>
+            </a:pPr>
+            <a:r>
+              <a:rPr lang="en-US" sz="1300" dirty="0">
+                <a:solidFill>
+                  <a:srgbClr val="1C2833"/>
+                </a:solidFill>
+                <a:latin typeface="Georgia" pitchFamily="34" charset="0"/>
+                <a:ea typeface="Georgia" pitchFamily="34" charset="-122"/>
+                <a:cs typeface="Georgia" pitchFamily="34" charset="-120"/>
+              </a:rPr>
+              <a:t>: 9−2=7; 1×2=2 → </a:t>
+            </a:r>
+            <a:pPr algn="l" indent="0" marL="0">
+              <a:lnSpc>
+                <a:spcPts val="1820"/>
+              </a:lnSpc>
+              <a:spcBef>
+                <a:spcPts val="300"/>
+              </a:spcBef>
+              <a:spcAft>
+                <a:spcPts val="300"/>
+              </a:spcAft>
+              <a:buNone/>
+            </a:pPr>
+            <a:r>
+              <a:rPr lang="en-US" sz="1300" b="1" i="1" dirty="0">
+                <a:solidFill>
+                  <a:srgbClr val="1C2833"/>
+                </a:solidFill>
+                <a:latin typeface="Georgia" pitchFamily="34" charset="0"/>
+                <a:ea typeface="Georgia" pitchFamily="34" charset="-122"/>
+                <a:cs typeface="Georgia" pitchFamily="34" charset="-120"/>
+              </a:rPr>
+              <a:t>72</a:t>
+            </a:r>
+            <a:pPr algn="l" indent="0" marL="0">
+              <a:lnSpc>
+                <a:spcPts val="1820"/>
+              </a:lnSpc>
+              <a:spcBef>
+                <a:spcPts val="300"/>
+              </a:spcBef>
+              <a:spcAft>
+                <a:spcPts val="300"/>
+              </a:spcAft>
+              <a:buNone/>
+            </a:pPr>
+            <a:r>
+              <a:rPr lang="en-US" sz="1300" dirty="0">
+                <a:solidFill>
+                  <a:srgbClr val="1C2833"/>
+                </a:solidFill>
+                <a:latin typeface="Georgia" pitchFamily="34" charset="0"/>
+                <a:ea typeface="Georgia" pitchFamily="34" charset="-122"/>
+                <a:cs typeface="Georgia" pitchFamily="34" charset="-120"/>
+              </a:rPr>
+              <a:t>.</a:t>
+            </a:r>
+            <a:endParaRPr lang="en-US" sz="1300" dirty="0"/>
+          </a:p>
+        </p:txBody>
+      </p:sp>
+      <p:sp>
+        <p:nvSpPr>
+          <p:cNvPr id="14" name="Text 12"/>
+          <p:cNvSpPr/>
+          <p:nvPr/>
+        </p:nvSpPr>
+        <p:spPr>
+          <a:xfrm>
+            <a:off x="692051" y="3264843"/>
+            <a:ext cx="7973389" cy="250031"/>
+          </a:xfrm>
+          <a:prstGeom prst="rect">
+            <a:avLst/>
+          </a:prstGeom>
+          <a:noFill/>
+          <a:ln/>
+        </p:spPr>
+        <p:txBody>
+          <a:bodyPr wrap="square" lIns="0" tIns="0" rIns="0" bIns="0" rtlCol="0" anchor="t"/>
+          <a:lstStyle/>
+          <a:p>
+            <a:pPr algn="l" indent="0" marL="0">
+              <a:lnSpc>
+                <a:spcPts val="1820"/>
+              </a:lnSpc>
+              <a:spcBef>
+                <a:spcPts val="300"/>
+              </a:spcBef>
+              <a:spcAft>
+                <a:spcPts val="300"/>
+              </a:spcAft>
+              <a:buNone/>
+            </a:pPr>
+            <a:r>
+              <a:rPr lang="en-US" sz="1300" i="1" dirty="0">
+                <a:solidFill>
+                  <a:srgbClr val="1C2833"/>
+                </a:solidFill>
+                <a:latin typeface="Georgia" pitchFamily="34" charset="0"/>
+                <a:ea typeface="Georgia" pitchFamily="34" charset="-122"/>
+                <a:cs typeface="Georgia" pitchFamily="34" charset="-120"/>
+              </a:rPr>
+              <a:t>6 × 7</a:t>
+            </a:r>
+            <a:pPr algn="l" indent="0" marL="0">
+              <a:lnSpc>
+                <a:spcPts val="1820"/>
+              </a:lnSpc>
+              <a:spcBef>
+                <a:spcPts val="300"/>
+              </a:spcBef>
+              <a:spcAft>
+                <a:spcPts val="300"/>
+              </a:spcAft>
+              <a:buNone/>
+            </a:pPr>
+            <a:r>
+              <a:rPr lang="en-US" sz="1300" dirty="0">
+                <a:solidFill>
+                  <a:srgbClr val="1C2833"/>
+                </a:solidFill>
+                <a:latin typeface="Georgia" pitchFamily="34" charset="0"/>
+                <a:ea typeface="Georgia" pitchFamily="34" charset="-122"/>
+                <a:cs typeface="Georgia" pitchFamily="34" charset="-120"/>
+              </a:rPr>
+              <a:t>: 6−3=3; 4×3=12 → carry 1 → 3+1=4; right=2 → </a:t>
+            </a:r>
+            <a:pPr algn="l" indent="0" marL="0">
+              <a:lnSpc>
+                <a:spcPts val="1820"/>
+              </a:lnSpc>
+              <a:spcBef>
+                <a:spcPts val="300"/>
+              </a:spcBef>
+              <a:spcAft>
+                <a:spcPts val="300"/>
+              </a:spcAft>
+              <a:buNone/>
+            </a:pPr>
+            <a:r>
+              <a:rPr lang="en-US" sz="1300" b="1" i="1" dirty="0">
+                <a:solidFill>
+                  <a:srgbClr val="1C2833"/>
+                </a:solidFill>
+                <a:latin typeface="Georgia" pitchFamily="34" charset="0"/>
+                <a:ea typeface="Georgia" pitchFamily="34" charset="-122"/>
+                <a:cs typeface="Georgia" pitchFamily="34" charset="-120"/>
+              </a:rPr>
+              <a:t>42</a:t>
+            </a:r>
+            <a:pPr algn="l" indent="0" marL="0">
+              <a:lnSpc>
+                <a:spcPts val="1820"/>
+              </a:lnSpc>
+              <a:spcBef>
+                <a:spcPts val="300"/>
+              </a:spcBef>
+              <a:spcAft>
+                <a:spcPts val="300"/>
+              </a:spcAft>
+              <a:buNone/>
+            </a:pPr>
+            <a:r>
+              <a:rPr lang="en-US" sz="1300" dirty="0">
+                <a:solidFill>
+                  <a:srgbClr val="1C2833"/>
+                </a:solidFill>
+                <a:latin typeface="Georgia" pitchFamily="34" charset="0"/>
+                <a:ea typeface="Georgia" pitchFamily="34" charset="-122"/>
+                <a:cs typeface="Georgia" pitchFamily="34" charset="-120"/>
+              </a:rPr>
+              <a:t>.</a:t>
+            </a:r>
+            <a:endParaRPr lang="en-US" sz="1300" dirty="0"/>
+          </a:p>
+        </p:txBody>
+      </p:sp>
+      <p:sp>
+        <p:nvSpPr>
+          <p:cNvPr id="15" name="Text 13"/>
+          <p:cNvSpPr/>
+          <p:nvPr/>
+        </p:nvSpPr>
+        <p:spPr>
+          <a:xfrm>
+            <a:off x="692051" y="3552974"/>
+            <a:ext cx="7973389" cy="230981"/>
+          </a:xfrm>
+          <a:prstGeom prst="rect">
+            <a:avLst/>
+          </a:prstGeom>
+          <a:noFill/>
+          <a:ln/>
+        </p:spPr>
+        <p:txBody>
+          <a:bodyPr wrap="square" lIns="0" tIns="0" rIns="0" bIns="0" rtlCol="0" anchor="t"/>
+          <a:lstStyle/>
+          <a:p>
+            <a:pPr algn="l" indent="0" marL="0">
+              <a:lnSpc>
+                <a:spcPts val="1820"/>
+              </a:lnSpc>
+              <a:spcBef>
+                <a:spcPts val="300"/>
+              </a:spcBef>
+              <a:spcAft>
+                <a:spcPts val="300"/>
+              </a:spcAft>
+              <a:buNone/>
+            </a:pPr>
+            <a:r>
+              <a:rPr lang="en-US" sz="1300" dirty="0">
+                <a:solidFill>
+                  <a:srgbClr val="1C2833"/>
+                </a:solidFill>
+                <a:latin typeface="Georgia" pitchFamily="34" charset="0"/>
+                <a:ea typeface="Georgia" pitchFamily="34" charset="-122"/>
+                <a:cs typeface="Georgia" pitchFamily="34" charset="-120"/>
+              </a:rPr>
+              <a:t>The Sanskrit sūtra: </a:t>
+            </a:r>
+            <a:pPr algn="l" indent="0" marL="0">
+              <a:lnSpc>
+                <a:spcPts val="1820"/>
+              </a:lnSpc>
+              <a:spcBef>
+                <a:spcPts val="300"/>
+              </a:spcBef>
+              <a:spcAft>
+                <a:spcPts val="300"/>
+              </a:spcAft>
+              <a:buNone/>
+            </a:pPr>
+            <a:r>
+              <a:rPr lang="en-US" sz="1300" b="1" i="1" dirty="0">
+                <a:solidFill>
+                  <a:srgbClr val="1C2833"/>
+                </a:solidFill>
+                <a:latin typeface="Georgia" pitchFamily="34" charset="0"/>
+                <a:ea typeface="Georgia" pitchFamily="34" charset="-122"/>
+                <a:cs typeface="Georgia" pitchFamily="34" charset="-120"/>
+              </a:rPr>
+              <a:t>Nikhilam Navataścaramaṁ Daśataḥ</a:t>
+            </a:r>
+            <a:pPr algn="l" indent="0" marL="0">
+              <a:lnSpc>
+                <a:spcPts val="1820"/>
+              </a:lnSpc>
+              <a:spcBef>
+                <a:spcPts val="300"/>
+              </a:spcBef>
+              <a:spcAft>
+                <a:spcPts val="300"/>
+              </a:spcAft>
+              <a:buNone/>
+            </a:pPr>
+            <a:r>
+              <a:rPr lang="en-US" sz="1300" dirty="0">
+                <a:solidFill>
+                  <a:srgbClr val="1C2833"/>
+                </a:solidFill>
+                <a:latin typeface="Georgia" pitchFamily="34" charset="0"/>
+                <a:ea typeface="Georgia" pitchFamily="34" charset="-122"/>
+                <a:cs typeface="Georgia" pitchFamily="34" charset="-120"/>
+              </a:rPr>
+              <a:t> — "all from 9 and the last from 10."</a:t>
+            </a:r>
+            <a:endParaRPr lang="en-US" sz="1300" dirty="0"/>
+          </a:p>
+        </p:txBody>
+      </p:sp>
+      <p:sp>
+        <p:nvSpPr>
+          <p:cNvPr id="16" name="Text 14"/>
+          <p:cNvSpPr/>
+          <p:nvPr/>
+        </p:nvSpPr>
+        <p:spPr>
+          <a:xfrm>
+            <a:off x="406301" y="4434929"/>
+            <a:ext cx="8498026" cy="213271"/>
+          </a:xfrm>
+          <a:prstGeom prst="rect">
+            <a:avLst/>
+          </a:prstGeom>
+          <a:noFill/>
+          <a:ln/>
+        </p:spPr>
+        <p:txBody>
+          <a:bodyPr wrap="square" lIns="0" tIns="0" rIns="0" bIns="0" rtlCol="0" anchor="t"/>
+          <a:lstStyle/>
+          <a:p>
+            <a:pPr algn="l" indent="0" marL="0">
+              <a:lnSpc>
+                <a:spcPts val="1680"/>
+              </a:lnSpc>
+              <a:spcBef>
+                <a:spcPts val="300"/>
+              </a:spcBef>
+              <a:spcAft>
+                <a:spcPts val="300"/>
+              </a:spcAft>
+              <a:buNone/>
+            </a:pPr>
+            <a:r>
+              <a:rPr lang="en-US" sz="1200" dirty="0">
+                <a:solidFill>
+                  <a:srgbClr val="1C2833"/>
+                </a:solidFill>
+                <a:latin typeface="Arial" pitchFamily="34" charset="0"/>
+                <a:ea typeface="Arial" pitchFamily="34" charset="-122"/>
+                <a:cs typeface="Arial" pitchFamily="34" charset="-120"/>
+              </a:rPr>
+              <a:t>Middle ·  · IKS Curriculum</a:t>
+            </a:r>
+            <a:endParaRPr lang="en-US" sz="1200" dirty="0"/>
+          </a:p>
+        </p:txBody>
+      </p:sp>
+    </p:spTree>
+  </p:cSld>
+  <p:clrMapOvr>
+    <a:masterClrMapping/>
+  </p:clrMapOvr>
+</p:sld>
+</file>
+
+<file path=ppt/slides/slide17.xml><?xml version="1.0" encoding="utf-8"?>
+<p:sld xmlns:a="http://schemas.openxmlformats.org/drawingml/2006/main" xmlns:r="http://schemas.openxmlformats.org/officeDocument/2006/relationships" xmlns:p="http://schemas.openxmlformats.org/presentationml/2006/main">
+  <p:cSld name="Slide 17">
+    <p:bg>
+      <p:bgPr>
+        <a:solidFill>
+          <a:srgbClr val="FFFFFF"/>
+        </a:solidFill>
+      </p:bgPr>
+    </p:bg>
+    <p:spTree>
+      <p:nvGrpSpPr>
+        <p:cNvPr id="1" name=""/>
+        <p:cNvGrpSpPr/>
+        <p:nvPr/>
+      </p:nvGrpSpPr>
+      <p:grpSpPr>
+        <a:xfrm>
+          <a:off x="0" y="0"/>
+          <a:ext cx="0" cy="0"/>
+          <a:chOff x="0" y="0"/>
+          <a:chExt cx="0" cy="0"/>
+        </a:xfrm>
+      </p:grpSpPr>
+      <p:sp>
+        <p:nvSpPr>
+          <p:cNvPr id="2" name="Text 0"/>
+          <p:cNvSpPr/>
+          <p:nvPr/>
+        </p:nvSpPr>
+        <p:spPr>
+          <a:xfrm>
+            <a:off x="0" y="0"/>
+            <a:ext cx="9144000" cy="101501"/>
+          </a:xfrm>
+          <a:prstGeom prst="rect">
+            <a:avLst/>
+          </a:prstGeom>
+          <a:solidFill>
+            <a:srgbClr val="277884"/>
+          </a:solidFill>
+          <a:ln/>
+        </p:spPr>
+        <p:txBody>
+          <a:bodyPr wrap="square" rtlCol="0" anchor="ctr"/>
+          <a:lstStyle/>
+          <a:p>
+            <a:pPr indent="0" marL="0">
+              <a:buNone/>
+            </a:pPr>
+            <a:endParaRPr lang="en-US" dirty="0"/>
+          </a:p>
+        </p:txBody>
+      </p:sp>
+      <p:sp>
+        <p:nvSpPr>
+          <p:cNvPr id="3" name="Text 1"/>
+          <p:cNvSpPr/>
+          <p:nvPr/>
+        </p:nvSpPr>
+        <p:spPr>
+          <a:xfrm>
+            <a:off x="406301" y="457051"/>
+            <a:ext cx="8498026" cy="274290"/>
+          </a:xfrm>
+          <a:prstGeom prst="rect">
+            <a:avLst/>
+          </a:prstGeom>
+          <a:noFill/>
+          <a:ln/>
+        </p:spPr>
+        <p:txBody>
+          <a:bodyPr wrap="square" lIns="0" tIns="0" rIns="0" bIns="0" rtlCol="0" anchor="t"/>
+          <a:lstStyle/>
+          <a:p>
+            <a:pPr algn="l" indent="0" marL="0">
+              <a:lnSpc>
+                <a:spcPts val="2160"/>
+              </a:lnSpc>
+              <a:spcBef>
+                <a:spcPts val="600"/>
+              </a:spcBef>
+              <a:spcAft>
+                <a:spcPts val="800"/>
+              </a:spcAft>
+              <a:buNone/>
+            </a:pPr>
+            <a:r>
+              <a:rPr lang="en-US" sz="1800" b="1" dirty="0">
+                <a:solidFill>
+                  <a:srgbClr val="FE4447"/>
+                </a:solidFill>
+                <a:latin typeface="Georgia" pitchFamily="34" charset="0"/>
+                <a:ea typeface="Georgia" pitchFamily="34" charset="-122"/>
+                <a:cs typeface="Georgia" pitchFamily="34" charset="-120"/>
+              </a:rPr>
+              <a:t>Homework</a:t>
+            </a:r>
+            <a:endParaRPr lang="en-US" sz="1800" dirty="0"/>
+          </a:p>
+        </p:txBody>
+      </p:sp>
+      <p:sp>
+        <p:nvSpPr>
+          <p:cNvPr id="4" name="Text 2"/>
+          <p:cNvSpPr/>
+          <p:nvPr/>
+        </p:nvSpPr>
+        <p:spPr>
+          <a:xfrm>
+            <a:off x="634901" y="883593"/>
+            <a:ext cx="8102798" cy="937022"/>
+          </a:xfrm>
+          <a:prstGeom prst="rect">
+            <a:avLst/>
+          </a:prstGeom>
+          <a:noFill/>
+          <a:ln/>
+        </p:spPr>
+        <p:txBody>
+          <a:bodyPr wrap="square" lIns="0" tIns="0" rIns="0" bIns="0" rtlCol="0" anchor="t"/>
+          <a:lstStyle/>
+          <a:p>
+            <a:pPr algn="l" marL="342900" indent="-342900">
               <a:lnSpc>
                 <a:spcPts val="1620"/>
               </a:lnSpc>
               <a:spcAft>
                 <a:spcPts val="300"/>
               </a:spcAft>
-              <a:buNone/>
-            </a:pPr>
-            <a:r>
-              <a:rPr lang="en-US" sz="1200" dirty="0">
-                <a:solidFill>
-                  <a:srgbClr val="1C2833"/>
-                </a:solidFill>
-                <a:latin typeface="Arial" pitchFamily="34" charset="0"/>
-                <a:ea typeface="Arial" pitchFamily="34" charset="-122"/>
-                <a:cs typeface="Arial" pitchFamily="34" charset="-120"/>
-              </a:rPr>
-              <a:t> — sūtra #2: </a:t>
-            </a:r>
-            <a:pPr algn="l" indent="0" marL="0">
+              <a:buSzPct val="100000"/>
+              <a:buChar char="•"/>
+            </a:pPr>
+            <a:r>
+              <a:rPr lang="en-US" sz="1200" dirty="0">
+                <a:solidFill>
+                  <a:srgbClr val="1C2833"/>
+                </a:solidFill>
+                <a:latin typeface="Arial" pitchFamily="34" charset="0"/>
+                <a:ea typeface="Arial" pitchFamily="34" charset="-122"/>
+                <a:cs typeface="Arial" pitchFamily="34" charset="-120"/>
+              </a:rPr>
+              <a:t>Practice deficit-from-10 recall. Have a parent/sibling call out single digits 1–9; you answer the deficit. Beat 20 problems in 30 seconds.</a:t>
+            </a:r>
+            <a:endParaRPr lang="en-US" sz="1200" dirty="0"/>
+          </a:p>
+          <a:p>
+            <a:pPr algn="l" marL="342900" indent="-342900">
               <a:lnSpc>
                 <a:spcPts val="1620"/>
               </a:lnSpc>
               <a:spcAft>
                 <a:spcPts val="300"/>
               </a:spcAft>
+              <a:buSzPct val="100000"/>
+              <a:buChar char="•"/>
+            </a:pPr>
+            <a:r>
+              <a:rPr lang="en-US" sz="1200" dirty="0">
+                <a:solidFill>
+                  <a:srgbClr val="1C2833"/>
+                </a:solidFill>
+                <a:latin typeface="Arial" pitchFamily="34" charset="0"/>
+                <a:ea typeface="Arial" pitchFamily="34" charset="-122"/>
+                <a:cs typeface="Arial" pitchFamily="34" charset="-120"/>
+              </a:rPr>
+              <a:t>Solve 10 problems on the back of today's worksheet (all single-digit × single-digit, both 6–9) using Nikhilam. Self-check against your times table.</a:t>
+            </a:r>
+            <a:endParaRPr lang="en-US" sz="1200" dirty="0"/>
+          </a:p>
+        </p:txBody>
+      </p:sp>
+      <p:sp>
+        <p:nvSpPr>
+          <p:cNvPr id="5" name="Text 3"/>
+          <p:cNvSpPr/>
+          <p:nvPr/>
+        </p:nvSpPr>
+        <p:spPr>
+          <a:xfrm>
+            <a:off x="406301" y="4434929"/>
+            <a:ext cx="8498026" cy="213271"/>
+          </a:xfrm>
+          <a:prstGeom prst="rect">
+            <a:avLst/>
+          </a:prstGeom>
+          <a:noFill/>
+          <a:ln/>
+        </p:spPr>
+        <p:txBody>
+          <a:bodyPr wrap="square" lIns="0" tIns="0" rIns="0" bIns="0" rtlCol="0" anchor="t"/>
+          <a:lstStyle/>
+          <a:p>
+            <a:pPr algn="l" indent="0" marL="0">
+              <a:lnSpc>
+                <a:spcPts val="1680"/>
+              </a:lnSpc>
+              <a:spcBef>
+                <a:spcPts val="300"/>
+              </a:spcBef>
+              <a:spcAft>
+                <a:spcPts val="300"/>
+              </a:spcAft>
+              <a:buNone/>
+            </a:pPr>
+            <a:r>
+              <a:rPr lang="en-US" sz="1200" dirty="0">
+                <a:solidFill>
+                  <a:srgbClr val="1C2833"/>
+                </a:solidFill>
+                <a:latin typeface="Arial" pitchFamily="34" charset="0"/>
+                <a:ea typeface="Arial" pitchFamily="34" charset="-122"/>
+                <a:cs typeface="Arial" pitchFamily="34" charset="-120"/>
+              </a:rPr>
+              <a:t>Middle ·  · IKS Curriculum</a:t>
+            </a:r>
+            <a:endParaRPr lang="en-US" sz="1200" dirty="0"/>
+          </a:p>
+        </p:txBody>
+      </p:sp>
+    </p:spTree>
+  </p:cSld>
+  <p:clrMapOvr>
+    <a:masterClrMapping/>
+  </p:clrMapOvr>
+</p:sld>
+</file>
+
+<file path=ppt/slides/slide18.xml><?xml version="1.0" encoding="utf-8"?>
+<p:sld xmlns:a="http://schemas.openxmlformats.org/drawingml/2006/main" xmlns:r="http://schemas.openxmlformats.org/officeDocument/2006/relationships" xmlns:p="http://schemas.openxmlformats.org/presentationml/2006/main">
+  <p:cSld name="Slide 18">
+    <p:bg>
+      <p:bgPr>
+        <a:solidFill>
+          <a:srgbClr val="FFFFFF"/>
+        </a:solidFill>
+      </p:bgPr>
+    </p:bg>
+    <p:spTree>
+      <p:nvGrpSpPr>
+        <p:cNvPr id="1" name=""/>
+        <p:cNvGrpSpPr/>
+        <p:nvPr/>
+      </p:nvGrpSpPr>
+      <p:grpSpPr>
+        <a:xfrm>
+          <a:off x="0" y="0"/>
+          <a:ext cx="0" cy="0"/>
+          <a:chOff x="0" y="0"/>
+          <a:chExt cx="0" cy="0"/>
+        </a:xfrm>
+      </p:grpSpPr>
+      <p:sp>
+        <p:nvSpPr>
+          <p:cNvPr id="2" name="Text 0"/>
+          <p:cNvSpPr/>
+          <p:nvPr/>
+        </p:nvSpPr>
+        <p:spPr>
+          <a:xfrm>
+            <a:off x="0" y="0"/>
+            <a:ext cx="9144000" cy="101501"/>
+          </a:xfrm>
+          <a:prstGeom prst="rect">
+            <a:avLst/>
+          </a:prstGeom>
+          <a:solidFill>
+            <a:srgbClr val="277884"/>
+          </a:solidFill>
+          <a:ln/>
+        </p:spPr>
+        <p:txBody>
+          <a:bodyPr wrap="square" rtlCol="0" anchor="ctr"/>
+          <a:lstStyle/>
+          <a:p>
+            <a:pPr indent="0" marL="0">
+              <a:buNone/>
+            </a:pPr>
+            <a:endParaRPr lang="en-US" dirty="0"/>
+          </a:p>
+        </p:txBody>
+      </p:sp>
+      <p:sp>
+        <p:nvSpPr>
+          <p:cNvPr id="3" name="Text 1"/>
+          <p:cNvSpPr/>
+          <p:nvPr/>
+        </p:nvSpPr>
+        <p:spPr>
+          <a:xfrm>
+            <a:off x="406301" y="457051"/>
+            <a:ext cx="8498026" cy="274290"/>
+          </a:xfrm>
+          <a:prstGeom prst="rect">
+            <a:avLst/>
+          </a:prstGeom>
+          <a:noFill/>
+          <a:ln/>
+        </p:spPr>
+        <p:txBody>
+          <a:bodyPr wrap="square" lIns="0" tIns="0" rIns="0" bIns="0" rtlCol="0" anchor="t"/>
+          <a:lstStyle/>
+          <a:p>
+            <a:pPr algn="l" indent="0" marL="0">
+              <a:lnSpc>
+                <a:spcPts val="2160"/>
+              </a:lnSpc>
+              <a:spcBef>
+                <a:spcPts val="600"/>
+              </a:spcBef>
+              <a:spcAft>
+                <a:spcPts val="800"/>
+              </a:spcAft>
+              <a:buNone/>
+            </a:pPr>
+            <a:r>
+              <a:rPr lang="en-US" sz="1800" b="1" dirty="0">
+                <a:solidFill>
+                  <a:srgbClr val="FE4447"/>
+                </a:solidFill>
+                <a:latin typeface="Georgia" pitchFamily="34" charset="0"/>
+                <a:ea typeface="Georgia" pitchFamily="34" charset="-122"/>
+                <a:cs typeface="Georgia" pitchFamily="34" charset="-120"/>
+              </a:rPr>
+              <a:t>Differentiation</a:t>
+            </a:r>
+            <a:endParaRPr lang="en-US" sz="1800" dirty="0"/>
+          </a:p>
+        </p:txBody>
+      </p:sp>
+      <p:sp>
+        <p:nvSpPr>
+          <p:cNvPr id="4" name="Text 2"/>
+          <p:cNvSpPr/>
+          <p:nvPr/>
+        </p:nvSpPr>
+        <p:spPr>
+          <a:xfrm>
+            <a:off x="634901" y="883593"/>
+            <a:ext cx="8102798" cy="769441"/>
+          </a:xfrm>
+          <a:prstGeom prst="rect">
+            <a:avLst/>
+          </a:prstGeom>
+          <a:noFill/>
+          <a:ln/>
+        </p:spPr>
+        <p:txBody>
+          <a:bodyPr wrap="square" lIns="0" tIns="0" rIns="0" bIns="0" rtlCol="0" anchor="t"/>
+          <a:lstStyle/>
+          <a:p>
+            <a:pPr algn="l" marL="342900" indent="-342900">
+              <a:lnSpc>
+                <a:spcPts val="1620"/>
+              </a:lnSpc>
+              <a:spcAft>
+                <a:spcPts val="300"/>
+              </a:spcAft>
+              <a:buSzPct val="100000"/>
+              <a:buChar char="•"/>
+            </a:pPr>
+            <a:r>
+              <a:rPr lang="en-US" sz="1200" b="1" dirty="0">
+                <a:solidFill>
+                  <a:srgbClr val="1C2833"/>
+                </a:solidFill>
+                <a:latin typeface="Arial" pitchFamily="34" charset="0"/>
+                <a:ea typeface="Arial" pitchFamily="34" charset="-122"/>
+                <a:cs typeface="Arial" pitchFamily="34" charset="-120"/>
+              </a:rPr>
+              <a:t>Tier up:</a:t>
+            </a:r>
+            <a:pPr algn="l" indent="0" marL="0">
+              <a:lnSpc>
+                <a:spcPts val="1620"/>
+              </a:lnSpc>
+              <a:spcAft>
+                <a:spcPts val="300"/>
+              </a:spcAft>
+              <a:buNone/>
+            </a:pPr>
+            <a:r>
+              <a:rPr lang="en-US" sz="1200" dirty="0">
+                <a:solidFill>
+                  <a:srgbClr val="1C2833"/>
+                </a:solidFill>
+                <a:latin typeface="Arial" pitchFamily="34" charset="0"/>
+                <a:ea typeface="Arial" pitchFamily="34" charset="-122"/>
+                <a:cs typeface="Arial" pitchFamily="34" charset="-120"/>
+              </a:rPr>
+              <a:t> Try </a:t>
+            </a:r>
+            <a:pPr algn="l" indent="0" marL="0">
+              <a:lnSpc>
+                <a:spcPts val="1620"/>
+              </a:lnSpc>
+              <a:spcAft>
+                <a:spcPts val="300"/>
+              </a:spcAft>
+              <a:buNone/>
+            </a:pPr>
+            <a:r>
+              <a:rPr lang="en-US" sz="1200" dirty="0">
+                <a:solidFill>
+                  <a:srgbClr val="1C2833"/>
+                </a:solidFill>
+                <a:latin typeface="Arial" pitchFamily="34" charset="0"/>
+                <a:ea typeface="Arial" pitchFamily="34" charset="-122"/>
+                <a:cs typeface="Arial" pitchFamily="34" charset="-120"/>
+              </a:rPr>
+              <a:t>9 × 9 × 9</a:t>
+            </a:r>
+            <a:pPr algn="l" indent="0" marL="0">
+              <a:lnSpc>
+                <a:spcPts val="1620"/>
+              </a:lnSpc>
+              <a:spcAft>
+                <a:spcPts val="300"/>
+              </a:spcAft>
+              <a:buNone/>
+            </a:pPr>
+            <a:r>
+              <a:rPr lang="en-US" sz="1200" dirty="0">
+                <a:solidFill>
+                  <a:srgbClr val="1C2833"/>
+                </a:solidFill>
+                <a:latin typeface="Arial" pitchFamily="34" charset="0"/>
+                <a:ea typeface="Arial" pitchFamily="34" charset="-122"/>
+                <a:cs typeface="Arial" pitchFamily="34" charset="-120"/>
+              </a:rPr>
+              <a:t> (chained) or apply the method to base 20 — see if </a:t>
+            </a:r>
+            <a:pPr algn="l" indent="0" marL="0">
+              <a:lnSpc>
+                <a:spcPts val="1620"/>
+              </a:lnSpc>
+              <a:spcAft>
+                <a:spcPts val="300"/>
+              </a:spcAft>
+              <a:buNone/>
+            </a:pPr>
+            <a:r>
+              <a:rPr lang="en-US" sz="1200" dirty="0">
+                <a:solidFill>
+                  <a:srgbClr val="1C2833"/>
+                </a:solidFill>
+                <a:latin typeface="Arial" pitchFamily="34" charset="0"/>
+                <a:ea typeface="Arial" pitchFamily="34" charset="-122"/>
+                <a:cs typeface="Arial" pitchFamily="34" charset="-120"/>
+              </a:rPr>
+              <a:t>19 × 18</a:t>
+            </a:r>
+            <a:pPr algn="l" indent="0" marL="0">
+              <a:lnSpc>
+                <a:spcPts val="1620"/>
+              </a:lnSpc>
+              <a:spcAft>
+                <a:spcPts val="300"/>
+              </a:spcAft>
+              <a:buNone/>
+            </a:pPr>
+            <a:r>
+              <a:rPr lang="en-US" sz="1200" dirty="0">
+                <a:solidFill>
+                  <a:srgbClr val="1C2833"/>
+                </a:solidFill>
+                <a:latin typeface="Arial" pitchFamily="34" charset="0"/>
+                <a:ea typeface="Arial" pitchFamily="34" charset="-122"/>
+                <a:cs typeface="Arial" pitchFamily="34" charset="-120"/>
+              </a:rPr>
+              <a:t> works the same way with base 20. (Yes — deficits 1, 2 → left 17, right 2 → 17 × 20 + 2 = 342. ✓)</a:t>
+            </a:r>
+            <a:endParaRPr lang="en-US" sz="1200" dirty="0"/>
+          </a:p>
+          <a:p>
+            <a:pPr algn="l" marL="342900" indent="-342900">
+              <a:lnSpc>
+                <a:spcPts val="1620"/>
+              </a:lnSpc>
+              <a:spcAft>
+                <a:spcPts val="300"/>
+              </a:spcAft>
+              <a:buSzPct val="100000"/>
+              <a:buChar char="•"/>
+            </a:pPr>
+            <a:r>
+              <a:rPr lang="en-US" sz="1200" b="1" dirty="0">
+                <a:solidFill>
+                  <a:srgbClr val="1C2833"/>
+                </a:solidFill>
+                <a:latin typeface="Arial" pitchFamily="34" charset="0"/>
+                <a:ea typeface="Arial" pitchFamily="34" charset="-122"/>
+                <a:cs typeface="Arial" pitchFamily="34" charset="-120"/>
+              </a:rPr>
+              <a:t>Tier down:</a:t>
+            </a:r>
+            <a:pPr algn="l" indent="0" marL="0">
+              <a:lnSpc>
+                <a:spcPts val="1620"/>
+              </a:lnSpc>
+              <a:spcAft>
+                <a:spcPts val="300"/>
+              </a:spcAft>
+              <a:buNone/>
+            </a:pPr>
+            <a:r>
+              <a:rPr lang="en-US" sz="1200" dirty="0">
+                <a:solidFill>
+                  <a:srgbClr val="1C2833"/>
+                </a:solidFill>
+                <a:latin typeface="Arial" pitchFamily="34" charset="0"/>
+                <a:ea typeface="Arial" pitchFamily="34" charset="-122"/>
+                <a:cs typeface="Arial" pitchFamily="34" charset="-120"/>
+              </a:rPr>
+              <a:t> Stick to </a:t>
+            </a:r>
+            <a:pPr algn="l" indent="0" marL="0">
+              <a:lnSpc>
+                <a:spcPts val="1620"/>
+              </a:lnSpc>
+              <a:spcAft>
+                <a:spcPts val="300"/>
+              </a:spcAft>
+              <a:buNone/>
+            </a:pPr>
+            <a:r>
+              <a:rPr lang="en-US" sz="1200" dirty="0">
+                <a:solidFill>
+                  <a:srgbClr val="1C2833"/>
+                </a:solidFill>
+                <a:latin typeface="Arial" pitchFamily="34" charset="0"/>
+                <a:ea typeface="Arial" pitchFamily="34" charset="-122"/>
+                <a:cs typeface="Arial" pitchFamily="34" charset="-120"/>
+              </a:rPr>
+              <a:t>8 × 9</a:t>
+            </a:r>
+            <a:pPr algn="l" indent="0" marL="0">
+              <a:lnSpc>
+                <a:spcPts val="1620"/>
+              </a:lnSpc>
+              <a:spcAft>
+                <a:spcPts val="300"/>
+              </a:spcAft>
+              <a:buNone/>
+            </a:pPr>
+            <a:r>
+              <a:rPr lang="en-US" sz="1200" dirty="0">
+                <a:solidFill>
+                  <a:srgbClr val="1C2833"/>
+                </a:solidFill>
+                <a:latin typeface="Arial" pitchFamily="34" charset="0"/>
+                <a:ea typeface="Arial" pitchFamily="34" charset="-122"/>
+                <a:cs typeface="Arial" pitchFamily="34" charset="-120"/>
+              </a:rPr>
+              <a:t>, </a:t>
+            </a:r>
+            <a:pPr algn="l" indent="0" marL="0">
+              <a:lnSpc>
+                <a:spcPts val="1620"/>
+              </a:lnSpc>
+              <a:spcAft>
+                <a:spcPts val="300"/>
+              </a:spcAft>
+              <a:buNone/>
+            </a:pPr>
+            <a:r>
+              <a:rPr lang="en-US" sz="1200" dirty="0">
+                <a:solidFill>
+                  <a:srgbClr val="1C2833"/>
+                </a:solidFill>
+                <a:latin typeface="Arial" pitchFamily="34" charset="0"/>
+                <a:ea typeface="Arial" pitchFamily="34" charset="-122"/>
+                <a:cs typeface="Arial" pitchFamily="34" charset="-120"/>
+              </a:rPr>
+              <a:t>9 × 9</a:t>
+            </a:r>
+            <a:pPr algn="l" indent="0" marL="0">
+              <a:lnSpc>
+                <a:spcPts val="1620"/>
+              </a:lnSpc>
+              <a:spcAft>
+                <a:spcPts val="300"/>
+              </a:spcAft>
+              <a:buNone/>
+            </a:pPr>
+            <a:r>
+              <a:rPr lang="en-US" sz="1200" dirty="0">
+                <a:solidFill>
+                  <a:srgbClr val="1C2833"/>
+                </a:solidFill>
+                <a:latin typeface="Arial" pitchFamily="34" charset="0"/>
+                <a:ea typeface="Arial" pitchFamily="34" charset="-122"/>
+                <a:cs typeface="Arial" pitchFamily="34" charset="-120"/>
+              </a:rPr>
+              <a:t>, </a:t>
+            </a:r>
+            <a:pPr algn="l" indent="0" marL="0">
+              <a:lnSpc>
+                <a:spcPts val="1620"/>
+              </a:lnSpc>
+              <a:spcAft>
+                <a:spcPts val="300"/>
+              </a:spcAft>
+              <a:buNone/>
+            </a:pPr>
+            <a:r>
+              <a:rPr lang="en-US" sz="1200" dirty="0">
+                <a:solidFill>
+                  <a:srgbClr val="1C2833"/>
+                </a:solidFill>
+                <a:latin typeface="Arial" pitchFamily="34" charset="0"/>
+                <a:ea typeface="Arial" pitchFamily="34" charset="-122"/>
+                <a:cs typeface="Arial" pitchFamily="34" charset="-120"/>
+              </a:rPr>
+              <a:t>7 × 8</a:t>
+            </a:r>
+            <a:pPr algn="l" indent="0" marL="0">
+              <a:lnSpc>
+                <a:spcPts val="1620"/>
+              </a:lnSpc>
+              <a:spcAft>
+                <a:spcPts val="300"/>
+              </a:spcAft>
+              <a:buNone/>
+            </a:pPr>
+            <a:r>
+              <a:rPr lang="en-US" sz="1200" dirty="0">
+                <a:solidFill>
+                  <a:srgbClr val="1C2833"/>
+                </a:solidFill>
+                <a:latin typeface="Arial" pitchFamily="34" charset="0"/>
+                <a:ea typeface="Arial" pitchFamily="34" charset="-122"/>
+                <a:cs typeface="Arial" pitchFamily="34" charset="-120"/>
+              </a:rPr>
+              <a:t> for today. Memorise these specific three; we'll widen the range tomorrow.</a:t>
+            </a:r>
+            <a:endParaRPr lang="en-US" sz="1200" dirty="0"/>
+          </a:p>
+        </p:txBody>
+      </p:sp>
+      <p:sp>
+        <p:nvSpPr>
+          <p:cNvPr id="5" name="Text 3"/>
+          <p:cNvSpPr/>
+          <p:nvPr/>
+        </p:nvSpPr>
+        <p:spPr>
+          <a:xfrm>
+            <a:off x="406301" y="4434929"/>
+            <a:ext cx="8498026" cy="213271"/>
+          </a:xfrm>
+          <a:prstGeom prst="rect">
+            <a:avLst/>
+          </a:prstGeom>
+          <a:noFill/>
+          <a:ln/>
+        </p:spPr>
+        <p:txBody>
+          <a:bodyPr wrap="square" lIns="0" tIns="0" rIns="0" bIns="0" rtlCol="0" anchor="t"/>
+          <a:lstStyle/>
+          <a:p>
+            <a:pPr algn="l" indent="0" marL="0">
+              <a:lnSpc>
+                <a:spcPts val="1680"/>
+              </a:lnSpc>
+              <a:spcBef>
+                <a:spcPts val="300"/>
+              </a:spcBef>
+              <a:spcAft>
+                <a:spcPts val="300"/>
+              </a:spcAft>
+              <a:buNone/>
+            </a:pPr>
+            <a:r>
+              <a:rPr lang="en-US" sz="1200" dirty="0">
+                <a:solidFill>
+                  <a:srgbClr val="1C2833"/>
+                </a:solidFill>
+                <a:latin typeface="Arial" pitchFamily="34" charset="0"/>
+                <a:ea typeface="Arial" pitchFamily="34" charset="-122"/>
+                <a:cs typeface="Arial" pitchFamily="34" charset="-120"/>
+              </a:rPr>
+              <a:t>Middle ·  · IKS Curriculum</a:t>
+            </a:r>
+            <a:endParaRPr lang="en-US" sz="1200" dirty="0"/>
+          </a:p>
+        </p:txBody>
+      </p:sp>
+    </p:spTree>
+  </p:cSld>
+  <p:clrMapOvr>
+    <a:masterClrMapping/>
+  </p:clrMapOvr>
+</p:sld>
+</file>
+
+<file path=ppt/slides/slide19.xml><?xml version="1.0" encoding="utf-8"?>
+<p:sld xmlns:a="http://schemas.openxmlformats.org/drawingml/2006/main" xmlns:r="http://schemas.openxmlformats.org/officeDocument/2006/relationships" xmlns:p="http://schemas.openxmlformats.org/presentationml/2006/main">
+  <p:cSld name="Slide 19">
+    <p:bg>
+      <p:bgPr>
+        <a:solidFill>
+          <a:srgbClr val="FFFFFF"/>
+        </a:solidFill>
+      </p:bgPr>
+    </p:bg>
+    <p:spTree>
+      <p:nvGrpSpPr>
+        <p:cNvPr id="1" name=""/>
+        <p:cNvGrpSpPr/>
+        <p:nvPr/>
+      </p:nvGrpSpPr>
+      <p:grpSpPr>
+        <a:xfrm>
+          <a:off x="0" y="0"/>
+          <a:ext cx="0" cy="0"/>
+          <a:chOff x="0" y="0"/>
+          <a:chExt cx="0" cy="0"/>
+        </a:xfrm>
+      </p:grpSpPr>
+      <p:sp>
+        <p:nvSpPr>
+          <p:cNvPr id="2" name="Text 0"/>
+          <p:cNvSpPr/>
+          <p:nvPr/>
+        </p:nvSpPr>
+        <p:spPr>
+          <a:xfrm>
+            <a:off x="0" y="0"/>
+            <a:ext cx="9144000" cy="101501"/>
+          </a:xfrm>
+          <a:prstGeom prst="rect">
+            <a:avLst/>
+          </a:prstGeom>
+          <a:solidFill>
+            <a:srgbClr val="277884"/>
+          </a:solidFill>
+          <a:ln/>
+        </p:spPr>
+        <p:txBody>
+          <a:bodyPr wrap="square" rtlCol="0" anchor="ctr"/>
+          <a:lstStyle/>
+          <a:p>
+            <a:pPr indent="0" marL="0">
+              <a:buNone/>
+            </a:pPr>
+            <a:endParaRPr lang="en-US" dirty="0"/>
+          </a:p>
+        </p:txBody>
+      </p:sp>
+      <p:sp>
+        <p:nvSpPr>
+          <p:cNvPr id="3" name="Text 1"/>
+          <p:cNvSpPr/>
+          <p:nvPr/>
+        </p:nvSpPr>
+        <p:spPr>
+          <a:xfrm>
+            <a:off x="406301" y="457051"/>
+            <a:ext cx="8498026" cy="274290"/>
+          </a:xfrm>
+          <a:prstGeom prst="rect">
+            <a:avLst/>
+          </a:prstGeom>
+          <a:noFill/>
+          <a:ln/>
+        </p:spPr>
+        <p:txBody>
+          <a:bodyPr wrap="square" lIns="0" tIns="0" rIns="0" bIns="0" rtlCol="0" anchor="t"/>
+          <a:lstStyle/>
+          <a:p>
+            <a:pPr algn="l" indent="0" marL="0">
+              <a:lnSpc>
+                <a:spcPts val="2160"/>
+              </a:lnSpc>
+              <a:spcBef>
+                <a:spcPts val="600"/>
+              </a:spcBef>
+              <a:spcAft>
+                <a:spcPts val="800"/>
+              </a:spcAft>
+              <a:buNone/>
+            </a:pPr>
+            <a:r>
+              <a:rPr lang="en-US" sz="1800" b="1" dirty="0">
+                <a:solidFill>
+                  <a:srgbClr val="FE4447"/>
+                </a:solidFill>
+                <a:latin typeface="Georgia" pitchFamily="34" charset="0"/>
+                <a:ea typeface="Georgia" pitchFamily="34" charset="-122"/>
+                <a:cs typeface="Georgia" pitchFamily="34" charset="-120"/>
+              </a:rPr>
+              <a:t>Teacher notes</a:t>
+            </a:r>
+            <a:endParaRPr lang="en-US" sz="1800" dirty="0"/>
+          </a:p>
+        </p:txBody>
+      </p:sp>
+      <p:sp>
+        <p:nvSpPr>
+          <p:cNvPr id="4" name="Text 2"/>
+          <p:cNvSpPr/>
+          <p:nvPr/>
+        </p:nvSpPr>
+        <p:spPr>
+          <a:xfrm>
+            <a:off x="634901" y="883593"/>
+            <a:ext cx="8102798" cy="1199852"/>
+          </a:xfrm>
+          <a:prstGeom prst="rect">
+            <a:avLst/>
+          </a:prstGeom>
+          <a:noFill/>
+          <a:ln/>
+        </p:spPr>
+        <p:txBody>
+          <a:bodyPr wrap="square" lIns="0" tIns="0" rIns="0" bIns="0" rtlCol="0" anchor="t"/>
+          <a:lstStyle/>
+          <a:p>
+            <a:pPr algn="l" marL="342900" indent="-342900">
+              <a:lnSpc>
+                <a:spcPts val="1620"/>
+              </a:lnSpc>
+              <a:spcAft>
+                <a:spcPts val="300"/>
+              </a:spcAft>
+              <a:buSzPct val="100000"/>
+              <a:buChar char="•"/>
+            </a:pPr>
+            <a:r>
+              <a:rPr lang="en-US" sz="1200" dirty="0">
+                <a:solidFill>
+                  <a:srgbClr val="1C2833"/>
+                </a:solidFill>
+                <a:latin typeface="Arial" pitchFamily="34" charset="0"/>
+                <a:ea typeface="Arial" pitchFamily="34" charset="-122"/>
+                <a:cs typeface="Arial" pitchFamily="34" charset="-120"/>
+              </a:rPr>
+              <a:t>Some students will protest: </a:t>
+            </a:r>
+            <a:pPr algn="l" indent="0" marL="0">
+              <a:lnSpc>
+                <a:spcPts val="1620"/>
+              </a:lnSpc>
+              <a:spcAft>
+                <a:spcPts val="300"/>
+              </a:spcAft>
               <a:buNone/>
             </a:pPr>
             <a:r>
@@ -2771,7 +6747,7 @@
                 <a:ea typeface="Arial" pitchFamily="34" charset="-122"/>
                 <a:cs typeface="Arial" pitchFamily="34" charset="-120"/>
               </a:rPr>
-              <a:t>Nikhilam Navataścaramaṁ Daśataḥ</a:t>
+              <a:t>"But I already know 7 × 8 = 56 from my times tables!"</a:t>
             </a:r>
             <a:pPr algn="l" indent="0" marL="0">
               <a:lnSpc>
@@ -2791,7 +6767,155 @@
                 <a:ea typeface="Arial" pitchFamily="34" charset="-122"/>
                 <a:cs typeface="Arial" pitchFamily="34" charset="-120"/>
               </a:rPr>
-              <a:t>.</a:t>
+              <a:t> Honest answer: </a:t>
+            </a:r>
+            <a:pPr algn="l" indent="0" marL="0">
+              <a:lnSpc>
+                <a:spcPts val="1620"/>
+              </a:lnSpc>
+              <a:spcAft>
+                <a:spcPts val="300"/>
+              </a:spcAft>
+              <a:buNone/>
+            </a:pPr>
+            <a:r>
+              <a:rPr lang="en-US" sz="1200" i="1" dirty="0">
+                <a:solidFill>
+                  <a:srgbClr val="1C2833"/>
+                </a:solidFill>
+                <a:latin typeface="Arial" pitchFamily="34" charset="0"/>
+                <a:ea typeface="Arial" pitchFamily="34" charset="-122"/>
+                <a:cs typeface="Arial" pitchFamily="34" charset="-120"/>
+              </a:rPr>
+              <a:t>"Yes — for single digits the times-table is faster. The Nikhilam method is here so we can use it on 2-digit numbers tomorrow, where the times-table doesn't help."</a:t>
+            </a:r>
+            <a:endParaRPr lang="en-US" sz="1200" dirty="0"/>
+          </a:p>
+          <a:p>
+            <a:pPr algn="l" marL="342900" indent="-342900">
+              <a:lnSpc>
+                <a:spcPts val="1620"/>
+              </a:lnSpc>
+              <a:spcAft>
+                <a:spcPts val="300"/>
+              </a:spcAft>
+              <a:buSzPct val="100000"/>
+              <a:buChar char="•"/>
+            </a:pPr>
+            <a:r>
+              <a:rPr lang="en-US" sz="1200" dirty="0">
+                <a:solidFill>
+                  <a:srgbClr val="1C2833"/>
+                </a:solidFill>
+                <a:latin typeface="Arial" pitchFamily="34" charset="0"/>
+                <a:ea typeface="Arial" pitchFamily="34" charset="-122"/>
+                <a:cs typeface="Arial" pitchFamily="34" charset="-120"/>
+              </a:rPr>
+              <a:t>Watch for the carry rule on </a:t>
+            </a:r>
+            <a:pPr algn="l" indent="0" marL="0">
+              <a:lnSpc>
+                <a:spcPts val="1620"/>
+              </a:lnSpc>
+              <a:spcAft>
+                <a:spcPts val="300"/>
+              </a:spcAft>
+              <a:buNone/>
+            </a:pPr>
+            <a:r>
+              <a:rPr lang="en-US" sz="1200" dirty="0">
+                <a:solidFill>
+                  <a:srgbClr val="1C2833"/>
+                </a:solidFill>
+                <a:latin typeface="Arial" pitchFamily="34" charset="0"/>
+                <a:ea typeface="Arial" pitchFamily="34" charset="-122"/>
+                <a:cs typeface="Arial" pitchFamily="34" charset="-120"/>
+              </a:rPr>
+              <a:t>6 × 7</a:t>
+            </a:r>
+            <a:pPr algn="l" indent="0" marL="0">
+              <a:lnSpc>
+                <a:spcPts val="1620"/>
+              </a:lnSpc>
+              <a:spcAft>
+                <a:spcPts val="300"/>
+              </a:spcAft>
+              <a:buNone/>
+            </a:pPr>
+            <a:r>
+              <a:rPr lang="en-US" sz="1200" dirty="0">
+                <a:solidFill>
+                  <a:srgbClr val="1C2833"/>
+                </a:solidFill>
+                <a:latin typeface="Arial" pitchFamily="34" charset="0"/>
+                <a:ea typeface="Arial" pitchFamily="34" charset="-122"/>
+                <a:cs typeface="Arial" pitchFamily="34" charset="-120"/>
+              </a:rPr>
+              <a:t> and </a:t>
+            </a:r>
+            <a:pPr algn="l" indent="0" marL="0">
+              <a:lnSpc>
+                <a:spcPts val="1620"/>
+              </a:lnSpc>
+              <a:spcAft>
+                <a:spcPts val="300"/>
+              </a:spcAft>
+              <a:buNone/>
+            </a:pPr>
+            <a:r>
+              <a:rPr lang="en-US" sz="1200" dirty="0">
+                <a:solidFill>
+                  <a:srgbClr val="1C2833"/>
+                </a:solidFill>
+                <a:latin typeface="Arial" pitchFamily="34" charset="0"/>
+                <a:ea typeface="Arial" pitchFamily="34" charset="-122"/>
+                <a:cs typeface="Arial" pitchFamily="34" charset="-120"/>
+              </a:rPr>
+              <a:t>6 × 8</a:t>
+            </a:r>
+            <a:pPr algn="l" indent="0" marL="0">
+              <a:lnSpc>
+                <a:spcPts val="1620"/>
+              </a:lnSpc>
+              <a:spcAft>
+                <a:spcPts val="300"/>
+              </a:spcAft>
+              <a:buNone/>
+            </a:pPr>
+            <a:r>
+              <a:rPr lang="en-US" sz="1200" dirty="0">
+                <a:solidFill>
+                  <a:srgbClr val="1C2833"/>
+                </a:solidFill>
+                <a:latin typeface="Arial" pitchFamily="34" charset="0"/>
+                <a:ea typeface="Arial" pitchFamily="34" charset="-122"/>
+                <a:cs typeface="Arial" pitchFamily="34" charset="-120"/>
+              </a:rPr>
+              <a:t>. This is the most common error point.</a:t>
+            </a:r>
+            <a:endParaRPr lang="en-US" sz="1200" dirty="0"/>
+          </a:p>
+          <a:p>
+            <a:pPr algn="l" marL="342900" indent="-342900">
+              <a:lnSpc>
+                <a:spcPts val="1620"/>
+              </a:lnSpc>
+              <a:spcAft>
+                <a:spcPts val="300"/>
+              </a:spcAft>
+              <a:buSzPct val="100000"/>
+              <a:buChar char="•"/>
+            </a:pPr>
+            <a:r>
+              <a:rPr lang="en-US" sz="1200" dirty="0">
+                <a:solidFill>
+                  <a:srgbClr val="1C2833"/>
+                </a:solidFill>
+                <a:latin typeface="Arial" pitchFamily="34" charset="0"/>
+                <a:ea typeface="Arial" pitchFamily="34" charset="-122"/>
+                <a:cs typeface="Arial" pitchFamily="34" charset="-120"/>
+              </a:rPr>
+              <a:t>The "either cross gives the same" property is a built-in check students can use to catch errors. Reinforce it.</a:t>
             </a:r>
             <a:endParaRPr lang="en-US" sz="1200" dirty="0"/>
           </a:p>
@@ -2949,7 +7073,7 @@
                 <a:ea typeface="Georgia" pitchFamily="34" charset="-122"/>
                 <a:cs typeface="Georgia" pitchFamily="34" charset="-120"/>
               </a:rPr>
-              <a:t>Materials</a:t>
+              <a:t>Learning objective</a:t>
             </a:r>
             <a:endParaRPr lang="en-US" sz="1800" dirty="0"/>
           </a:p>
@@ -2997,7 +7121,315 @@
                 <a:ea typeface="Arial" pitchFamily="34" charset="-122"/>
                 <a:cs typeface="Arial" pitchFamily="34" charset="-120"/>
               </a:rPr>
-              <a:t>– Class wall-poster: "Deficits from 10" — the table 1→9, 2→8, ..., 9→1. Display before class. – Drill sheet: 20 single-digit × single-digit problems (both factors 6–9). – Stopwatch per pair.</a:t>
+              <a:t>By the end of this lesson, students will instantly state the deficit of any single digit from 10, AND will solve any single-digit × single-digit multiplication where both digits are 6–9 using the Nikhilam method.</a:t>
+            </a:r>
+            <a:endParaRPr lang="en-US" sz="1200" dirty="0"/>
+          </a:p>
+        </p:txBody>
+      </p:sp>
+      <p:sp>
+        <p:nvSpPr>
+          <p:cNvPr id="5" name="Text 3"/>
+          <p:cNvSpPr/>
+          <p:nvPr/>
+        </p:nvSpPr>
+        <p:spPr>
+          <a:xfrm>
+            <a:off x="406301" y="4434929"/>
+            <a:ext cx="8498026" cy="213271"/>
+          </a:xfrm>
+          <a:prstGeom prst="rect">
+            <a:avLst/>
+          </a:prstGeom>
+          <a:noFill/>
+          <a:ln/>
+        </p:spPr>
+        <p:txBody>
+          <a:bodyPr wrap="square" lIns="0" tIns="0" rIns="0" bIns="0" rtlCol="0" anchor="t"/>
+          <a:lstStyle/>
+          <a:p>
+            <a:pPr algn="l" indent="0" marL="0">
+              <a:lnSpc>
+                <a:spcPts val="1680"/>
+              </a:lnSpc>
+              <a:spcBef>
+                <a:spcPts val="300"/>
+              </a:spcBef>
+              <a:spcAft>
+                <a:spcPts val="300"/>
+              </a:spcAft>
+              <a:buNone/>
+            </a:pPr>
+            <a:r>
+              <a:rPr lang="en-US" sz="1200" dirty="0">
+                <a:solidFill>
+                  <a:srgbClr val="1C2833"/>
+                </a:solidFill>
+                <a:latin typeface="Arial" pitchFamily="34" charset="0"/>
+                <a:ea typeface="Arial" pitchFamily="34" charset="-122"/>
+                <a:cs typeface="Arial" pitchFamily="34" charset="-120"/>
+              </a:rPr>
+              <a:t>Middle ·  · IKS Curriculum</a:t>
+            </a:r>
+            <a:endParaRPr lang="en-US" sz="1200" dirty="0"/>
+          </a:p>
+        </p:txBody>
+      </p:sp>
+    </p:spTree>
+  </p:cSld>
+  <p:clrMapOvr>
+    <a:masterClrMapping/>
+  </p:clrMapOvr>
+</p:sld>
+</file>
+
+<file path=ppt/slides/slide20.xml><?xml version="1.0" encoding="utf-8"?>
+<p:sld xmlns:a="http://schemas.openxmlformats.org/drawingml/2006/main" xmlns:r="http://schemas.openxmlformats.org/officeDocument/2006/relationships" xmlns:p="http://schemas.openxmlformats.org/presentationml/2006/main">
+  <p:cSld name="Slide 20">
+    <p:bg>
+      <p:bgPr>
+        <a:solidFill>
+          <a:srgbClr val="FFFFFF"/>
+        </a:solidFill>
+      </p:bgPr>
+    </p:bg>
+    <p:spTree>
+      <p:nvGrpSpPr>
+        <p:cNvPr id="1" name=""/>
+        <p:cNvGrpSpPr/>
+        <p:nvPr/>
+      </p:nvGrpSpPr>
+      <p:grpSpPr>
+        <a:xfrm>
+          <a:off x="0" y="0"/>
+          <a:ext cx="0" cy="0"/>
+          <a:chOff x="0" y="0"/>
+          <a:chExt cx="0" cy="0"/>
+        </a:xfrm>
+      </p:grpSpPr>
+      <p:sp>
+        <p:nvSpPr>
+          <p:cNvPr id="2" name="Text 0"/>
+          <p:cNvSpPr/>
+          <p:nvPr/>
+        </p:nvSpPr>
+        <p:spPr>
+          <a:xfrm>
+            <a:off x="0" y="0"/>
+            <a:ext cx="9144000" cy="101501"/>
+          </a:xfrm>
+          <a:prstGeom prst="rect">
+            <a:avLst/>
+          </a:prstGeom>
+          <a:solidFill>
+            <a:srgbClr val="277884"/>
+          </a:solidFill>
+          <a:ln/>
+        </p:spPr>
+        <p:txBody>
+          <a:bodyPr wrap="square" rtlCol="0" anchor="ctr"/>
+          <a:lstStyle/>
+          <a:p>
+            <a:pPr indent="0" marL="0">
+              <a:buNone/>
+            </a:pPr>
+            <a:endParaRPr lang="en-US" dirty="0"/>
+          </a:p>
+        </p:txBody>
+      </p:sp>
+      <p:sp>
+        <p:nvSpPr>
+          <p:cNvPr id="3" name="Text 1"/>
+          <p:cNvSpPr/>
+          <p:nvPr/>
+        </p:nvSpPr>
+        <p:spPr>
+          <a:xfrm>
+            <a:off x="406301" y="457051"/>
+            <a:ext cx="8498026" cy="274290"/>
+          </a:xfrm>
+          <a:prstGeom prst="rect">
+            <a:avLst/>
+          </a:prstGeom>
+          <a:noFill/>
+          <a:ln/>
+        </p:spPr>
+        <p:txBody>
+          <a:bodyPr wrap="square" lIns="0" tIns="0" rIns="0" bIns="0" rtlCol="0" anchor="t"/>
+          <a:lstStyle/>
+          <a:p>
+            <a:pPr algn="l" indent="0" marL="0">
+              <a:lnSpc>
+                <a:spcPts val="2160"/>
+              </a:lnSpc>
+              <a:spcBef>
+                <a:spcPts val="600"/>
+              </a:spcBef>
+              <a:spcAft>
+                <a:spcPts val="800"/>
+              </a:spcAft>
+              <a:buNone/>
+            </a:pPr>
+            <a:r>
+              <a:rPr lang="en-US" sz="1800" b="1" dirty="0">
+                <a:solidFill>
+                  <a:srgbClr val="FE4447"/>
+                </a:solidFill>
+                <a:latin typeface="Georgia" pitchFamily="34" charset="0"/>
+                <a:ea typeface="Georgia" pitchFamily="34" charset="-122"/>
+                <a:cs typeface="Georgia" pitchFamily="34" charset="-120"/>
+              </a:rPr>
+              <a:t>Citation(s) used in this lesson</a:t>
+            </a:r>
+            <a:endParaRPr lang="en-US" sz="1800" dirty="0"/>
+          </a:p>
+        </p:txBody>
+      </p:sp>
+      <p:sp>
+        <p:nvSpPr>
+          <p:cNvPr id="4" name="Text 2"/>
+          <p:cNvSpPr/>
+          <p:nvPr/>
+        </p:nvSpPr>
+        <p:spPr>
+          <a:xfrm>
+            <a:off x="634901" y="883593"/>
+            <a:ext cx="8102798" cy="731341"/>
+          </a:xfrm>
+          <a:prstGeom prst="rect">
+            <a:avLst/>
+          </a:prstGeom>
+          <a:noFill/>
+          <a:ln/>
+        </p:spPr>
+        <p:txBody>
+          <a:bodyPr wrap="square" lIns="0" tIns="0" rIns="0" bIns="0" rtlCol="0" anchor="t"/>
+          <a:lstStyle/>
+          <a:p>
+            <a:pPr algn="l" marL="342900" indent="-342900">
+              <a:lnSpc>
+                <a:spcPts val="1620"/>
+              </a:lnSpc>
+              <a:spcAft>
+                <a:spcPts val="300"/>
+              </a:spcAft>
+              <a:buSzPct val="100000"/>
+              <a:buChar char="•"/>
+            </a:pPr>
+            <a:r>
+              <a:rPr lang="en-US" sz="1200" i="1" dirty="0">
+                <a:solidFill>
+                  <a:srgbClr val="1C2833"/>
+                </a:solidFill>
+                <a:latin typeface="Arial" pitchFamily="34" charset="0"/>
+                <a:ea typeface="Arial" pitchFamily="34" charset="-122"/>
+                <a:cs typeface="Arial" pitchFamily="34" charset="-120"/>
+              </a:rPr>
+              <a:t>Vedic Mathematics Batch1.pdf</a:t>
+            </a:r>
+            <a:pPr algn="l" indent="0" marL="0">
+              <a:lnSpc>
+                <a:spcPts val="1620"/>
+              </a:lnSpc>
+              <a:spcAft>
+                <a:spcPts val="300"/>
+              </a:spcAft>
+              <a:buNone/>
+            </a:pPr>
+            <a:r>
+              <a:rPr lang="en-US" sz="1200" dirty="0">
+                <a:solidFill>
+                  <a:srgbClr val="1C2833"/>
+                </a:solidFill>
+                <a:latin typeface="Arial" pitchFamily="34" charset="0"/>
+                <a:ea typeface="Arial" pitchFamily="34" charset="-122"/>
+                <a:cs typeface="Arial" pitchFamily="34" charset="-120"/>
+              </a:rPr>
+              <a:t> (Vedic Cultural Center, Sammamish WA) — Nikhilam multiplication, single-digit examples.</a:t>
+            </a:r>
+            <a:endParaRPr lang="en-US" sz="1200" dirty="0"/>
+          </a:p>
+          <a:p>
+            <a:pPr algn="l" marL="342900" indent="-342900">
+              <a:lnSpc>
+                <a:spcPts val="1620"/>
+              </a:lnSpc>
+              <a:spcAft>
+                <a:spcPts val="300"/>
+              </a:spcAft>
+              <a:buSzPct val="100000"/>
+              <a:buChar char="•"/>
+            </a:pPr>
+            <a:r>
+              <a:rPr lang="en-US" sz="1200" i="1" dirty="0">
+                <a:solidFill>
+                  <a:srgbClr val="1C2833"/>
+                </a:solidFill>
+                <a:latin typeface="Arial" pitchFamily="34" charset="0"/>
+                <a:ea typeface="Arial" pitchFamily="34" charset="-122"/>
+                <a:cs typeface="Arial" pitchFamily="34" charset="-120"/>
+              </a:rPr>
+              <a:t>Microsoft Word - sutras1.pdf</a:t>
+            </a:r>
+            <a:pPr algn="l" indent="0" marL="0">
+              <a:lnSpc>
+                <a:spcPts val="1620"/>
+              </a:lnSpc>
+              <a:spcAft>
+                <a:spcPts val="300"/>
+              </a:spcAft>
+              <a:buNone/>
+            </a:pPr>
+            <a:r>
+              <a:rPr lang="en-US" sz="1200" dirty="0">
+                <a:solidFill>
+                  <a:srgbClr val="1C2833"/>
+                </a:solidFill>
+                <a:latin typeface="Arial" pitchFamily="34" charset="0"/>
+                <a:ea typeface="Arial" pitchFamily="34" charset="-122"/>
+                <a:cs typeface="Arial" pitchFamily="34" charset="-120"/>
+              </a:rPr>
+              <a:t> — sūtra #2: </a:t>
+            </a:r>
+            <a:pPr algn="l" indent="0" marL="0">
+              <a:lnSpc>
+                <a:spcPts val="1620"/>
+              </a:lnSpc>
+              <a:spcAft>
+                <a:spcPts val="300"/>
+              </a:spcAft>
+              <a:buNone/>
+            </a:pPr>
+            <a:r>
+              <a:rPr lang="en-US" sz="1200" i="1" dirty="0">
+                <a:solidFill>
+                  <a:srgbClr val="1C2833"/>
+                </a:solidFill>
+                <a:latin typeface="Arial" pitchFamily="34" charset="0"/>
+                <a:ea typeface="Arial" pitchFamily="34" charset="-122"/>
+                <a:cs typeface="Arial" pitchFamily="34" charset="-120"/>
+              </a:rPr>
+              <a:t>Nikhilam Navataścaramaṁ Daśataḥ</a:t>
+            </a:r>
+            <a:pPr algn="l" indent="0" marL="0">
+              <a:lnSpc>
+                <a:spcPts val="1620"/>
+              </a:lnSpc>
+              <a:spcAft>
+                <a:spcPts val="300"/>
+              </a:spcAft>
+              <a:buNone/>
+            </a:pPr>
+            <a:r>
+              <a:rPr lang="en-US" sz="1200" dirty="0">
+                <a:solidFill>
+                  <a:srgbClr val="1C2833"/>
+                </a:solidFill>
+                <a:latin typeface="Arial" pitchFamily="34" charset="0"/>
+                <a:ea typeface="Arial" pitchFamily="34" charset="-122"/>
+                <a:cs typeface="Arial" pitchFamily="34" charset="-120"/>
+              </a:rPr>
+              <a:t>.</a:t>
             </a:r>
             <a:endParaRPr lang="en-US" sz="1200" dirty="0"/>
           </a:p>
@@ -3155,7 +7587,7 @@
                 <a:ea typeface="Georgia" pitchFamily="34" charset="-122"/>
                 <a:cs typeface="Georgia" pitchFamily="34" charset="-120"/>
               </a:rPr>
-              <a:t>Lesson flow</a:t>
+              <a:t>Materials</a:t>
             </a:r>
             <a:endParaRPr lang="en-US" sz="1800" dirty="0"/>
           </a:p>
@@ -3164,6 +7596,100 @@
       <p:sp>
         <p:nvSpPr>
           <p:cNvPr id="4" name="Text 2"/>
+          <p:cNvSpPr/>
+          <p:nvPr/>
+        </p:nvSpPr>
+        <p:spPr>
+          <a:xfrm>
+            <a:off x="634901" y="883593"/>
+            <a:ext cx="8102798" cy="769441"/>
+          </a:xfrm>
+          <a:prstGeom prst="rect">
+            <a:avLst/>
+          </a:prstGeom>
+          <a:noFill/>
+          <a:ln/>
+        </p:spPr>
+        <p:txBody>
+          <a:bodyPr wrap="square" lIns="0" tIns="0" rIns="0" bIns="0" rtlCol="0" anchor="t"/>
+          <a:lstStyle/>
+          <a:p>
+            <a:pPr algn="l" marL="342900" indent="-342900">
+              <a:lnSpc>
+                <a:spcPts val="1620"/>
+              </a:lnSpc>
+              <a:spcAft>
+                <a:spcPts val="300"/>
+              </a:spcAft>
+              <a:buSzPct val="100000"/>
+              <a:buChar char="•"/>
+            </a:pPr>
+            <a:r>
+              <a:rPr lang="en-US" sz="1200" dirty="0">
+                <a:solidFill>
+                  <a:srgbClr val="1C2833"/>
+                </a:solidFill>
+                <a:latin typeface="Arial" pitchFamily="34" charset="0"/>
+                <a:ea typeface="Arial" pitchFamily="34" charset="-122"/>
+                <a:cs typeface="Arial" pitchFamily="34" charset="-120"/>
+              </a:rPr>
+              <a:t>Class wall-poster: "Deficits from 10" — the table 1→9, 2→8, ..., 9→1. Display before class.</a:t>
+            </a:r>
+            <a:endParaRPr lang="en-US" sz="1200" dirty="0"/>
+          </a:p>
+          <a:p>
+            <a:pPr algn="l" marL="342900" indent="-342900">
+              <a:lnSpc>
+                <a:spcPts val="1620"/>
+              </a:lnSpc>
+              <a:spcAft>
+                <a:spcPts val="300"/>
+              </a:spcAft>
+              <a:buSzPct val="100000"/>
+              <a:buChar char="•"/>
+            </a:pPr>
+            <a:r>
+              <a:rPr lang="en-US" sz="1200" dirty="0">
+                <a:solidFill>
+                  <a:srgbClr val="1C2833"/>
+                </a:solidFill>
+                <a:latin typeface="Arial" pitchFamily="34" charset="0"/>
+                <a:ea typeface="Arial" pitchFamily="34" charset="-122"/>
+                <a:cs typeface="Arial" pitchFamily="34" charset="-120"/>
+              </a:rPr>
+              <a:t>Drill sheet: 20 single-digit × single-digit problems (both factors 6–9).</a:t>
+            </a:r>
+            <a:endParaRPr lang="en-US" sz="1200" dirty="0"/>
+          </a:p>
+          <a:p>
+            <a:pPr algn="l" marL="342900" indent="-342900">
+              <a:lnSpc>
+                <a:spcPts val="1620"/>
+              </a:lnSpc>
+              <a:spcAft>
+                <a:spcPts val="300"/>
+              </a:spcAft>
+              <a:buSzPct val="100000"/>
+              <a:buChar char="•"/>
+            </a:pPr>
+            <a:r>
+              <a:rPr lang="en-US" sz="1200" dirty="0">
+                <a:solidFill>
+                  <a:srgbClr val="1C2833"/>
+                </a:solidFill>
+                <a:latin typeface="Arial" pitchFamily="34" charset="0"/>
+                <a:ea typeface="Arial" pitchFamily="34" charset="-122"/>
+                <a:cs typeface="Arial" pitchFamily="34" charset="-120"/>
+              </a:rPr>
+              <a:t>Stopwatch per pair.</a:t>
+            </a:r>
+            <a:endParaRPr lang="en-US" sz="1200" dirty="0"/>
+          </a:p>
+        </p:txBody>
+      </p:sp>
+      <p:sp>
+        <p:nvSpPr>
+          <p:cNvPr id="5" name="Text 3"/>
           <p:cNvSpPr/>
           <p:nvPr/>
         </p:nvSpPr>
@@ -3313,7 +7839,7 @@
                 <a:ea typeface="Georgia" pitchFamily="34" charset="-122"/>
                 <a:cs typeface="Georgia" pitchFamily="34" charset="-120"/>
               </a:rPr>
-              <a:t>Warm-up (5 min)</a:t>
+              <a:t>Lesson flow</a:t>
             </a:r>
             <a:endParaRPr lang="en-US" sz="1800" dirty="0"/>
           </a:p>
@@ -3322,120 +7848,6 @@
       <p:sp>
         <p:nvSpPr>
           <p:cNvPr id="4" name="Text 2"/>
-          <p:cNvSpPr/>
-          <p:nvPr/>
-        </p:nvSpPr>
-        <p:spPr>
-          <a:xfrm>
-            <a:off x="634901" y="883593"/>
-            <a:ext cx="8102798" cy="487561"/>
-          </a:xfrm>
-          <a:prstGeom prst="rect">
-            <a:avLst/>
-          </a:prstGeom>
-          <a:noFill/>
-          <a:ln/>
-        </p:spPr>
-        <p:txBody>
-          <a:bodyPr wrap="square" lIns="0" tIns="0" rIns="0" bIns="0" rtlCol="0" anchor="t"/>
-          <a:lstStyle/>
-          <a:p>
-            <a:pPr algn="l" marL="342900" indent="-342900">
-              <a:lnSpc>
-                <a:spcPts val="1620"/>
-              </a:lnSpc>
-              <a:spcAft>
-                <a:spcPts val="300"/>
-              </a:spcAft>
-              <a:buSzPct val="100000"/>
-              <a:buChar char="•"/>
-            </a:pPr>
-            <a:r>
-              <a:rPr lang="en-US" sz="1200" b="1" dirty="0">
-                <a:solidFill>
-                  <a:srgbClr val="1C2833"/>
-                </a:solidFill>
-                <a:latin typeface="Arial" pitchFamily="34" charset="0"/>
-                <a:ea typeface="Arial" pitchFamily="34" charset="-122"/>
-                <a:cs typeface="Arial" pitchFamily="34" charset="-120"/>
-              </a:rPr>
-              <a:t>Complement-to-10 lightning round.</a:t>
-            </a:r>
-            <a:pPr algn="l" indent="0" marL="0">
-              <a:lnSpc>
-                <a:spcPts val="1620"/>
-              </a:lnSpc>
-              <a:spcAft>
-                <a:spcPts val="300"/>
-              </a:spcAft>
-              <a:buNone/>
-            </a:pPr>
-            <a:r>
-              <a:rPr lang="en-US" sz="1200" dirty="0">
-                <a:solidFill>
-                  <a:srgbClr val="1C2833"/>
-                </a:solidFill>
-                <a:latin typeface="Arial" pitchFamily="34" charset="0"/>
-                <a:ea typeface="Arial" pitchFamily="34" charset="-122"/>
-                <a:cs typeface="Arial" pitchFamily="34" charset="-120"/>
-              </a:rPr>
-              <a:t> Teacher calls 10 single digits in 30 seconds; class chants the deficit. (7 → 3. 8 → 2. 6 → 4. 9 → 1. ...)</a:t>
-            </a:r>
-            <a:endParaRPr lang="en-US" sz="1200" dirty="0"/>
-          </a:p>
-        </p:txBody>
-      </p:sp>
-      <p:sp>
-        <p:nvSpPr>
-          <p:cNvPr id="5" name="Text 3"/>
-          <p:cNvSpPr/>
-          <p:nvPr/>
-        </p:nvSpPr>
-        <p:spPr>
-          <a:xfrm>
-            <a:off x="406301" y="1460004"/>
-            <a:ext cx="8498026" cy="213271"/>
-          </a:xfrm>
-          <a:prstGeom prst="rect">
-            <a:avLst/>
-          </a:prstGeom>
-          <a:noFill/>
-          <a:ln/>
-        </p:spPr>
-        <p:txBody>
-          <a:bodyPr wrap="square" lIns="0" tIns="0" rIns="0" bIns="0" rtlCol="0" anchor="t"/>
-          <a:lstStyle/>
-          <a:p>
-            <a:pPr algn="l" indent="0" marL="0">
-              <a:lnSpc>
-                <a:spcPts val="1680"/>
-              </a:lnSpc>
-              <a:spcBef>
-                <a:spcPts val="300"/>
-              </a:spcBef>
-              <a:spcAft>
-                <a:spcPts val="300"/>
-              </a:spcAft>
-              <a:buNone/>
-            </a:pPr>
-            <a:r>
-              <a:rPr lang="en-US" sz="1200" dirty="0">
-                <a:solidFill>
-                  <a:srgbClr val="1C2833"/>
-                </a:solidFill>
-                <a:latin typeface="Arial" pitchFamily="34" charset="0"/>
-                <a:ea typeface="Arial" pitchFamily="34" charset="-122"/>
-                <a:cs typeface="Arial" pitchFamily="34" charset="-120"/>
-              </a:rPr>
-              <a:t>– Repeat with a different sequence. By the end most students should be calling out the deficit faster than they can think it.</a:t>
-            </a:r>
-            <a:endParaRPr lang="en-US" sz="1200" dirty="0"/>
-          </a:p>
-        </p:txBody>
-      </p:sp>
-      <p:sp>
-        <p:nvSpPr>
-          <p:cNvPr id="6" name="Text 4"/>
           <p:cNvSpPr/>
           <p:nvPr/>
         </p:nvSpPr>
@@ -3585,7 +7997,7 @@
                 <a:ea typeface="Georgia" pitchFamily="34" charset="-122"/>
                 <a:cs typeface="Georgia" pitchFamily="34" charset="-120"/>
               </a:rPr>
-              <a:t>Activity (20 min) — Drill</a:t>
+              <a:t>Warm-up (5 min)</a:t>
             </a:r>
             <a:endParaRPr lang="en-US" sz="1800" dirty="0"/>
           </a:p>
@@ -3599,8 +8011,8 @@
         </p:nvSpPr>
         <p:spPr>
           <a:xfrm>
-            <a:off x="406301" y="870942"/>
-            <a:ext cx="8498026" cy="213271"/>
+            <a:off x="634901" y="883593"/>
+            <a:ext cx="8102798" cy="731341"/>
           </a:xfrm>
           <a:prstGeom prst="rect">
             <a:avLst/>
@@ -3612,178 +8024,78 @@
           <a:bodyPr wrap="square" lIns="0" tIns="0" rIns="0" bIns="0" rtlCol="0" anchor="t"/>
           <a:lstStyle/>
           <a:p>
-            <a:pPr algn="l" indent="0" marL="0">
-              <a:lnSpc>
-                <a:spcPts val="1680"/>
-              </a:lnSpc>
-              <a:spcBef>
-                <a:spcPts val="300"/>
-              </a:spcBef>
-              <a:spcAft>
-                <a:spcPts val="300"/>
-              </a:spcAft>
-              <a:buNone/>
-            </a:pPr>
-            <a:r>
-              <a:rPr lang="en-US" sz="1200" dirty="0">
-                <a:solidFill>
-                  <a:srgbClr val="1C2833"/>
-                </a:solidFill>
-                <a:latin typeface="Arial" pitchFamily="34" charset="0"/>
-                <a:ea typeface="Arial" pitchFamily="34" charset="-122"/>
-                <a:cs typeface="Arial" pitchFamily="34" charset="-120"/>
-              </a:rPr>
-              <a:t>Pair drills.</a:t>
+            <a:pPr algn="l" marL="342900" indent="-342900">
+              <a:lnSpc>
+                <a:spcPts val="1620"/>
+              </a:lnSpc>
+              <a:spcAft>
+                <a:spcPts val="300"/>
+              </a:spcAft>
+              <a:buSzPct val="100000"/>
+              <a:buChar char="•"/>
+            </a:pPr>
+            <a:r>
+              <a:rPr lang="en-US" sz="1200" b="1" dirty="0">
+                <a:solidFill>
+                  <a:srgbClr val="1C2833"/>
+                </a:solidFill>
+                <a:latin typeface="Arial" pitchFamily="34" charset="0"/>
+                <a:ea typeface="Arial" pitchFamily="34" charset="-122"/>
+                <a:cs typeface="Arial" pitchFamily="34" charset="-120"/>
+              </a:rPr>
+              <a:t>Complement-to-10 lightning round.</a:t>
+            </a:r>
+            <a:pPr algn="l" indent="0" marL="0">
+              <a:lnSpc>
+                <a:spcPts val="1620"/>
+              </a:lnSpc>
+              <a:spcAft>
+                <a:spcPts val="300"/>
+              </a:spcAft>
+              <a:buNone/>
+            </a:pPr>
+            <a:r>
+              <a:rPr lang="en-US" sz="1200" dirty="0">
+                <a:solidFill>
+                  <a:srgbClr val="1C2833"/>
+                </a:solidFill>
+                <a:latin typeface="Arial" pitchFamily="34" charset="0"/>
+                <a:ea typeface="Arial" pitchFamily="34" charset="-122"/>
+                <a:cs typeface="Arial" pitchFamily="34" charset="-120"/>
+              </a:rPr>
+              <a:t> Teacher calls 10 single digits in 30 seconds; class chants the deficit. (7 → 3. 8 → 2. 6 → 4. 9 → 1. ...)</a:t>
             </a:r>
             <a:endParaRPr lang="en-US" sz="1200" dirty="0"/>
           </a:p>
+          <a:p>
+            <a:pPr algn="l" marL="342900" indent="-342900">
+              <a:lnSpc>
+                <a:spcPts val="1620"/>
+              </a:lnSpc>
+              <a:spcAft>
+                <a:spcPts val="300"/>
+              </a:spcAft>
+              <a:buSzPct val="100000"/>
+              <a:buChar char="•"/>
+            </a:pPr>
+            <a:r>
+              <a:rPr lang="en-US" sz="1200" dirty="0">
+                <a:solidFill>
+                  <a:srgbClr val="1C2833"/>
+                </a:solidFill>
+                <a:latin typeface="Arial" pitchFamily="34" charset="0"/>
+                <a:ea typeface="Arial" pitchFamily="34" charset="-122"/>
+                <a:cs typeface="Arial" pitchFamily="34" charset="-120"/>
+              </a:rPr>
+              <a:t>Repeat with a different sequence. By the end most students should be calling out the deficit faster than they can think it.</a:t>
+            </a:r>
+            <a:endParaRPr lang="en-US" sz="1200" dirty="0"/>
+          </a:p>
         </p:txBody>
       </p:sp>
       <p:sp>
         <p:nvSpPr>
           <p:cNvPr id="5" name="Text 3"/>
-          <p:cNvSpPr/>
-          <p:nvPr/>
-        </p:nvSpPr>
-        <p:spPr>
-          <a:xfrm>
-            <a:off x="406301" y="1160413"/>
-            <a:ext cx="8498026" cy="639812"/>
-          </a:xfrm>
-          <a:prstGeom prst="rect">
-            <a:avLst/>
-          </a:prstGeom>
-          <a:noFill/>
-          <a:ln/>
-        </p:spPr>
-        <p:txBody>
-          <a:bodyPr wrap="square" lIns="0" tIns="0" rIns="0" bIns="0" rtlCol="0" anchor="t"/>
-          <a:lstStyle/>
-          <a:p>
-            <a:pPr algn="l" indent="0" marL="0">
-              <a:lnSpc>
-                <a:spcPts val="1680"/>
-              </a:lnSpc>
-              <a:spcBef>
-                <a:spcPts val="300"/>
-              </a:spcBef>
-              <a:spcAft>
-                <a:spcPts val="300"/>
-              </a:spcAft>
-              <a:buNone/>
-            </a:pPr>
-            <a:r>
-              <a:rPr lang="en-US" sz="1200" dirty="0">
-                <a:solidFill>
-                  <a:srgbClr val="1C2833"/>
-                </a:solidFill>
-                <a:latin typeface="Arial" pitchFamily="34" charset="0"/>
-                <a:ea typeface="Arial" pitchFamily="34" charset="-122"/>
-                <a:cs typeface="Arial" pitchFamily="34" charset="-120"/>
-              </a:rPr>
-              <a:t>– Hand out the drill sheet — 20 problems, all single-digit × single-digit, both factors in 6–9. – Working in pairs:   – Partner A reads problem 1 aloud.   – Partner B answers in under 3 seconds using Nikhilam.   – Swap. – 10 min of paired drill. Then 5 min of individual silent practice.</a:t>
-            </a:r>
-            <a:endParaRPr lang="en-US" sz="1200" dirty="0"/>
-          </a:p>
-        </p:txBody>
-      </p:sp>
-      <p:sp>
-        <p:nvSpPr>
-          <p:cNvPr id="6" name="Text 4"/>
-          <p:cNvSpPr/>
-          <p:nvPr/>
-        </p:nvSpPr>
-        <p:spPr>
-          <a:xfrm>
-            <a:off x="406301" y="1876425"/>
-            <a:ext cx="8498026" cy="426541"/>
-          </a:xfrm>
-          <a:prstGeom prst="rect">
-            <a:avLst/>
-          </a:prstGeom>
-          <a:noFill/>
-          <a:ln/>
-        </p:spPr>
-        <p:txBody>
-          <a:bodyPr wrap="square" lIns="0" tIns="0" rIns="0" bIns="0" rtlCol="0" anchor="t"/>
-          <a:lstStyle/>
-          <a:p>
-            <a:pPr algn="l" indent="0" marL="0">
-              <a:lnSpc>
-                <a:spcPts val="1680"/>
-              </a:lnSpc>
-              <a:spcBef>
-                <a:spcPts val="300"/>
-              </a:spcBef>
-              <a:spcAft>
-                <a:spcPts val="300"/>
-              </a:spcAft>
-              <a:buNone/>
-            </a:pPr>
-            <a:r>
-              <a:rPr lang="en-US" sz="1200" dirty="0">
-                <a:solidFill>
-                  <a:srgbClr val="1C2833"/>
-                </a:solidFill>
-                <a:latin typeface="Arial" pitchFamily="34" charset="0"/>
-                <a:ea typeface="Arial" pitchFamily="34" charset="-122"/>
-                <a:cs typeface="Arial" pitchFamily="34" charset="-120"/>
-              </a:rPr>
-              <a:t>After 5 minutes of paired drills, do a class-level </a:t>
-            </a:r>
-            <a:pPr algn="l" indent="0" marL="0">
-              <a:lnSpc>
-                <a:spcPts val="1680"/>
-              </a:lnSpc>
-              <a:spcBef>
-                <a:spcPts val="300"/>
-              </a:spcBef>
-              <a:spcAft>
-                <a:spcPts val="300"/>
-              </a:spcAft>
-              <a:buNone/>
-            </a:pPr>
-            <a:r>
-              <a:rPr lang="en-US" sz="1200" b="1" dirty="0">
-                <a:solidFill>
-                  <a:srgbClr val="1C2833"/>
-                </a:solidFill>
-                <a:latin typeface="Arial" pitchFamily="34" charset="0"/>
-                <a:ea typeface="Arial" pitchFamily="34" charset="-122"/>
-                <a:cs typeface="Arial" pitchFamily="34" charset="-120"/>
-              </a:rPr>
-              <a:t>timing test</a:t>
-            </a:r>
-            <a:pPr algn="l" indent="0" marL="0">
-              <a:lnSpc>
-                <a:spcPts val="1680"/>
-              </a:lnSpc>
-              <a:spcBef>
-                <a:spcPts val="300"/>
-              </a:spcBef>
-              <a:spcAft>
-                <a:spcPts val="300"/>
-              </a:spcAft>
-              <a:buNone/>
-            </a:pPr>
-            <a:r>
-              <a:rPr lang="en-US" sz="1200" dirty="0">
-                <a:solidFill>
-                  <a:srgbClr val="1C2833"/>
-                </a:solidFill>
-                <a:latin typeface="Arial" pitchFamily="34" charset="0"/>
-                <a:ea typeface="Arial" pitchFamily="34" charset="-122"/>
-                <a:cs typeface="Arial" pitchFamily="34" charset="-120"/>
-              </a:rPr>
-              <a:t>: project 10 problems on the board; students answer all 10 individually in 60 seconds.</a:t>
-            </a:r>
-            <a:endParaRPr lang="en-US" sz="1200" dirty="0"/>
-          </a:p>
-        </p:txBody>
-      </p:sp>
-      <p:sp>
-        <p:nvSpPr>
-          <p:cNvPr id="7" name="Text 5"/>
           <p:cNvSpPr/>
           <p:nvPr/>
         </p:nvSpPr>
@@ -3933,7 +8245,7 @@
                 <a:ea typeface="Georgia" pitchFamily="34" charset="-122"/>
                 <a:cs typeface="Georgia" pitchFamily="34" charset="-120"/>
               </a:rPr>
-              <a:t>Wrap-up (5 min)</a:t>
+              <a:t>Core (15 min) — Nikhilam at the single-digit level</a:t>
             </a:r>
             <a:endParaRPr lang="en-US" sz="1800" dirty="0"/>
           </a:p>
@@ -3947,8 +8259,8 @@
         </p:nvSpPr>
         <p:spPr>
           <a:xfrm>
-            <a:off x="406301" y="870942"/>
-            <a:ext cx="8498026" cy="436066"/>
+            <a:off x="634901" y="883593"/>
+            <a:ext cx="8102798" cy="281880"/>
           </a:xfrm>
           <a:prstGeom prst="rect">
             <a:avLst/>
@@ -3960,235 +8272,46 @@
           <a:bodyPr wrap="square" lIns="0" tIns="0" rIns="0" bIns="0" rtlCol="0" anchor="t"/>
           <a:lstStyle/>
           <a:p>
-            <a:pPr algn="l" indent="0" marL="0">
-              <a:lnSpc>
-                <a:spcPts val="1680"/>
-              </a:lnSpc>
-              <a:spcBef>
-                <a:spcPts val="300"/>
-              </a:spcBef>
-              <a:spcAft>
-                <a:spcPts val="300"/>
-              </a:spcAft>
-              <a:buNone/>
-            </a:pPr>
-            <a:r>
-              <a:rPr lang="en-US" sz="1200" dirty="0">
-                <a:solidFill>
-                  <a:srgbClr val="1C2833"/>
-                </a:solidFill>
-                <a:latin typeface="Arial" pitchFamily="34" charset="0"/>
-                <a:ea typeface="Arial" pitchFamily="34" charset="-122"/>
-                <a:cs typeface="Arial" pitchFamily="34" charset="-120"/>
-              </a:rPr>
-              <a:t>– Quick check: chorus answers — </a:t>
-            </a:r>
-            <a:pPr algn="l" indent="0" marL="0">
-              <a:lnSpc>
-                <a:spcPts val="1680"/>
-              </a:lnSpc>
-              <a:spcBef>
-                <a:spcPts val="300"/>
-              </a:spcBef>
-              <a:spcAft>
-                <a:spcPts val="300"/>
-              </a:spcAft>
-              <a:buNone/>
-            </a:pPr>
-            <a:r>
-              <a:rPr lang="en-US" sz="1200" dirty="0">
-                <a:solidFill>
-                  <a:srgbClr val="1C2833"/>
-                </a:solidFill>
-                <a:latin typeface="Arial" pitchFamily="34" charset="0"/>
-                <a:ea typeface="Arial" pitchFamily="34" charset="-122"/>
-                <a:cs typeface="Arial" pitchFamily="34" charset="-120"/>
-              </a:rPr>
-              <a:t>7 × 7</a:t>
-            </a:r>
-            <a:pPr algn="l" indent="0" marL="0">
-              <a:lnSpc>
-                <a:spcPts val="1680"/>
-              </a:lnSpc>
-              <a:spcBef>
-                <a:spcPts val="300"/>
-              </a:spcBef>
-              <a:spcAft>
-                <a:spcPts val="300"/>
-              </a:spcAft>
-              <a:buNone/>
-            </a:pPr>
-            <a:r>
-              <a:rPr lang="en-US" sz="1200" dirty="0">
-                <a:solidFill>
-                  <a:srgbClr val="1C2833"/>
-                </a:solidFill>
-                <a:latin typeface="Arial" pitchFamily="34" charset="0"/>
-                <a:ea typeface="Arial" pitchFamily="34" charset="-122"/>
-                <a:cs typeface="Arial" pitchFamily="34" charset="-120"/>
-              </a:rPr>
-              <a:t>? (49.) </a:t>
-            </a:r>
-            <a:pPr algn="l" indent="0" marL="0">
-              <a:lnSpc>
-                <a:spcPts val="1680"/>
-              </a:lnSpc>
-              <a:spcBef>
-                <a:spcPts val="300"/>
-              </a:spcBef>
-              <a:spcAft>
-                <a:spcPts val="300"/>
-              </a:spcAft>
-              <a:buNone/>
-            </a:pPr>
-            <a:r>
-              <a:rPr lang="en-US" sz="1200" dirty="0">
-                <a:solidFill>
-                  <a:srgbClr val="1C2833"/>
-                </a:solidFill>
-                <a:latin typeface="Arial" pitchFamily="34" charset="0"/>
-                <a:ea typeface="Arial" pitchFamily="34" charset="-122"/>
-                <a:cs typeface="Arial" pitchFamily="34" charset="-120"/>
-              </a:rPr>
-              <a:t>6 × 8</a:t>
-            </a:r>
-            <a:pPr algn="l" indent="0" marL="0">
-              <a:lnSpc>
-                <a:spcPts val="1680"/>
-              </a:lnSpc>
-              <a:spcBef>
-                <a:spcPts val="300"/>
-              </a:spcBef>
-              <a:spcAft>
-                <a:spcPts val="300"/>
-              </a:spcAft>
-              <a:buNone/>
-            </a:pPr>
-            <a:r>
-              <a:rPr lang="en-US" sz="1200" dirty="0">
-                <a:solidFill>
-                  <a:srgbClr val="1C2833"/>
-                </a:solidFill>
-                <a:latin typeface="Arial" pitchFamily="34" charset="0"/>
-                <a:ea typeface="Arial" pitchFamily="34" charset="-122"/>
-                <a:cs typeface="Arial" pitchFamily="34" charset="-120"/>
-              </a:rPr>
-              <a:t>? (48.) </a:t>
-            </a:r>
-            <a:pPr algn="l" indent="0" marL="0">
-              <a:lnSpc>
-                <a:spcPts val="1680"/>
-              </a:lnSpc>
-              <a:spcBef>
-                <a:spcPts val="300"/>
-              </a:spcBef>
-              <a:spcAft>
-                <a:spcPts val="300"/>
-              </a:spcAft>
-              <a:buNone/>
-            </a:pPr>
-            <a:r>
-              <a:rPr lang="en-US" sz="1200" dirty="0">
-                <a:solidFill>
-                  <a:srgbClr val="1C2833"/>
-                </a:solidFill>
-                <a:latin typeface="Arial" pitchFamily="34" charset="0"/>
-                <a:ea typeface="Arial" pitchFamily="34" charset="-122"/>
-                <a:cs typeface="Arial" pitchFamily="34" charset="-120"/>
-              </a:rPr>
-              <a:t>9 × 9</a:t>
-            </a:r>
-            <a:pPr algn="l" indent="0" marL="0">
-              <a:lnSpc>
-                <a:spcPts val="1680"/>
-              </a:lnSpc>
-              <a:spcBef>
-                <a:spcPts val="300"/>
-              </a:spcBef>
-              <a:spcAft>
-                <a:spcPts val="300"/>
-              </a:spcAft>
-              <a:buNone/>
-            </a:pPr>
-            <a:r>
-              <a:rPr lang="en-US" sz="1200" dirty="0">
-                <a:solidFill>
-                  <a:srgbClr val="1C2833"/>
-                </a:solidFill>
-                <a:latin typeface="Arial" pitchFamily="34" charset="0"/>
-                <a:ea typeface="Arial" pitchFamily="34" charset="-122"/>
-                <a:cs typeface="Arial" pitchFamily="34" charset="-120"/>
-              </a:rPr>
-              <a:t>? (81.) </a:t>
-            </a:r>
-            <a:pPr algn="l" indent="0" marL="0">
-              <a:lnSpc>
-                <a:spcPts val="1680"/>
-              </a:lnSpc>
-              <a:spcBef>
-                <a:spcPts val="300"/>
-              </a:spcBef>
-              <a:spcAft>
-                <a:spcPts val="300"/>
-              </a:spcAft>
-              <a:buNone/>
-            </a:pPr>
-            <a:r>
-              <a:rPr lang="en-US" sz="1200" dirty="0">
-                <a:solidFill>
-                  <a:srgbClr val="1C2833"/>
-                </a:solidFill>
-                <a:latin typeface="Arial" pitchFamily="34" charset="0"/>
-                <a:ea typeface="Arial" pitchFamily="34" charset="-122"/>
-                <a:cs typeface="Arial" pitchFamily="34" charset="-120"/>
-              </a:rPr>
-              <a:t>8 × 6</a:t>
-            </a:r>
-            <a:pPr algn="l" indent="0" marL="0">
-              <a:lnSpc>
-                <a:spcPts val="1680"/>
-              </a:lnSpc>
-              <a:spcBef>
-                <a:spcPts val="300"/>
-              </a:spcBef>
-              <a:spcAft>
-                <a:spcPts val="300"/>
-              </a:spcAft>
-              <a:buNone/>
-            </a:pPr>
-            <a:r>
-              <a:rPr lang="en-US" sz="1200" dirty="0">
-                <a:solidFill>
-                  <a:srgbClr val="1C2833"/>
-                </a:solidFill>
-                <a:latin typeface="Arial" pitchFamily="34" charset="0"/>
-                <a:ea typeface="Arial" pitchFamily="34" charset="-122"/>
-                <a:cs typeface="Arial" pitchFamily="34" charset="-120"/>
-              </a:rPr>
-              <a:t>? (48.) – Preview Day 3: </a:t>
-            </a:r>
-            <a:pPr algn="l" indent="0" marL="0">
-              <a:lnSpc>
-                <a:spcPts val="1680"/>
-              </a:lnSpc>
-              <a:spcBef>
-                <a:spcPts val="300"/>
-              </a:spcBef>
-              <a:spcAft>
-                <a:spcPts val="300"/>
-              </a:spcAft>
-              <a:buNone/>
-            </a:pPr>
-            <a:r>
-              <a:rPr lang="en-US" sz="1200" i="1" dirty="0">
-                <a:solidFill>
-                  <a:srgbClr val="1C2833"/>
-                </a:solidFill>
-                <a:latin typeface="Arial" pitchFamily="34" charset="0"/>
-                <a:ea typeface="Arial" pitchFamily="34" charset="-122"/>
-                <a:cs typeface="Arial" pitchFamily="34" charset="-120"/>
-              </a:rPr>
-              <a:t>"Tomorrow — both numbers near 100. Same trick, slightly bigger."</a:t>
+            <a:pPr algn="l" marL="342900" indent="-342900">
+              <a:lnSpc>
+                <a:spcPts val="1620"/>
+              </a:lnSpc>
+              <a:spcAft>
+                <a:spcPts val="300"/>
+              </a:spcAft>
+              <a:buSzPct val="100000"/>
+              <a:buChar char="•"/>
+            </a:pPr>
+            <a:r>
+              <a:rPr lang="en-US" sz="1200" b="1" dirty="0">
+                <a:solidFill>
+                  <a:srgbClr val="1C2833"/>
+                </a:solidFill>
+                <a:latin typeface="Arial" pitchFamily="34" charset="0"/>
+                <a:ea typeface="Arial" pitchFamily="34" charset="-122"/>
+                <a:cs typeface="Arial" pitchFamily="34" charset="-120"/>
+              </a:rPr>
+              <a:t>Set up the template on the board</a:t>
+            </a:r>
+            <a:pPr algn="l" indent="0" marL="0">
+              <a:lnSpc>
+                <a:spcPts val="1620"/>
+              </a:lnSpc>
+              <a:spcAft>
+                <a:spcPts val="300"/>
+              </a:spcAft>
+              <a:buNone/>
+            </a:pPr>
+            <a:r>
+              <a:rPr lang="en-US" sz="1200" dirty="0">
+                <a:solidFill>
+                  <a:srgbClr val="1C2833"/>
+                </a:solidFill>
+                <a:latin typeface="Arial" pitchFamily="34" charset="0"/>
+                <a:ea typeface="Arial" pitchFamily="34" charset="-122"/>
+                <a:cs typeface="Arial" pitchFamily="34" charset="-120"/>
+              </a:rPr>
+              <a:t> (use the vertical line):</a:t>
             </a:r>
             <a:endParaRPr lang="en-US" sz="1200" dirty="0"/>
           </a:p>
@@ -4197,6 +8320,227 @@
       <p:sp>
         <p:nvSpPr>
           <p:cNvPr id="5" name="Text 3"/>
+          <p:cNvSpPr/>
+          <p:nvPr/>
+        </p:nvSpPr>
+        <p:spPr>
+          <a:xfrm>
+            <a:off x="406301" y="1266974"/>
+            <a:ext cx="8331398" cy="952202"/>
+          </a:xfrm>
+          <a:prstGeom prst="rect">
+            <a:avLst/>
+          </a:prstGeom>
+          <a:solidFill>
+            <a:srgbClr val="F4F8F9"/>
+          </a:solidFill>
+          <a:ln/>
+        </p:spPr>
+        <p:txBody>
+          <a:bodyPr wrap="square" rtlCol="0" anchor="ctr"/>
+          <a:lstStyle/>
+          <a:p>
+            <a:pPr indent="0" marL="0">
+              <a:buNone/>
+            </a:pPr>
+            <a:endParaRPr lang="en-US" dirty="0"/>
+          </a:p>
+        </p:txBody>
+      </p:sp>
+      <p:sp>
+        <p:nvSpPr>
+          <p:cNvPr id="6" name="Shape 4"/>
+          <p:cNvSpPr/>
+          <p:nvPr/>
+        </p:nvSpPr>
+        <p:spPr>
+          <a:xfrm>
+            <a:off x="430113" y="1266974"/>
+            <a:ext cx="0" cy="952202"/>
+          </a:xfrm>
+          <a:prstGeom prst="line">
+            <a:avLst/>
+          </a:prstGeom>
+          <a:noFill/>
+          <a:ln w="47625">
+            <a:solidFill>
+              <a:srgbClr val="277884"/>
+            </a:solidFill>
+            <a:prstDash val="solid"/>
+          </a:ln>
+        </p:spPr>
+      </p:sp>
+      <p:sp>
+        <p:nvSpPr>
+          <p:cNvPr id="7" name="Text 5"/>
+          <p:cNvSpPr/>
+          <p:nvPr/>
+        </p:nvSpPr>
+        <p:spPr>
+          <a:xfrm>
+            <a:off x="631627" y="1393924"/>
+            <a:ext cx="8086939" cy="174575"/>
+          </a:xfrm>
+          <a:prstGeom prst="rect">
+            <a:avLst/>
+          </a:prstGeom>
+          <a:noFill/>
+          <a:ln/>
+        </p:spPr>
+        <p:txBody>
+          <a:bodyPr wrap="square" lIns="0" tIns="0" rIns="0" bIns="0" rtlCol="0" anchor="t"/>
+          <a:lstStyle/>
+          <a:p>
+            <a:pPr algn="l" indent="0" marL="0">
+              <a:lnSpc>
+                <a:spcPts val="1375"/>
+              </a:lnSpc>
+              <a:buNone/>
+            </a:pPr>
+            <a:r>
+              <a:rPr lang="en-US" sz="1100" dirty="0">
+                <a:solidFill>
+                  <a:srgbClr val="1C2833"/>
+                </a:solidFill>
+                <a:latin typeface="Courier New" pitchFamily="34" charset="0"/>
+                <a:ea typeface="Courier New" pitchFamily="34" charset="-122"/>
+                <a:cs typeface="Courier New" pitchFamily="34" charset="-120"/>
+              </a:rPr>
+              <a:t>7 │ −3       ← 7 is 3 below 10</a:t>
+            </a:r>
+            <a:endParaRPr lang="en-US" sz="1100" dirty="0"/>
+          </a:p>
+        </p:txBody>
+      </p:sp>
+      <p:sp>
+        <p:nvSpPr>
+          <p:cNvPr id="8" name="Text 6"/>
+          <p:cNvSpPr/>
+          <p:nvPr/>
+        </p:nvSpPr>
+        <p:spPr>
+          <a:xfrm>
+            <a:off x="631627" y="1568500"/>
+            <a:ext cx="8086939" cy="174575"/>
+          </a:xfrm>
+          <a:prstGeom prst="rect">
+            <a:avLst/>
+          </a:prstGeom>
+          <a:noFill/>
+          <a:ln/>
+        </p:spPr>
+        <p:txBody>
+          <a:bodyPr wrap="square" lIns="0" tIns="0" rIns="0" bIns="0" rtlCol="0" anchor="t"/>
+          <a:lstStyle/>
+          <a:p>
+            <a:pPr algn="l" indent="0" marL="0">
+              <a:lnSpc>
+                <a:spcPts val="1375"/>
+              </a:lnSpc>
+              <a:buNone/>
+            </a:pPr>
+            <a:r>
+              <a:rPr lang="en-US" sz="1100" dirty="0">
+                <a:solidFill>
+                  <a:srgbClr val="1C2833"/>
+                </a:solidFill>
+                <a:latin typeface="Courier New" pitchFamily="34" charset="0"/>
+                <a:ea typeface="Courier New" pitchFamily="34" charset="-122"/>
+                <a:cs typeface="Courier New" pitchFamily="34" charset="-120"/>
+              </a:rPr>
+              <a:t>× 8 │ −2       ← 8 is 2 below 10</a:t>
+            </a:r>
+            <a:endParaRPr lang="en-US" sz="1100" dirty="0"/>
+          </a:p>
+        </p:txBody>
+      </p:sp>
+      <p:sp>
+        <p:nvSpPr>
+          <p:cNvPr id="9" name="Text 7"/>
+          <p:cNvSpPr/>
+          <p:nvPr/>
+        </p:nvSpPr>
+        <p:spPr>
+          <a:xfrm>
+            <a:off x="631627" y="1743075"/>
+            <a:ext cx="8086939" cy="174575"/>
+          </a:xfrm>
+          <a:prstGeom prst="rect">
+            <a:avLst/>
+          </a:prstGeom>
+          <a:noFill/>
+          <a:ln/>
+        </p:spPr>
+        <p:txBody>
+          <a:bodyPr wrap="square" lIns="0" tIns="0" rIns="0" bIns="0" rtlCol="0" anchor="t"/>
+          <a:lstStyle/>
+          <a:p>
+            <a:pPr algn="l" indent="0" marL="0">
+              <a:lnSpc>
+                <a:spcPts val="1375"/>
+              </a:lnSpc>
+              <a:buNone/>
+            </a:pPr>
+            <a:r>
+              <a:rPr lang="en-US" sz="1100" dirty="0">
+                <a:solidFill>
+                  <a:srgbClr val="1C2833"/>
+                </a:solidFill>
+                <a:latin typeface="Courier New" pitchFamily="34" charset="0"/>
+                <a:ea typeface="Courier New" pitchFamily="34" charset="-122"/>
+                <a:cs typeface="Courier New" pitchFamily="34" charset="-120"/>
+              </a:rPr>
+              <a:t>────┼─────</a:t>
+            </a:r>
+            <a:endParaRPr lang="en-US" sz="1100" dirty="0"/>
+          </a:p>
+        </p:txBody>
+      </p:sp>
+      <p:sp>
+        <p:nvSpPr>
+          <p:cNvPr id="10" name="Text 8"/>
+          <p:cNvSpPr/>
+          <p:nvPr/>
+        </p:nvSpPr>
+        <p:spPr>
+          <a:xfrm>
+            <a:off x="631627" y="1917650"/>
+            <a:ext cx="8086939" cy="174575"/>
+          </a:xfrm>
+          <a:prstGeom prst="rect">
+            <a:avLst/>
+          </a:prstGeom>
+          <a:noFill/>
+          <a:ln/>
+        </p:spPr>
+        <p:txBody>
+          <a:bodyPr wrap="square" lIns="0" tIns="0" rIns="0" bIns="0" rtlCol="0" anchor="t"/>
+          <a:lstStyle/>
+          <a:p>
+            <a:pPr algn="l" indent="0" marL="0">
+              <a:lnSpc>
+                <a:spcPts val="1375"/>
+              </a:lnSpc>
+              <a:buNone/>
+            </a:pPr>
+            <a:r>
+              <a:rPr lang="en-US" sz="1100" dirty="0">
+                <a:solidFill>
+                  <a:srgbClr val="1C2833"/>
+                </a:solidFill>
+                <a:latin typeface="Courier New" pitchFamily="34" charset="0"/>
+                <a:ea typeface="Courier New" pitchFamily="34" charset="-122"/>
+                <a:cs typeface="Courier New" pitchFamily="34" charset="-120"/>
+              </a:rPr>
+              <a:t>? │ ?</a:t>
+            </a:r>
+            <a:endParaRPr lang="en-US" sz="1100" dirty="0"/>
+          </a:p>
+        </p:txBody>
+      </p:sp>
+      <p:sp>
+        <p:nvSpPr>
+          <p:cNvPr id="11" name="Text 9"/>
           <p:cNvSpPr/>
           <p:nvPr/>
         </p:nvSpPr>
@@ -4346,7 +8690,7 @@
                 <a:ea typeface="Georgia" pitchFamily="34" charset="-122"/>
                 <a:cs typeface="Georgia" pitchFamily="34" charset="-120"/>
               </a:rPr>
-              <a:t>Student-facing content</a:t>
+              <a:t>Core (15 min) — Nikhilam at the single-digit level (cont.)</a:t>
             </a:r>
             <a:endParaRPr lang="en-US" sz="1800" dirty="0"/>
           </a:p>
@@ -4360,61 +8704,8 @@
         </p:nvSpPr>
         <p:spPr>
           <a:xfrm>
-            <a:off x="406301" y="883593"/>
-            <a:ext cx="8331398" cy="1900238"/>
-          </a:xfrm>
-          <a:prstGeom prst="rect">
-            <a:avLst/>
-          </a:prstGeom>
-          <a:solidFill>
-            <a:srgbClr val="F4F8F9"/>
-          </a:solidFill>
-          <a:ln/>
-        </p:spPr>
-        <p:txBody>
-          <a:bodyPr wrap="square" rtlCol="0" anchor="ctr"/>
-          <a:lstStyle/>
-          <a:p>
-            <a:pPr indent="0" marL="0">
-              <a:buNone/>
-            </a:pPr>
-            <a:endParaRPr lang="en-US" dirty="0"/>
-          </a:p>
-        </p:txBody>
-      </p:sp>
-      <p:sp>
-        <p:nvSpPr>
-          <p:cNvPr id="5" name="Shape 3"/>
-          <p:cNvSpPr/>
-          <p:nvPr/>
-        </p:nvSpPr>
-        <p:spPr>
-          <a:xfrm>
-            <a:off x="434876" y="883593"/>
-            <a:ext cx="0" cy="1900238"/>
-          </a:xfrm>
-          <a:prstGeom prst="line">
-            <a:avLst/>
-          </a:prstGeom>
-          <a:noFill/>
-          <a:ln w="57150">
-            <a:solidFill>
-              <a:srgbClr val="FE4447"/>
-            </a:solidFill>
-            <a:prstDash val="solid"/>
-          </a:ln>
-        </p:spPr>
-      </p:sp>
-      <p:sp>
-        <p:nvSpPr>
-          <p:cNvPr id="6" name="Text 4"/>
-          <p:cNvSpPr/>
-          <p:nvPr/>
-        </p:nvSpPr>
-        <p:spPr>
-          <a:xfrm>
-            <a:off x="692051" y="1074093"/>
-            <a:ext cx="7973389" cy="230981"/>
+            <a:off x="634901" y="883593"/>
+            <a:ext cx="8102798" cy="281880"/>
           </a:xfrm>
           <a:prstGeom prst="rect">
             <a:avLst/>
@@ -4426,43 +8717,41 @@
           <a:bodyPr wrap="square" lIns="0" tIns="0" rIns="0" bIns="0" rtlCol="0" anchor="t"/>
           <a:lstStyle/>
           <a:p>
-            <a:pPr algn="l" indent="0" marL="0">
-              <a:lnSpc>
-                <a:spcPts val="1820"/>
-              </a:lnSpc>
-              <a:spcBef>
-                <a:spcPts val="300"/>
-              </a:spcBef>
-              <a:spcAft>
-                <a:spcPts val="300"/>
-              </a:spcAft>
-              <a:buNone/>
-            </a:pPr>
-            <a:r>
-              <a:rPr lang="en-US" sz="1300" b="1" i="1" dirty="0">
-                <a:solidFill>
-                  <a:srgbClr val="1C2833"/>
-                </a:solidFill>
-                <a:latin typeface="Georgia" pitchFamily="34" charset="0"/>
-                <a:ea typeface="Georgia" pitchFamily="34" charset="-122"/>
-                <a:cs typeface="Georgia" pitchFamily="34" charset="-120"/>
-              </a:rPr>
-              <a:t>Single-digit Nikhilam (base = 10)</a:t>
-            </a:r>
-            <a:endParaRPr lang="en-US" sz="1300" dirty="0"/>
-          </a:p>
-        </p:txBody>
-      </p:sp>
-      <p:sp>
-        <p:nvSpPr>
-          <p:cNvPr id="7" name="Text 5"/>
-          <p:cNvSpPr/>
-          <p:nvPr/>
-        </p:nvSpPr>
-        <p:spPr>
-          <a:xfrm>
-            <a:off x="692051" y="1343174"/>
-            <a:ext cx="7973389" cy="461963"/>
+            <a:pPr algn="l" marL="342900" indent="-342900">
+              <a:lnSpc>
+                <a:spcPts val="1620"/>
+              </a:lnSpc>
+              <a:spcAft>
+                <a:spcPts val="300"/>
+              </a:spcAft>
+              <a:buSzPct val="100000"/>
+              <a:buChar char="•"/>
+            </a:pPr>
+            <a:r>
+              <a:rPr lang="en-US" sz="1200" b="1" dirty="0">
+                <a:solidFill>
+                  <a:srgbClr val="1C2833"/>
+                </a:solidFill>
+                <a:latin typeface="Arial" pitchFamily="34" charset="0"/>
+                <a:ea typeface="Arial" pitchFamily="34" charset="-122"/>
+                <a:cs typeface="Arial" pitchFamily="34" charset="-120"/>
+              </a:rPr>
+              <a:t>The two operations:</a:t>
+            </a:r>
+            <a:endParaRPr lang="en-US" sz="1200" dirty="0"/>
+          </a:p>
+        </p:txBody>
+      </p:sp>
+      <p:sp>
+        <p:nvSpPr>
+          <p:cNvPr id="5" name="Text 3"/>
+          <p:cNvSpPr/>
+          <p:nvPr/>
+        </p:nvSpPr>
+        <p:spPr>
+          <a:xfrm>
+            <a:off x="634901" y="1266974"/>
+            <a:ext cx="8102798" cy="807541"/>
           </a:xfrm>
           <a:prstGeom prst="rect">
             <a:avLst/>
@@ -4474,135 +8763,249 @@
           <a:bodyPr wrap="square" lIns="0" tIns="0" rIns="0" bIns="0" rtlCol="0" anchor="t"/>
           <a:lstStyle/>
           <a:p>
-            <a:pPr algn="l" indent="0" marL="0">
-              <a:lnSpc>
-                <a:spcPts val="1820"/>
-              </a:lnSpc>
-              <a:spcBef>
-                <a:spcPts val="300"/>
-              </a:spcBef>
-              <a:spcAft>
-                <a:spcPts val="300"/>
-              </a:spcAft>
-              <a:buNone/>
-            </a:pPr>
-            <a:r>
-              <a:rPr lang="en-US" sz="1300" dirty="0">
-                <a:solidFill>
-                  <a:srgbClr val="1C2833"/>
-                </a:solidFill>
-                <a:latin typeface="Georgia" pitchFamily="34" charset="0"/>
-                <a:ea typeface="Georgia" pitchFamily="34" charset="-122"/>
-                <a:cs typeface="Georgia" pitchFamily="34" charset="-120"/>
-              </a:rPr>
-              <a:t>1. Find each digit's </a:t>
-            </a:r>
-            <a:pPr algn="l" indent="0" marL="0">
-              <a:lnSpc>
-                <a:spcPts val="1820"/>
-              </a:lnSpc>
-              <a:spcBef>
-                <a:spcPts val="300"/>
-              </a:spcBef>
-              <a:spcAft>
-                <a:spcPts val="300"/>
-              </a:spcAft>
-              <a:buNone/>
-            </a:pPr>
-            <a:r>
-              <a:rPr lang="en-US" sz="1300" b="1" i="1" dirty="0">
-                <a:solidFill>
-                  <a:srgbClr val="1C2833"/>
-                </a:solidFill>
-                <a:latin typeface="Georgia" pitchFamily="34" charset="0"/>
-                <a:ea typeface="Georgia" pitchFamily="34" charset="-122"/>
-                <a:cs typeface="Georgia" pitchFamily="34" charset="-120"/>
-              </a:rPr>
-              <a:t>deficit from 10</a:t>
-            </a:r>
-            <a:pPr algn="l" indent="0" marL="0">
-              <a:lnSpc>
-                <a:spcPts val="1820"/>
-              </a:lnSpc>
-              <a:spcBef>
-                <a:spcPts val="300"/>
-              </a:spcBef>
-              <a:spcAft>
-                <a:spcPts val="300"/>
-              </a:spcAft>
-              <a:buNone/>
-            </a:pPr>
-            <a:r>
-              <a:rPr lang="en-US" sz="1300" dirty="0">
-                <a:solidFill>
-                  <a:srgbClr val="1C2833"/>
-                </a:solidFill>
-                <a:latin typeface="Georgia" pitchFamily="34" charset="0"/>
-                <a:ea typeface="Georgia" pitchFamily="34" charset="-122"/>
-                <a:cs typeface="Georgia" pitchFamily="34" charset="-120"/>
-              </a:rPr>
-              <a:t>. 2. Cross-subtract for the LEFT part. 3. Multiply the deficits for the RIGHT part. 4. Stick them together. If the RIGHT part is 2 digits, </a:t>
-            </a:r>
-            <a:pPr algn="l" indent="0" marL="0">
-              <a:lnSpc>
-                <a:spcPts val="1820"/>
-              </a:lnSpc>
-              <a:spcBef>
-                <a:spcPts val="300"/>
-              </a:spcBef>
-              <a:spcAft>
-                <a:spcPts val="300"/>
-              </a:spcAft>
-              <a:buNone/>
-            </a:pPr>
-            <a:r>
-              <a:rPr lang="en-US" sz="1300" b="1" i="1" dirty="0">
-                <a:solidFill>
-                  <a:srgbClr val="1C2833"/>
-                </a:solidFill>
-                <a:latin typeface="Georgia" pitchFamily="34" charset="0"/>
-                <a:ea typeface="Georgia" pitchFamily="34" charset="-122"/>
-                <a:cs typeface="Georgia" pitchFamily="34" charset="-120"/>
-              </a:rPr>
-              <a:t>carry</a:t>
-            </a:r>
-            <a:pPr algn="l" indent="0" marL="0">
-              <a:lnSpc>
-                <a:spcPts val="1820"/>
-              </a:lnSpc>
-              <a:spcBef>
-                <a:spcPts val="300"/>
-              </a:spcBef>
-              <a:spcAft>
-                <a:spcPts val="300"/>
-              </a:spcAft>
-              <a:buNone/>
-            </a:pPr>
-            <a:r>
-              <a:rPr lang="en-US" sz="1300" dirty="0">
-                <a:solidFill>
-                  <a:srgbClr val="1C2833"/>
-                </a:solidFill>
-                <a:latin typeface="Georgia" pitchFamily="34" charset="0"/>
-                <a:ea typeface="Georgia" pitchFamily="34" charset="-122"/>
-                <a:cs typeface="Georgia" pitchFamily="34" charset="-120"/>
-              </a:rPr>
-              <a:t> the overflow.</a:t>
-            </a:r>
-            <a:endParaRPr lang="en-US" sz="1300" dirty="0"/>
-          </a:p>
-        </p:txBody>
-      </p:sp>
-      <p:sp>
-        <p:nvSpPr>
-          <p:cNvPr id="8" name="Text 6"/>
-          <p:cNvSpPr/>
-          <p:nvPr/>
-        </p:nvSpPr>
-        <p:spPr>
-          <a:xfrm>
-            <a:off x="692051" y="1843236"/>
-            <a:ext cx="7973389" cy="481012"/>
+            <a:pPr algn="l" marL="342900" indent="-342900">
+              <a:lnSpc>
+                <a:spcPts val="1620"/>
+              </a:lnSpc>
+              <a:spcAft>
+                <a:spcPts val="300"/>
+              </a:spcAft>
+              <a:buSzPct val="100000"/>
+              <a:buChar char="•"/>
+            </a:pPr>
+            <a:r>
+              <a:rPr lang="en-US" sz="1200" dirty="0">
+                <a:solidFill>
+                  <a:srgbClr val="1C2833"/>
+                </a:solidFill>
+                <a:latin typeface="Arial" pitchFamily="34" charset="0"/>
+                <a:ea typeface="Arial" pitchFamily="34" charset="-122"/>
+                <a:cs typeface="Arial" pitchFamily="34" charset="-120"/>
+              </a:rPr>
+              <a:t>LEFT part: cross-subtract. </a:t>
+            </a:r>
+            <a:pPr algn="l" indent="0" marL="0">
+              <a:lnSpc>
+                <a:spcPts val="1620"/>
+              </a:lnSpc>
+              <a:spcAft>
+                <a:spcPts val="300"/>
+              </a:spcAft>
+              <a:buNone/>
+            </a:pPr>
+            <a:r>
+              <a:rPr lang="en-US" sz="1200" dirty="0">
+                <a:solidFill>
+                  <a:srgbClr val="1C2833"/>
+                </a:solidFill>
+                <a:latin typeface="Arial" pitchFamily="34" charset="0"/>
+                <a:ea typeface="Arial" pitchFamily="34" charset="-122"/>
+                <a:cs typeface="Arial" pitchFamily="34" charset="-120"/>
+              </a:rPr>
+              <a:t>7 − 2 = 5</a:t>
+            </a:r>
+            <a:pPr algn="l" indent="0" marL="0">
+              <a:lnSpc>
+                <a:spcPts val="1620"/>
+              </a:lnSpc>
+              <a:spcAft>
+                <a:spcPts val="300"/>
+              </a:spcAft>
+              <a:buNone/>
+            </a:pPr>
+            <a:r>
+              <a:rPr lang="en-US" sz="1200" dirty="0">
+                <a:solidFill>
+                  <a:srgbClr val="1C2833"/>
+                </a:solidFill>
+                <a:latin typeface="Arial" pitchFamily="34" charset="0"/>
+                <a:ea typeface="Arial" pitchFamily="34" charset="-122"/>
+                <a:cs typeface="Arial" pitchFamily="34" charset="-120"/>
+              </a:rPr>
+              <a:t>. (Or </a:t>
+            </a:r>
+            <a:pPr algn="l" indent="0" marL="0">
+              <a:lnSpc>
+                <a:spcPts val="1620"/>
+              </a:lnSpc>
+              <a:spcAft>
+                <a:spcPts val="300"/>
+              </a:spcAft>
+              <a:buNone/>
+            </a:pPr>
+            <a:r>
+              <a:rPr lang="en-US" sz="1200" dirty="0">
+                <a:solidFill>
+                  <a:srgbClr val="1C2833"/>
+                </a:solidFill>
+                <a:latin typeface="Arial" pitchFamily="34" charset="0"/>
+                <a:ea typeface="Arial" pitchFamily="34" charset="-122"/>
+                <a:cs typeface="Arial" pitchFamily="34" charset="-120"/>
+              </a:rPr>
+              <a:t>8 − 3 = 5</a:t>
+            </a:r>
+            <a:pPr algn="l" indent="0" marL="0">
+              <a:lnSpc>
+                <a:spcPts val="1620"/>
+              </a:lnSpc>
+              <a:spcAft>
+                <a:spcPts val="300"/>
+              </a:spcAft>
+              <a:buNone/>
+            </a:pPr>
+            <a:r>
+              <a:rPr lang="en-US" sz="1200" dirty="0">
+                <a:solidFill>
+                  <a:srgbClr val="1C2833"/>
+                </a:solidFill>
+                <a:latin typeface="Arial" pitchFamily="34" charset="0"/>
+                <a:ea typeface="Arial" pitchFamily="34" charset="-122"/>
+                <a:cs typeface="Arial" pitchFamily="34" charset="-120"/>
+              </a:rPr>
+              <a:t>. Either cross gives the same number — that's a built-in check.)</a:t>
+            </a:r>
+            <a:endParaRPr lang="en-US" sz="1200" dirty="0"/>
+          </a:p>
+          <a:p>
+            <a:pPr algn="l" marL="342900" indent="-342900">
+              <a:lnSpc>
+                <a:spcPts val="1620"/>
+              </a:lnSpc>
+              <a:spcAft>
+                <a:spcPts val="300"/>
+              </a:spcAft>
+              <a:buSzPct val="100000"/>
+              <a:buChar char="•"/>
+            </a:pPr>
+            <a:r>
+              <a:rPr lang="en-US" sz="1200" dirty="0">
+                <a:solidFill>
+                  <a:srgbClr val="1C2833"/>
+                </a:solidFill>
+                <a:latin typeface="Arial" pitchFamily="34" charset="0"/>
+                <a:ea typeface="Arial" pitchFamily="34" charset="-122"/>
+                <a:cs typeface="Arial" pitchFamily="34" charset="-120"/>
+              </a:rPr>
+              <a:t>RIGHT part: multiply the deficits. </a:t>
+            </a:r>
+            <a:pPr algn="l" indent="0" marL="0">
+              <a:lnSpc>
+                <a:spcPts val="1620"/>
+              </a:lnSpc>
+              <a:spcAft>
+                <a:spcPts val="300"/>
+              </a:spcAft>
+              <a:buNone/>
+            </a:pPr>
+            <a:r>
+              <a:rPr lang="en-US" sz="1200" dirty="0">
+                <a:solidFill>
+                  <a:srgbClr val="1C2833"/>
+                </a:solidFill>
+                <a:latin typeface="Arial" pitchFamily="34" charset="0"/>
+                <a:ea typeface="Arial" pitchFamily="34" charset="-122"/>
+                <a:cs typeface="Arial" pitchFamily="34" charset="-120"/>
+              </a:rPr>
+              <a:t>3 × 2 = 6</a:t>
+            </a:r>
+            <a:pPr algn="l" indent="0" marL="0">
+              <a:lnSpc>
+                <a:spcPts val="1620"/>
+              </a:lnSpc>
+              <a:spcAft>
+                <a:spcPts val="300"/>
+              </a:spcAft>
+              <a:buNone/>
+            </a:pPr>
+            <a:r>
+              <a:rPr lang="en-US" sz="1200" dirty="0">
+                <a:solidFill>
+                  <a:srgbClr val="1C2833"/>
+                </a:solidFill>
+                <a:latin typeface="Arial" pitchFamily="34" charset="0"/>
+                <a:ea typeface="Arial" pitchFamily="34" charset="-122"/>
+                <a:cs typeface="Arial" pitchFamily="34" charset="-120"/>
+              </a:rPr>
+              <a:t>.</a:t>
+            </a:r>
+            <a:endParaRPr lang="en-US" sz="1200" dirty="0"/>
+          </a:p>
+          <a:p>
+            <a:pPr algn="l" marL="342900" indent="-342900">
+              <a:lnSpc>
+                <a:spcPts val="1620"/>
+              </a:lnSpc>
+              <a:spcAft>
+                <a:spcPts val="300"/>
+              </a:spcAft>
+              <a:buSzPct val="100000"/>
+              <a:buChar char="•"/>
+            </a:pPr>
+            <a:r>
+              <a:rPr lang="en-US" sz="1200" dirty="0">
+                <a:solidFill>
+                  <a:srgbClr val="1C2833"/>
+                </a:solidFill>
+                <a:latin typeface="Arial" pitchFamily="34" charset="0"/>
+                <a:ea typeface="Arial" pitchFamily="34" charset="-122"/>
+                <a:cs typeface="Arial" pitchFamily="34" charset="-120"/>
+              </a:rPr>
+              <a:t>Concatenate: </a:t>
+            </a:r>
+            <a:pPr algn="l" indent="0" marL="0">
+              <a:lnSpc>
+                <a:spcPts val="1620"/>
+              </a:lnSpc>
+              <a:spcAft>
+                <a:spcPts val="300"/>
+              </a:spcAft>
+              <a:buNone/>
+            </a:pPr>
+            <a:r>
+              <a:rPr lang="en-US" sz="1200" b="1" dirty="0">
+                <a:solidFill>
+                  <a:srgbClr val="1C2833"/>
+                </a:solidFill>
+                <a:latin typeface="Arial" pitchFamily="34" charset="0"/>
+                <a:ea typeface="Arial" pitchFamily="34" charset="-122"/>
+                <a:cs typeface="Arial" pitchFamily="34" charset="-120"/>
+              </a:rPr>
+              <a:t>56</a:t>
+            </a:r>
+            <a:pPr algn="l" indent="0" marL="0">
+              <a:lnSpc>
+                <a:spcPts val="1620"/>
+              </a:lnSpc>
+              <a:spcAft>
+                <a:spcPts val="300"/>
+              </a:spcAft>
+              <a:buNone/>
+            </a:pPr>
+            <a:r>
+              <a:rPr lang="en-US" sz="1200" dirty="0">
+                <a:solidFill>
+                  <a:srgbClr val="1C2833"/>
+                </a:solidFill>
+                <a:latin typeface="Arial" pitchFamily="34" charset="0"/>
+                <a:ea typeface="Arial" pitchFamily="34" charset="-122"/>
+                <a:cs typeface="Arial" pitchFamily="34" charset="-120"/>
+              </a:rPr>
+              <a:t>.</a:t>
+            </a:r>
+            <a:endParaRPr lang="en-US" sz="1200" dirty="0"/>
+          </a:p>
+        </p:txBody>
+      </p:sp>
+      <p:sp>
+        <p:nvSpPr>
+          <p:cNvPr id="6" name="Text 4"/>
+          <p:cNvSpPr/>
+          <p:nvPr/>
+        </p:nvSpPr>
+        <p:spPr>
+          <a:xfrm>
+            <a:off x="634901" y="2176016"/>
+            <a:ext cx="8102798" cy="300930"/>
           </a:xfrm>
           <a:prstGeom prst="rect">
             <a:avLst/>
@@ -4614,429 +9017,94 @@
           <a:bodyPr wrap="square" lIns="0" tIns="0" rIns="0" bIns="0" rtlCol="0" anchor="t"/>
           <a:lstStyle/>
           <a:p>
-            <a:pPr algn="l" indent="0" marL="0">
-              <a:lnSpc>
-                <a:spcPts val="1820"/>
-              </a:lnSpc>
-              <a:spcBef>
-                <a:spcPts val="300"/>
-              </a:spcBef>
-              <a:spcAft>
-                <a:spcPts val="300"/>
-              </a:spcAft>
-              <a:buNone/>
-            </a:pPr>
-            <a:r>
-              <a:rPr lang="en-US" sz="1300" b="1" i="1" dirty="0">
-                <a:solidFill>
-                  <a:srgbClr val="1C2833"/>
-                </a:solidFill>
-                <a:latin typeface="Georgia" pitchFamily="34" charset="0"/>
-                <a:ea typeface="Georgia" pitchFamily="34" charset="-122"/>
-                <a:cs typeface="Georgia" pitchFamily="34" charset="-120"/>
-              </a:rPr>
-              <a:t>Examples:</a:t>
-            </a:r>
-            <a:pPr algn="l" indent="0" marL="0">
-              <a:lnSpc>
-                <a:spcPts val="1820"/>
-              </a:lnSpc>
-              <a:spcBef>
-                <a:spcPts val="300"/>
-              </a:spcBef>
-              <a:spcAft>
-                <a:spcPts val="300"/>
-              </a:spcAft>
-              <a:buNone/>
-            </a:pPr>
-            <a:r>
-              <a:rPr lang="en-US" sz="1300" dirty="0">
-                <a:solidFill>
-                  <a:srgbClr val="1C2833"/>
-                </a:solidFill>
-                <a:latin typeface="Georgia" pitchFamily="34" charset="0"/>
-                <a:ea typeface="Georgia" pitchFamily="34" charset="-122"/>
-                <a:cs typeface="Georgia" pitchFamily="34" charset="-120"/>
-              </a:rPr>
-              <a:t> - </a:t>
-            </a:r>
-            <a:pPr algn="l" indent="0" marL="0">
-              <a:lnSpc>
-                <a:spcPts val="1820"/>
-              </a:lnSpc>
-              <a:spcBef>
-                <a:spcPts val="300"/>
-              </a:spcBef>
-              <a:spcAft>
-                <a:spcPts val="300"/>
-              </a:spcAft>
-              <a:buNone/>
-            </a:pPr>
-            <a:r>
-              <a:rPr lang="en-US" sz="1300" i="1" dirty="0">
-                <a:solidFill>
-                  <a:srgbClr val="1C2833"/>
-                </a:solidFill>
-                <a:latin typeface="Georgia" pitchFamily="34" charset="0"/>
-                <a:ea typeface="Georgia" pitchFamily="34" charset="-122"/>
-                <a:cs typeface="Georgia" pitchFamily="34" charset="-120"/>
-              </a:rPr>
-              <a:t>7 × 8</a:t>
-            </a:r>
-            <a:pPr algn="l" indent="0" marL="0">
-              <a:lnSpc>
-                <a:spcPts val="1820"/>
-              </a:lnSpc>
-              <a:spcBef>
-                <a:spcPts val="300"/>
-              </a:spcBef>
-              <a:spcAft>
-                <a:spcPts val="300"/>
-              </a:spcAft>
-              <a:buNone/>
-            </a:pPr>
-            <a:r>
-              <a:rPr lang="en-US" sz="1300" dirty="0">
-                <a:solidFill>
-                  <a:srgbClr val="1C2833"/>
-                </a:solidFill>
-                <a:latin typeface="Georgia" pitchFamily="34" charset="0"/>
-                <a:ea typeface="Georgia" pitchFamily="34" charset="-122"/>
-                <a:cs typeface="Georgia" pitchFamily="34" charset="-120"/>
-              </a:rPr>
-              <a:t>: 7−2=5; 3×2=6 → </a:t>
-            </a:r>
-            <a:pPr algn="l" indent="0" marL="0">
-              <a:lnSpc>
-                <a:spcPts val="1820"/>
-              </a:lnSpc>
-              <a:spcBef>
-                <a:spcPts val="300"/>
-              </a:spcBef>
-              <a:spcAft>
-                <a:spcPts val="300"/>
-              </a:spcAft>
-              <a:buNone/>
-            </a:pPr>
-            <a:r>
-              <a:rPr lang="en-US" sz="1300" b="1" i="1" dirty="0">
-                <a:solidFill>
-                  <a:srgbClr val="1C2833"/>
-                </a:solidFill>
-                <a:latin typeface="Georgia" pitchFamily="34" charset="0"/>
-                <a:ea typeface="Georgia" pitchFamily="34" charset="-122"/>
-                <a:cs typeface="Georgia" pitchFamily="34" charset="-120"/>
-              </a:rPr>
-              <a:t>56</a:t>
-            </a:r>
-            <a:pPr algn="l" indent="0" marL="0">
-              <a:lnSpc>
-                <a:spcPts val="1820"/>
-              </a:lnSpc>
-              <a:spcBef>
-                <a:spcPts val="300"/>
-              </a:spcBef>
-              <a:spcAft>
-                <a:spcPts val="300"/>
-              </a:spcAft>
-              <a:buNone/>
-            </a:pPr>
-            <a:r>
-              <a:rPr lang="en-US" sz="1300" dirty="0">
-                <a:solidFill>
-                  <a:srgbClr val="1C2833"/>
-                </a:solidFill>
-                <a:latin typeface="Georgia" pitchFamily="34" charset="0"/>
-                <a:ea typeface="Georgia" pitchFamily="34" charset="-122"/>
-                <a:cs typeface="Georgia" pitchFamily="34" charset="-120"/>
-              </a:rPr>
-              <a:t>. - </a:t>
-            </a:r>
-            <a:pPr algn="l" indent="0" marL="0">
-              <a:lnSpc>
-                <a:spcPts val="1820"/>
-              </a:lnSpc>
-              <a:spcBef>
-                <a:spcPts val="300"/>
-              </a:spcBef>
-              <a:spcAft>
-                <a:spcPts val="300"/>
-              </a:spcAft>
-              <a:buNone/>
-            </a:pPr>
-            <a:r>
-              <a:rPr lang="en-US" sz="1300" i="1" dirty="0">
-                <a:solidFill>
-                  <a:srgbClr val="1C2833"/>
-                </a:solidFill>
-                <a:latin typeface="Georgia" pitchFamily="34" charset="0"/>
-                <a:ea typeface="Georgia" pitchFamily="34" charset="-122"/>
-                <a:cs typeface="Georgia" pitchFamily="34" charset="-120"/>
-              </a:rPr>
-              <a:t>9 × 8</a:t>
-            </a:r>
-            <a:pPr algn="l" indent="0" marL="0">
-              <a:lnSpc>
-                <a:spcPts val="1820"/>
-              </a:lnSpc>
-              <a:spcBef>
-                <a:spcPts val="300"/>
-              </a:spcBef>
-              <a:spcAft>
-                <a:spcPts val="300"/>
-              </a:spcAft>
-              <a:buNone/>
-            </a:pPr>
-            <a:r>
-              <a:rPr lang="en-US" sz="1300" dirty="0">
-                <a:solidFill>
-                  <a:srgbClr val="1C2833"/>
-                </a:solidFill>
-                <a:latin typeface="Georgia" pitchFamily="34" charset="0"/>
-                <a:ea typeface="Georgia" pitchFamily="34" charset="-122"/>
-                <a:cs typeface="Georgia" pitchFamily="34" charset="-120"/>
-              </a:rPr>
-              <a:t>: 9−2=7; 1×2=2 → </a:t>
-            </a:r>
-            <a:pPr algn="l" indent="0" marL="0">
-              <a:lnSpc>
-                <a:spcPts val="1820"/>
-              </a:lnSpc>
-              <a:spcBef>
-                <a:spcPts val="300"/>
-              </a:spcBef>
-              <a:spcAft>
-                <a:spcPts val="300"/>
-              </a:spcAft>
-              <a:buNone/>
-            </a:pPr>
-            <a:r>
-              <a:rPr lang="en-US" sz="1300" b="1" i="1" dirty="0">
-                <a:solidFill>
-                  <a:srgbClr val="1C2833"/>
-                </a:solidFill>
-                <a:latin typeface="Georgia" pitchFamily="34" charset="0"/>
-                <a:ea typeface="Georgia" pitchFamily="34" charset="-122"/>
-                <a:cs typeface="Georgia" pitchFamily="34" charset="-120"/>
-              </a:rPr>
-              <a:t>72</a:t>
-            </a:r>
-            <a:pPr algn="l" indent="0" marL="0">
-              <a:lnSpc>
-                <a:spcPts val="1820"/>
-              </a:lnSpc>
-              <a:spcBef>
-                <a:spcPts val="300"/>
-              </a:spcBef>
-              <a:spcAft>
-                <a:spcPts val="300"/>
-              </a:spcAft>
-              <a:buNone/>
-            </a:pPr>
-            <a:r>
-              <a:rPr lang="en-US" sz="1300" dirty="0">
-                <a:solidFill>
-                  <a:srgbClr val="1C2833"/>
-                </a:solidFill>
-                <a:latin typeface="Georgia" pitchFamily="34" charset="0"/>
-                <a:ea typeface="Georgia" pitchFamily="34" charset="-122"/>
-                <a:cs typeface="Georgia" pitchFamily="34" charset="-120"/>
-              </a:rPr>
-              <a:t>. - </a:t>
-            </a:r>
-            <a:pPr algn="l" indent="0" marL="0">
-              <a:lnSpc>
-                <a:spcPts val="1820"/>
-              </a:lnSpc>
-              <a:spcBef>
-                <a:spcPts val="300"/>
-              </a:spcBef>
-              <a:spcAft>
-                <a:spcPts val="300"/>
-              </a:spcAft>
-              <a:buNone/>
-            </a:pPr>
-            <a:r>
-              <a:rPr lang="en-US" sz="1300" i="1" dirty="0">
-                <a:solidFill>
-                  <a:srgbClr val="1C2833"/>
-                </a:solidFill>
-                <a:latin typeface="Georgia" pitchFamily="34" charset="0"/>
-                <a:ea typeface="Georgia" pitchFamily="34" charset="-122"/>
-                <a:cs typeface="Georgia" pitchFamily="34" charset="-120"/>
-              </a:rPr>
-              <a:t>6 × 7</a:t>
-            </a:r>
-            <a:pPr algn="l" indent="0" marL="0">
-              <a:lnSpc>
-                <a:spcPts val="1820"/>
-              </a:lnSpc>
-              <a:spcBef>
-                <a:spcPts val="300"/>
-              </a:spcBef>
-              <a:spcAft>
-                <a:spcPts val="300"/>
-              </a:spcAft>
-              <a:buNone/>
-            </a:pPr>
-            <a:r>
-              <a:rPr lang="en-US" sz="1300" dirty="0">
-                <a:solidFill>
-                  <a:srgbClr val="1C2833"/>
-                </a:solidFill>
-                <a:latin typeface="Georgia" pitchFamily="34" charset="0"/>
-                <a:ea typeface="Georgia" pitchFamily="34" charset="-122"/>
-                <a:cs typeface="Georgia" pitchFamily="34" charset="-120"/>
-              </a:rPr>
-              <a:t>: 6−3=3; 4×3=12 → carry 1 → 3+1=4; right=2 → </a:t>
-            </a:r>
-            <a:pPr algn="l" indent="0" marL="0">
-              <a:lnSpc>
-                <a:spcPts val="1820"/>
-              </a:lnSpc>
-              <a:spcBef>
-                <a:spcPts val="300"/>
-              </a:spcBef>
-              <a:spcAft>
-                <a:spcPts val="300"/>
-              </a:spcAft>
-              <a:buNone/>
-            </a:pPr>
-            <a:r>
-              <a:rPr lang="en-US" sz="1300" b="1" i="1" dirty="0">
-                <a:solidFill>
-                  <a:srgbClr val="1C2833"/>
-                </a:solidFill>
-                <a:latin typeface="Georgia" pitchFamily="34" charset="0"/>
-                <a:ea typeface="Georgia" pitchFamily="34" charset="-122"/>
-                <a:cs typeface="Georgia" pitchFamily="34" charset="-120"/>
-              </a:rPr>
-              <a:t>42</a:t>
-            </a:r>
-            <a:pPr algn="l" indent="0" marL="0">
-              <a:lnSpc>
-                <a:spcPts val="1820"/>
-              </a:lnSpc>
-              <a:spcBef>
-                <a:spcPts val="300"/>
-              </a:spcBef>
-              <a:spcAft>
-                <a:spcPts val="300"/>
-              </a:spcAft>
-              <a:buNone/>
-            </a:pPr>
-            <a:r>
-              <a:rPr lang="en-US" sz="1300" dirty="0">
-                <a:solidFill>
-                  <a:srgbClr val="1C2833"/>
-                </a:solidFill>
-                <a:latin typeface="Georgia" pitchFamily="34" charset="0"/>
-                <a:ea typeface="Georgia" pitchFamily="34" charset="-122"/>
-                <a:cs typeface="Georgia" pitchFamily="34" charset="-120"/>
-              </a:rPr>
-              <a:t>.</a:t>
-            </a:r>
-            <a:endParaRPr lang="en-US" sz="1300" dirty="0"/>
-          </a:p>
-        </p:txBody>
-      </p:sp>
-      <p:sp>
-        <p:nvSpPr>
-          <p:cNvPr id="9" name="Text 7"/>
-          <p:cNvSpPr/>
-          <p:nvPr/>
-        </p:nvSpPr>
-        <p:spPr>
-          <a:xfrm>
-            <a:off x="692051" y="2362349"/>
-            <a:ext cx="7973389" cy="230981"/>
-          </a:xfrm>
-          <a:prstGeom prst="rect">
-            <a:avLst/>
-          </a:prstGeom>
-          <a:noFill/>
-          <a:ln/>
-        </p:spPr>
-        <p:txBody>
-          <a:bodyPr wrap="square" lIns="0" tIns="0" rIns="0" bIns="0" rtlCol="0" anchor="t"/>
-          <a:lstStyle/>
-          <a:p>
-            <a:pPr algn="l" indent="0" marL="0">
-              <a:lnSpc>
-                <a:spcPts val="1820"/>
-              </a:lnSpc>
-              <a:spcBef>
-                <a:spcPts val="300"/>
-              </a:spcBef>
-              <a:spcAft>
-                <a:spcPts val="300"/>
-              </a:spcAft>
-              <a:buNone/>
-            </a:pPr>
-            <a:r>
-              <a:rPr lang="en-US" sz="1300" dirty="0">
-                <a:solidFill>
-                  <a:srgbClr val="1C2833"/>
-                </a:solidFill>
-                <a:latin typeface="Georgia" pitchFamily="34" charset="0"/>
-                <a:ea typeface="Georgia" pitchFamily="34" charset="-122"/>
-                <a:cs typeface="Georgia" pitchFamily="34" charset="-120"/>
-              </a:rPr>
-              <a:t>The Sanskrit sūtra: </a:t>
-            </a:r>
-            <a:pPr algn="l" indent="0" marL="0">
-              <a:lnSpc>
-                <a:spcPts val="1820"/>
-              </a:lnSpc>
-              <a:spcBef>
-                <a:spcPts val="300"/>
-              </a:spcBef>
-              <a:spcAft>
-                <a:spcPts val="300"/>
-              </a:spcAft>
-              <a:buNone/>
-            </a:pPr>
-            <a:r>
-              <a:rPr lang="en-US" sz="1300" b="1" i="1" dirty="0">
-                <a:solidFill>
-                  <a:srgbClr val="1C2833"/>
-                </a:solidFill>
-                <a:latin typeface="Georgia" pitchFamily="34" charset="0"/>
-                <a:ea typeface="Georgia" pitchFamily="34" charset="-122"/>
-                <a:cs typeface="Georgia" pitchFamily="34" charset="-120"/>
-              </a:rPr>
-              <a:t>Nikhilam Navataścaramaṁ Daśataḥ</a:t>
-            </a:r>
-            <a:pPr algn="l" indent="0" marL="0">
-              <a:lnSpc>
-                <a:spcPts val="1820"/>
-              </a:lnSpc>
-              <a:spcBef>
-                <a:spcPts val="300"/>
-              </a:spcBef>
-              <a:spcAft>
-                <a:spcPts val="300"/>
-              </a:spcAft>
-              <a:buNone/>
-            </a:pPr>
-            <a:r>
-              <a:rPr lang="en-US" sz="1300" dirty="0">
-                <a:solidFill>
-                  <a:srgbClr val="1C2833"/>
-                </a:solidFill>
-                <a:latin typeface="Georgia" pitchFamily="34" charset="0"/>
-                <a:ea typeface="Georgia" pitchFamily="34" charset="-122"/>
-                <a:cs typeface="Georgia" pitchFamily="34" charset="-120"/>
-              </a:rPr>
-              <a:t> — "all from 9 and the last from 10."</a:t>
-            </a:r>
-            <a:endParaRPr lang="en-US" sz="1300" dirty="0"/>
-          </a:p>
-        </p:txBody>
-      </p:sp>
-      <p:sp>
-        <p:nvSpPr>
-          <p:cNvPr id="10" name="Text 8"/>
+            <a:pPr algn="l" marL="342900" indent="-342900">
+              <a:lnSpc>
+                <a:spcPts val="1620"/>
+              </a:lnSpc>
+              <a:spcAft>
+                <a:spcPts val="300"/>
+              </a:spcAft>
+              <a:buSzPct val="100000"/>
+              <a:buChar char="•"/>
+            </a:pPr>
+            <a:r>
+              <a:rPr lang="en-US" sz="1200" b="1" dirty="0">
+                <a:solidFill>
+                  <a:srgbClr val="1C2833"/>
+                </a:solidFill>
+                <a:latin typeface="Arial" pitchFamily="34" charset="0"/>
+                <a:ea typeface="Arial" pitchFamily="34" charset="-122"/>
+                <a:cs typeface="Arial" pitchFamily="34" charset="-120"/>
+              </a:rPr>
+              <a:t>Verify.</a:t>
+            </a:r>
+            <a:pPr algn="l" indent="0" marL="0">
+              <a:lnSpc>
+                <a:spcPts val="1620"/>
+              </a:lnSpc>
+              <a:spcAft>
+                <a:spcPts val="300"/>
+              </a:spcAft>
+              <a:buNone/>
+            </a:pPr>
+            <a:r>
+              <a:rPr lang="en-US" sz="1200" dirty="0">
+                <a:solidFill>
+                  <a:srgbClr val="1C2833"/>
+                </a:solidFill>
+                <a:latin typeface="Arial" pitchFamily="34" charset="0"/>
+                <a:ea typeface="Arial" pitchFamily="34" charset="-122"/>
+                <a:cs typeface="Arial" pitchFamily="34" charset="-120"/>
+              </a:rPr>
+              <a:t> </a:t>
+            </a:r>
+            <a:pPr algn="l" indent="0" marL="0">
+              <a:lnSpc>
+                <a:spcPts val="1620"/>
+              </a:lnSpc>
+              <a:spcAft>
+                <a:spcPts val="300"/>
+              </a:spcAft>
+              <a:buNone/>
+            </a:pPr>
+            <a:r>
+              <a:rPr lang="en-US" sz="1200" dirty="0">
+                <a:solidFill>
+                  <a:srgbClr val="1C2833"/>
+                </a:solidFill>
+                <a:latin typeface="Arial" pitchFamily="34" charset="0"/>
+                <a:ea typeface="Arial" pitchFamily="34" charset="-122"/>
+                <a:cs typeface="Arial" pitchFamily="34" charset="-120"/>
+              </a:rPr>
+              <a:t>7 × 8 = 56</a:t>
+            </a:r>
+            <a:pPr algn="l" indent="0" marL="0">
+              <a:lnSpc>
+                <a:spcPts val="1620"/>
+              </a:lnSpc>
+              <a:spcAft>
+                <a:spcPts val="300"/>
+              </a:spcAft>
+              <a:buNone/>
+            </a:pPr>
+            <a:r>
+              <a:rPr lang="en-US" sz="1200" dirty="0">
+                <a:solidFill>
+                  <a:srgbClr val="1C2833"/>
+                </a:solidFill>
+                <a:latin typeface="Arial" pitchFamily="34" charset="0"/>
+                <a:ea typeface="Arial" pitchFamily="34" charset="-122"/>
+                <a:cs typeface="Arial" pitchFamily="34" charset="-120"/>
+              </a:rPr>
+              <a:t>. ✓</a:t>
+            </a:r>
+            <a:endParaRPr lang="en-US" sz="1200" dirty="0"/>
+          </a:p>
+        </p:txBody>
+      </p:sp>
+      <p:sp>
+        <p:nvSpPr>
+          <p:cNvPr id="7" name="Text 5"/>
           <p:cNvSpPr/>
           <p:nvPr/>
         </p:nvSpPr>
@@ -5186,7 +9254,7 @@
                 <a:ea typeface="Georgia" pitchFamily="34" charset="-122"/>
                 <a:cs typeface="Georgia" pitchFamily="34" charset="-120"/>
               </a:rPr>
-              <a:t>Homework</a:t>
+              <a:t>Core (15 min) — Nikhilam at the single-digit level (cont.)</a:t>
             </a:r>
             <a:endParaRPr lang="en-US" sz="1800" dirty="0"/>
           </a:p>
@@ -5200,8 +9268,8 @@
         </p:nvSpPr>
         <p:spPr>
           <a:xfrm>
-            <a:off x="406301" y="870942"/>
-            <a:ext cx="8498026" cy="639812"/>
+            <a:off x="634901" y="883593"/>
+            <a:ext cx="8102798" cy="281880"/>
           </a:xfrm>
           <a:prstGeom prst="rect">
             <a:avLst/>
@@ -5213,6 +9281,72 @@
           <a:bodyPr wrap="square" lIns="0" tIns="0" rIns="0" bIns="0" rtlCol="0" anchor="t"/>
           <a:lstStyle/>
           <a:p>
+            <a:pPr algn="l" marL="342900" indent="-342900">
+              <a:lnSpc>
+                <a:spcPts val="1620"/>
+              </a:lnSpc>
+              <a:spcAft>
+                <a:spcPts val="300"/>
+              </a:spcAft>
+              <a:buSzPct val="100000"/>
+              <a:buChar char="•"/>
+            </a:pPr>
+            <a:r>
+              <a:rPr lang="en-US" sz="1200" b="1" dirty="0">
+                <a:solidFill>
+                  <a:srgbClr val="1C2833"/>
+                </a:solidFill>
+                <a:latin typeface="Arial" pitchFamily="34" charset="0"/>
+                <a:ea typeface="Arial" pitchFamily="34" charset="-122"/>
+                <a:cs typeface="Arial" pitchFamily="34" charset="-120"/>
+              </a:rPr>
+              <a:t>Why does either cross give the same answer?</a:t>
+            </a:r>
+            <a:pPr algn="l" indent="0" marL="0">
+              <a:lnSpc>
+                <a:spcPts val="1620"/>
+              </a:lnSpc>
+              <a:spcAft>
+                <a:spcPts val="300"/>
+              </a:spcAft>
+              <a:buNone/>
+            </a:pPr>
+            <a:r>
+              <a:rPr lang="en-US" sz="1200" dirty="0">
+                <a:solidFill>
+                  <a:srgbClr val="1C2833"/>
+                </a:solidFill>
+                <a:latin typeface="Arial" pitchFamily="34" charset="0"/>
+                <a:ea typeface="Arial" pitchFamily="34" charset="-122"/>
+                <a:cs typeface="Arial" pitchFamily="34" charset="-120"/>
+              </a:rPr>
+              <a:t> Quick proof on board:</a:t>
+            </a:r>
+            <a:endParaRPr lang="en-US" sz="1200" dirty="0"/>
+          </a:p>
+        </p:txBody>
+      </p:sp>
+      <p:sp>
+        <p:nvSpPr>
+          <p:cNvPr id="5" name="Text 3"/>
+          <p:cNvSpPr/>
+          <p:nvPr/>
+        </p:nvSpPr>
+        <p:spPr>
+          <a:xfrm>
+            <a:off x="406301" y="1254323"/>
+            <a:ext cx="8498026" cy="436066"/>
+          </a:xfrm>
+          <a:prstGeom prst="rect">
+            <a:avLst/>
+          </a:prstGeom>
+          <a:noFill/>
+          <a:ln/>
+        </p:spPr>
+        <p:txBody>
+          <a:bodyPr wrap="square" lIns="0" tIns="0" rIns="0" bIns="0" rtlCol="0" anchor="t"/>
+          <a:lstStyle/>
+          <a:p>
             <a:pPr algn="l" indent="0" marL="0">
               <a:lnSpc>
                 <a:spcPts val="1680"/>
@@ -5234,7 +9368,76 @@
                 <a:ea typeface="Arial" pitchFamily="34" charset="-122"/>
                 <a:cs typeface="Arial" pitchFamily="34" charset="-120"/>
               </a:rPr>
-              <a:t>– Practice deficit-from-10 recall. Have a parent/sibling call out single digits 1–9; you answer the deficit. Beat 20 problems in 30 seconds. – Solve 10 problems on the back of today's worksheet (all single-digit × single-digit, both 6–9) using Nikhilam. Self-check against your times table.</a:t>
+              <a:t>7 − 2 = 7 − (10 − 8) = 7 + 8 − 10</a:t>
+            </a:r>
+            <a:pPr algn="l" indent="0" marL="0">
+              <a:lnSpc>
+                <a:spcPts val="1680"/>
+              </a:lnSpc>
+              <a:spcBef>
+                <a:spcPts val="300"/>
+              </a:spcBef>
+              <a:spcAft>
+                <a:spcPts val="300"/>
+              </a:spcAft>
+              <a:buNone/>
+            </a:pPr>
+            <a:r>
+              <a:rPr lang="en-US" sz="1200" dirty="0">
+                <a:solidFill>
+                  <a:srgbClr val="1C2833"/>
+                </a:solidFill>
+                <a:latin typeface="Arial" pitchFamily="34" charset="0"/>
+                <a:ea typeface="Arial" pitchFamily="34" charset="-122"/>
+                <a:cs typeface="Arial" pitchFamily="34" charset="-120"/>
+              </a:rPr>
+              <a:t> </a:t>
+            </a:r>
+            <a:pPr algn="l" indent="0" marL="0">
+              <a:lnSpc>
+                <a:spcPts val="1680"/>
+              </a:lnSpc>
+              <a:spcBef>
+                <a:spcPts val="300"/>
+              </a:spcBef>
+              <a:spcAft>
+                <a:spcPts val="300"/>
+              </a:spcAft>
+              <a:buNone/>
+            </a:pPr>
+            <a:r>
+              <a:rPr lang="en-US" sz="1200" dirty="0">
+                <a:solidFill>
+                  <a:srgbClr val="1C2833"/>
+                </a:solidFill>
+                <a:latin typeface="Arial" pitchFamily="34" charset="0"/>
+                <a:ea typeface="Arial" pitchFamily="34" charset="-122"/>
+                <a:cs typeface="Arial" pitchFamily="34" charset="-120"/>
+              </a:rPr>
+              <a:t>8 − 3 = 8 − (10 − 7) = 7 + 8 − 10</a:t>
+            </a:r>
+            <a:pPr algn="l" indent="0" marL="0">
+              <a:lnSpc>
+                <a:spcPts val="1680"/>
+              </a:lnSpc>
+              <a:spcBef>
+                <a:spcPts val="300"/>
+              </a:spcBef>
+              <a:spcAft>
+                <a:spcPts val="300"/>
+              </a:spcAft>
+              <a:buNone/>
+            </a:pPr>
+            <a:r>
+              <a:rPr lang="en-US" sz="1200" dirty="0">
+                <a:solidFill>
+                  <a:srgbClr val="1C2833"/>
+                </a:solidFill>
+                <a:latin typeface="Arial" pitchFamily="34" charset="0"/>
+                <a:ea typeface="Arial" pitchFamily="34" charset="-122"/>
+                <a:cs typeface="Arial" pitchFamily="34" charset="-120"/>
+              </a:rPr>
+              <a:t> Same thing. Don't dwell — Day 7 has the full algebra.</a:t>
             </a:r>
             <a:endParaRPr lang="en-US" sz="1200" dirty="0"/>
           </a:p>
@@ -5242,7 +9445,7 @@
       </p:sp>
       <p:sp>
         <p:nvSpPr>
-          <p:cNvPr id="5" name="Text 3"/>
+          <p:cNvPr id="6" name="Text 4"/>
           <p:cNvSpPr/>
           <p:nvPr/>
         </p:nvSpPr>
@@ -5392,7 +9595,7 @@
                 <a:ea typeface="Georgia" pitchFamily="34" charset="-122"/>
                 <a:cs typeface="Georgia" pitchFamily="34" charset="-120"/>
               </a:rPr>
-              <a:t>Differentiation</a:t>
+              <a:t>Core (15 min) — Nikhilam at the single-digit level (cont.)</a:t>
             </a:r>
             <a:endParaRPr lang="en-US" sz="1800" dirty="0"/>
           </a:p>
@@ -5407,7 +9610,7 @@
         <p:spPr>
           <a:xfrm>
             <a:off x="634901" y="883593"/>
-            <a:ext cx="8102798" cy="769441"/>
+            <a:ext cx="8102798" cy="1123652"/>
           </a:xfrm>
           <a:prstGeom prst="rect">
             <a:avLst/>
@@ -5438,7 +9641,7 @@
                 <a:ea typeface="Arial" pitchFamily="34" charset="-122"/>
                 <a:cs typeface="Arial" pitchFamily="34" charset="-120"/>
               </a:rPr>
-              <a:t>Tier up:</a:t>
+              <a:t>The hand-trick (optional, fun).</a:t>
             </a:r>
             <a:pPr algn="l" indent="0" marL="0">
               <a:lnSpc>
@@ -5458,7 +9661,7 @@
                 <a:ea typeface="Arial" pitchFamily="34" charset="-122"/>
                 <a:cs typeface="Arial" pitchFamily="34" charset="-120"/>
               </a:rPr>
-              <a:t> Try </a:t>
+              <a:t> Hold up both hands. For </a:t>
             </a:r>
             <a:pPr algn="l" indent="0" marL="0">
               <a:lnSpc>
@@ -5478,7 +9681,7 @@
                 <a:ea typeface="Arial" pitchFamily="34" charset="-122"/>
                 <a:cs typeface="Arial" pitchFamily="34" charset="-120"/>
               </a:rPr>
-              <a:t>9 × 9 × 9</a:t>
+              <a:t>7 × 8</a:t>
             </a:r>
             <a:pPr algn="l" indent="0" marL="0">
               <a:lnSpc>
@@ -5498,211 +9701,7 @@
                 <a:ea typeface="Arial" pitchFamily="34" charset="-122"/>
                 <a:cs typeface="Arial" pitchFamily="34" charset="-120"/>
               </a:rPr>
-              <a:t> (chained) or apply the method to base 20 — see if </a:t>
-            </a:r>
-            <a:pPr algn="l" indent="0" marL="0">
-              <a:lnSpc>
-                <a:spcPts val="1620"/>
-              </a:lnSpc>
-              <a:spcAft>
-                <a:spcPts val="300"/>
-              </a:spcAft>
-              <a:buNone/>
-            </a:pPr>
-            <a:r>
-              <a:rPr lang="en-US" sz="1200" dirty="0">
-                <a:solidFill>
-                  <a:srgbClr val="1C2833"/>
-                </a:solidFill>
-                <a:latin typeface="Arial" pitchFamily="34" charset="0"/>
-                <a:ea typeface="Arial" pitchFamily="34" charset="-122"/>
-                <a:cs typeface="Arial" pitchFamily="34" charset="-120"/>
-              </a:rPr>
-              <a:t>19 × 18</a:t>
-            </a:r>
-            <a:pPr algn="l" indent="0" marL="0">
-              <a:lnSpc>
-                <a:spcPts val="1620"/>
-              </a:lnSpc>
-              <a:spcAft>
-                <a:spcPts val="300"/>
-              </a:spcAft>
-              <a:buNone/>
-            </a:pPr>
-            <a:r>
-              <a:rPr lang="en-US" sz="1200" dirty="0">
-                <a:solidFill>
-                  <a:srgbClr val="1C2833"/>
-                </a:solidFill>
-                <a:latin typeface="Arial" pitchFamily="34" charset="0"/>
-                <a:ea typeface="Arial" pitchFamily="34" charset="-122"/>
-                <a:cs typeface="Arial" pitchFamily="34" charset="-120"/>
-              </a:rPr>
-              <a:t> works the same way with base 20. (Yes — deficits 1, 2 → left 17, right 2 → 17 × 20 + 2 = 342. ✓)</a:t>
-            </a:r>
-            <a:endParaRPr lang="en-US" sz="1200" dirty="0"/>
-          </a:p>
-          <a:p>
-            <a:pPr algn="l" marL="342900" indent="-342900">
-              <a:lnSpc>
-                <a:spcPts val="1620"/>
-              </a:lnSpc>
-              <a:spcAft>
-                <a:spcPts val="300"/>
-              </a:spcAft>
-              <a:buSzPct val="100000"/>
-              <a:buChar char="•"/>
-            </a:pPr>
-            <a:r>
-              <a:rPr lang="en-US" sz="1200" b="1" dirty="0">
-                <a:solidFill>
-                  <a:srgbClr val="1C2833"/>
-                </a:solidFill>
-                <a:latin typeface="Arial" pitchFamily="34" charset="0"/>
-                <a:ea typeface="Arial" pitchFamily="34" charset="-122"/>
-                <a:cs typeface="Arial" pitchFamily="34" charset="-120"/>
-              </a:rPr>
-              <a:t>Tier down:</a:t>
-            </a:r>
-            <a:pPr algn="l" indent="0" marL="0">
-              <a:lnSpc>
-                <a:spcPts val="1620"/>
-              </a:lnSpc>
-              <a:spcAft>
-                <a:spcPts val="300"/>
-              </a:spcAft>
-              <a:buNone/>
-            </a:pPr>
-            <a:r>
-              <a:rPr lang="en-US" sz="1200" dirty="0">
-                <a:solidFill>
-                  <a:srgbClr val="1C2833"/>
-                </a:solidFill>
-                <a:latin typeface="Arial" pitchFamily="34" charset="0"/>
-                <a:ea typeface="Arial" pitchFamily="34" charset="-122"/>
-                <a:cs typeface="Arial" pitchFamily="34" charset="-120"/>
-              </a:rPr>
-              <a:t> Stick to </a:t>
-            </a:r>
-            <a:pPr algn="l" indent="0" marL="0">
-              <a:lnSpc>
-                <a:spcPts val="1620"/>
-              </a:lnSpc>
-              <a:spcAft>
-                <a:spcPts val="300"/>
-              </a:spcAft>
-              <a:buNone/>
-            </a:pPr>
-            <a:r>
-              <a:rPr lang="en-US" sz="1200" dirty="0">
-                <a:solidFill>
-                  <a:srgbClr val="1C2833"/>
-                </a:solidFill>
-                <a:latin typeface="Arial" pitchFamily="34" charset="0"/>
-                <a:ea typeface="Arial" pitchFamily="34" charset="-122"/>
-                <a:cs typeface="Arial" pitchFamily="34" charset="-120"/>
-              </a:rPr>
-              <a:t>8 × 9</a:t>
-            </a:r>
-            <a:pPr algn="l" indent="0" marL="0">
-              <a:lnSpc>
-                <a:spcPts val="1620"/>
-              </a:lnSpc>
-              <a:spcAft>
-                <a:spcPts val="300"/>
-              </a:spcAft>
-              <a:buNone/>
-            </a:pPr>
-            <a:r>
-              <a:rPr lang="en-US" sz="1200" dirty="0">
-                <a:solidFill>
-                  <a:srgbClr val="1C2833"/>
-                </a:solidFill>
-                <a:latin typeface="Arial" pitchFamily="34" charset="0"/>
-                <a:ea typeface="Arial" pitchFamily="34" charset="-122"/>
-                <a:cs typeface="Arial" pitchFamily="34" charset="-120"/>
-              </a:rPr>
-              <a:t>, </a:t>
-            </a:r>
-            <a:pPr algn="l" indent="0" marL="0">
-              <a:lnSpc>
-                <a:spcPts val="1620"/>
-              </a:lnSpc>
-              <a:spcAft>
-                <a:spcPts val="300"/>
-              </a:spcAft>
-              <a:buNone/>
-            </a:pPr>
-            <a:r>
-              <a:rPr lang="en-US" sz="1200" dirty="0">
-                <a:solidFill>
-                  <a:srgbClr val="1C2833"/>
-                </a:solidFill>
-                <a:latin typeface="Arial" pitchFamily="34" charset="0"/>
-                <a:ea typeface="Arial" pitchFamily="34" charset="-122"/>
-                <a:cs typeface="Arial" pitchFamily="34" charset="-120"/>
-              </a:rPr>
-              <a:t>9 × 9</a:t>
-            </a:r>
-            <a:pPr algn="l" indent="0" marL="0">
-              <a:lnSpc>
-                <a:spcPts val="1620"/>
-              </a:lnSpc>
-              <a:spcAft>
-                <a:spcPts val="300"/>
-              </a:spcAft>
-              <a:buNone/>
-            </a:pPr>
-            <a:r>
-              <a:rPr lang="en-US" sz="1200" dirty="0">
-                <a:solidFill>
-                  <a:srgbClr val="1C2833"/>
-                </a:solidFill>
-                <a:latin typeface="Arial" pitchFamily="34" charset="0"/>
-                <a:ea typeface="Arial" pitchFamily="34" charset="-122"/>
-                <a:cs typeface="Arial" pitchFamily="34" charset="-120"/>
-              </a:rPr>
-              <a:t>, </a:t>
-            </a:r>
-            <a:pPr algn="l" indent="0" marL="0">
-              <a:lnSpc>
-                <a:spcPts val="1620"/>
-              </a:lnSpc>
-              <a:spcAft>
-                <a:spcPts val="300"/>
-              </a:spcAft>
-              <a:buNone/>
-            </a:pPr>
-            <a:r>
-              <a:rPr lang="en-US" sz="1200" dirty="0">
-                <a:solidFill>
-                  <a:srgbClr val="1C2833"/>
-                </a:solidFill>
-                <a:latin typeface="Arial" pitchFamily="34" charset="0"/>
-                <a:ea typeface="Arial" pitchFamily="34" charset="-122"/>
-                <a:cs typeface="Arial" pitchFamily="34" charset="-120"/>
-              </a:rPr>
-              <a:t>7 × 8</a:t>
-            </a:r>
-            <a:pPr algn="l" indent="0" marL="0">
-              <a:lnSpc>
-                <a:spcPts val="1620"/>
-              </a:lnSpc>
-              <a:spcAft>
-                <a:spcPts val="300"/>
-              </a:spcAft>
-              <a:buNone/>
-            </a:pPr>
-            <a:r>
-              <a:rPr lang="en-US" sz="1200" dirty="0">
-                <a:solidFill>
-                  <a:srgbClr val="1C2833"/>
-                </a:solidFill>
-                <a:latin typeface="Arial" pitchFamily="34" charset="0"/>
-                <a:ea typeface="Arial" pitchFamily="34" charset="-122"/>
-                <a:cs typeface="Arial" pitchFamily="34" charset="-120"/>
-              </a:rPr>
-              <a:t> for today. Memorise these specific three; we'll widen the range tomorrow.</a:t>
+              <a:t>: fold down 2 fingers on the left hand (deficit of 7 from 10 = 3, so keep 7 fingers up; or fold down 7 − 5 = 2 on the left) and 3 on the right (deficit of 8 = 2, so fold down 2 + 3 = ... use whichever finger-mnemonic the class likes). The number of fingers DOWN × 10 = the tens; the number of fingers UP on each hand multiplied = the units. (This is a folk technique that maps to the Nikhilam algebra.) Show once, don't drill it.</a:t>
             </a:r>
             <a:endParaRPr lang="en-US" sz="1200" dirty="0"/>
           </a:p>
